--- a/10-Knowledge-Products/KP1-GEA/videos/module_1/en/decks/KP1_M1_1.5_Deck_v0.2.pptx
+++ b/10-Knowledge-Products/KP1-GEA/videos/module_1/en/decks/KP1_M1_1.5_Deck_v0.2.pptx
@@ -14,14 +14,14 @@
     <p:handoutMasterId r:id="rId47"/>
   </p:handoutMasterIdLst>
   <p:sldIdLst>
-    <p:sldId id="2681" r:id="rId8"/>
-    <p:sldId id="2723" r:id="rId45"/>
-    <p:sldId id="2724" r:id="rId17"/>
-    <p:sldId id="2725" r:id="rId16"/>
-    <p:sldId id="2726" r:id="rId15"/>
     <p:sldId id="2727" r:id="rId14"/>
     <p:sldId id="2728" r:id="rId13"/>
     <p:sldId id="2729" r:id="rId12"/>
+    <p:sldId id="2730" r:id="rId11"/>
+    <p:sldId id="2731" r:id="rId10"/>
+    <p:sldId id="2732" r:id="rId54"/>
+    <p:sldId id="2733" r:id="rId55"/>
+    <p:sldId id="2734" r:id="rId56"/>
   </p:sldIdLst>
   <p:sldSz cx="12192000" cy="6858000"/>
   <p:notesSz cx="6858000" cy="9144000"/>
@@ -888,398 +888,6 @@
 </p:notesMaster>
 </file>
 
-<file path=ppt/notesSlides/notesSlide21.xml><?xml version="1.0" encoding="utf-8"?>
-<p:notes xmlns:a="http://schemas.openxmlformats.org/drawingml/2006/main" xmlns:p="http://schemas.openxmlformats.org/presentationml/2006/main" xmlns:r="http://schemas.openxmlformats.org/officeDocument/2006/relationships">
-  <p:cSld>
-    <p:spTree>
-      <p:nvGrpSpPr>
-        <p:cNvPr id="1" name=""/>
-        <p:cNvGrpSpPr/>
-        <p:nvPr/>
-      </p:nvGrpSpPr>
-      <p:grpSpPr>
-        <a:xfrm>
-          <a:off x="0" y="0"/>
-          <a:ext cx="0" cy="0"/>
-          <a:chOff x="0" y="0"/>
-          <a:chExt cx="0" cy="0"/>
-        </a:xfrm>
-      </p:grpSpPr>
-      <p:sp>
-        <p:nvSpPr>
-          <p:cNvPr id="2" name="Slide Image Placeholder 1"/>
-          <p:cNvSpPr>
-            <a:spLocks noGrp="1"/>
-          </p:cNvSpPr>
-          <p:nvPr>
-            <p:ph type="sldImg" idx="2"/>
-          </p:nvPr>
-        </p:nvSpPr>
-        <p:spPr/>
-      </p:sp>
-      <p:sp>
-        <p:nvSpPr>
-          <p:cNvPr id="3" name="Notes Placeholder 2"/>
-          <p:cNvSpPr>
-            <a:spLocks noGrp="1"/>
-          </p:cNvSpPr>
-          <p:nvPr>
-            <p:ph type="body" idx="3" sz="quarter"/>
-          </p:nvPr>
-        </p:nvSpPr>
-        <p:spPr/>
-        <p:txBody>
-          <a:bodyPr/>
-          <a:lstStyle/>
-          <a:p>
-            <a:r>
-              <a:t>Title card for standalone video 1.5. Content slides are identical to the corresponding section of the combined deck KP1_M1_Deck_v0.2.pptx; voice-over is in each slide’s notes.</a:t>
-            </a:r>
-          </a:p>
-        </p:txBody>
-      </p:sp>
-      <p:sp>
-        <p:nvSpPr>
-          <p:cNvPr id="4" name="Slide Number Placeholder 3"/>
-          <p:cNvSpPr>
-            <a:spLocks noGrp="1"/>
-          </p:cNvSpPr>
-          <p:nvPr>
-            <p:ph type="sldNum" idx="5" sz="quarter"/>
-          </p:nvPr>
-        </p:nvSpPr>
-        <p:spPr/>
-      </p:sp>
-    </p:spTree>
-  </p:cSld>
-  <p:clrMapOvr>
-    <a:masterClrMapping/>
-  </p:clrMapOvr>
-</p:notes>
-</file>
-
-<file path=ppt/notesSlides/notesSlide30.xml><?xml version="1.0" encoding="utf-8"?>
-<p:notes xmlns:a="http://schemas.openxmlformats.org/drawingml/2006/main" xmlns:p="http://schemas.openxmlformats.org/presentationml/2006/main" xmlns:r="http://schemas.openxmlformats.org/officeDocument/2006/relationships">
-  <p:cSld>
-    <p:spTree>
-      <p:nvGrpSpPr>
-        <p:cNvPr id="1" name=""/>
-        <p:cNvGrpSpPr/>
-        <p:nvPr/>
-      </p:nvGrpSpPr>
-      <p:grpSpPr>
-        <a:xfrm>
-          <a:off x="0" y="0"/>
-          <a:ext cx="0" cy="0"/>
-          <a:chOff x="0" y="0"/>
-          <a:chExt cx="0" cy="0"/>
-        </a:xfrm>
-      </p:grpSpPr>
-      <p:sp>
-        <p:nvSpPr>
-          <p:cNvPr id="2" name="Slide Image Placeholder 1"/>
-          <p:cNvSpPr>
-            <a:spLocks noGrp="1"/>
-          </p:cNvSpPr>
-          <p:nvPr>
-            <p:ph type="sldImg" idx="2"/>
-          </p:nvPr>
-        </p:nvSpPr>
-        <p:spPr/>
-      </p:sp>
-      <p:sp>
-        <p:nvSpPr>
-          <p:cNvPr id="3" name="Notes Placeholder 2"/>
-          <p:cNvSpPr>
-            <a:spLocks noGrp="1"/>
-          </p:cNvSpPr>
-          <p:nvPr>
-            <p:ph type="body" idx="3" sz="quarter"/>
-          </p:nvPr>
-        </p:nvSpPr>
-        <p:spPr/>
-        <p:txBody>
-          <a:bodyPr/>
-          <a:lstStyle/>
-          <a:p>
-            <a:r>
-              <a:t>VO, slide 1: An Enterprise Architecture is the agreed picture of your government. Which framework do you use to draw it? You have two paths — design one for your country from scratch, or anchor on one that already exists.</a:t>
-            </a:r>
-          </a:p>
-        </p:txBody>
-      </p:sp>
-      <p:sp>
-        <p:nvSpPr>
-          <p:cNvPr id="4" name="Slide Number Placeholder 3"/>
-          <p:cNvSpPr>
-            <a:spLocks noGrp="1"/>
-          </p:cNvSpPr>
-          <p:nvPr>
-            <p:ph type="sldNum" idx="5" sz="quarter"/>
-          </p:nvPr>
-        </p:nvSpPr>
-        <p:spPr/>
-      </p:sp>
-    </p:spTree>
-  </p:cSld>
-  <p:clrMapOvr>
-    <a:masterClrMapping/>
-  </p:clrMapOvr>
-</p:notes>
-</file>
-
-<file path=ppt/notesSlides/notesSlide31.xml><?xml version="1.0" encoding="utf-8"?>
-<p:notes xmlns:a="http://schemas.openxmlformats.org/drawingml/2006/main" xmlns:p="http://schemas.openxmlformats.org/presentationml/2006/main" xmlns:r="http://schemas.openxmlformats.org/officeDocument/2006/relationships">
-  <p:cSld>
-    <p:spTree>
-      <p:nvGrpSpPr>
-        <p:cNvPr id="1" name=""/>
-        <p:cNvGrpSpPr/>
-        <p:nvPr/>
-      </p:nvGrpSpPr>
-      <p:grpSpPr>
-        <a:xfrm>
-          <a:off x="0" y="0"/>
-          <a:ext cx="0" cy="0"/>
-          <a:chOff x="0" y="0"/>
-          <a:chExt cx="0" cy="0"/>
-        </a:xfrm>
-      </p:grpSpPr>
-      <p:sp>
-        <p:nvSpPr>
-          <p:cNvPr id="2" name="Slide Image Placeholder 1"/>
-          <p:cNvSpPr>
-            <a:spLocks noGrp="1"/>
-          </p:cNvSpPr>
-          <p:nvPr>
-            <p:ph type="sldImg" idx="2"/>
-          </p:nvPr>
-        </p:nvSpPr>
-        <p:spPr/>
-      </p:sp>
-      <p:sp>
-        <p:nvSpPr>
-          <p:cNvPr id="3" name="Notes Placeholder 2"/>
-          <p:cNvSpPr>
-            <a:spLocks noGrp="1"/>
-          </p:cNvSpPr>
-          <p:nvPr>
-            <p:ph type="body" idx="3" sz="quarter"/>
-          </p:nvPr>
-        </p:nvSpPr>
-        <p:spPr/>
-        <p:txBody>
-          <a:bodyPr/>
-          <a:lstStyle/>
-          <a:p>
-            <a:r>
-              <a:t>Bar length is the visual: the long grey bar is the time you spend before architecture work starts; the short blue bar is PAERA. Do not label the top bar pejoratively — the lengths do the work.</a:t>
-            </a:r>
-          </a:p>
-          <a:p/>
-          <a:p>
-            <a:r>
-              <a:t>VO: The first path: hire consultants to design an EA framework specifically for your country — new terms, new principles, a new method. Twelve to eighteen months before any architect has drawn a single picture of any ministry. You have paid for groundwork, not for architecture. The second path: anchor on a framework that already exists, built for the public-sector use case, with the groundwork done, so your team starts on day one. PAERA is that framework — the Public Administration Ecosystem Reference Architecture, published in 2024 under GovStack.</a:t>
-            </a:r>
-          </a:p>
-        </p:txBody>
-      </p:sp>
-      <p:sp>
-        <p:nvSpPr>
-          <p:cNvPr id="4" name="Slide Number Placeholder 3"/>
-          <p:cNvSpPr>
-            <a:spLocks noGrp="1"/>
-          </p:cNvSpPr>
-          <p:nvPr>
-            <p:ph type="sldNum" idx="5" sz="quarter"/>
-          </p:nvPr>
-        </p:nvSpPr>
-        <p:spPr/>
-      </p:sp>
-    </p:spTree>
-  </p:cSld>
-  <p:clrMapOvr>
-    <a:masterClrMapping/>
-  </p:clrMapOvr>
-</p:notes>
-</file>
-
-<file path=ppt/notesSlides/notesSlide32.xml><?xml version="1.0" encoding="utf-8"?>
-<p:notes xmlns:a="http://schemas.openxmlformats.org/drawingml/2006/main" xmlns:p="http://schemas.openxmlformats.org/presentationml/2006/main" xmlns:r="http://schemas.openxmlformats.org/officeDocument/2006/relationships">
-  <p:cSld>
-    <p:spTree>
-      <p:nvGrpSpPr>
-        <p:cNvPr id="1" name=""/>
-        <p:cNvGrpSpPr/>
-        <p:nvPr/>
-      </p:nvGrpSpPr>
-      <p:grpSpPr>
-        <a:xfrm>
-          <a:off x="0" y="0"/>
-          <a:ext cx="0" cy="0"/>
-          <a:chOff x="0" y="0"/>
-          <a:chExt cx="0" cy="0"/>
-        </a:xfrm>
-      </p:grpSpPr>
-      <p:sp>
-        <p:nvSpPr>
-          <p:cNvPr id="2" name="Slide Image Placeholder 1"/>
-          <p:cNvSpPr>
-            <a:spLocks noGrp="1"/>
-          </p:cNvSpPr>
-          <p:nvPr>
-            <p:ph type="sldImg" idx="2"/>
-          </p:nvPr>
-        </p:nvSpPr>
-        <p:spPr/>
-      </p:sp>
-      <p:sp>
-        <p:nvSpPr>
-          <p:cNvPr id="3" name="Notes Placeholder 2"/>
-          <p:cNvSpPr>
-            <a:spLocks noGrp="1"/>
-          </p:cNvSpPr>
-          <p:nvPr>
-            <p:ph type="body" idx="3" sz="quarter"/>
-          </p:nvPr>
-        </p:nvSpPr>
-        <p:spPr/>
-        <p:txBody>
-          <a:bodyPr/>
-          <a:lstStyle/>
-          <a:p>
-            <a:r>
-              <a:t>Rows reveal one at a time. This is the substantive payload of video 1.5.</a:t>
-            </a:r>
-          </a:p>
-          <a:p/>
-          <a:p>
-            <a:r>
-              <a:t>VO: Five things PAERA gives your team on day one. Five things you do not pay to invent.</a:t>
-            </a:r>
-          </a:p>
-          <a:p/>
-          <a:p>
-            <a:r>
-              <a:t>VO: First, a way to organise ministries and authorities. Every government body in your country fits one of three types — a policy unit, a regulatory agency, a service-delivery authority — with a small set of supporting elements like state registries. Your architects do not spend three months arguing about which type each ministry is. The classification is published.</a:t>
-            </a:r>
-          </a:p>
-          <a:p/>
-          <a:p>
-            <a:r>
-              <a:t>VO: Second, plain words for the basic terms. Capability. Service. Application. Data domain. Each one defined, in plain language. Day one, your architects are using the vocabulary, not designing it.</a:t>
-            </a:r>
-          </a:p>
-          <a:p/>
-          <a:p>
-            <a:r>
-              <a:t>VO: Third, a library of common building blocks. Identity. Payments. Information sharing. Registries. Each one is a published specification with working examples. When your team needs to design a national identity system, they reach for the pattern. They do not invent it from scratch.</a:t>
-            </a:r>
-          </a:p>
-          <a:p/>
-          <a:p>
-            <a:r>
-              <a:t>VO: Fourth, a set of architectural principles. Ten of them — from rule of law, through security and privacy, to user-centred design. Already debated across many countries. You extend them for your country's context. You do not draft them.</a:t>
-            </a:r>
-          </a:p>
-          <a:p/>
-          <a:p>
-            <a:r>
-              <a:t>VO: Fifth, a way to run the work. The lifecycle — Discover, Assess, Adapt, Plan, Execute and Govern — already exists, with roles, decisions and sign-off points defined per phase. We walk it in the next video.</a:t>
-            </a:r>
-          </a:p>
-        </p:txBody>
-      </p:sp>
-      <p:sp>
-        <p:nvSpPr>
-          <p:cNvPr id="4" name="Slide Number Placeholder 3"/>
-          <p:cNvSpPr>
-            <a:spLocks noGrp="1"/>
-          </p:cNvSpPr>
-          <p:nvPr>
-            <p:ph type="sldNum" idx="5" sz="quarter"/>
-          </p:nvPr>
-        </p:nvSpPr>
-        <p:spPr/>
-      </p:sp>
-    </p:spTree>
-  </p:cSld>
-  <p:clrMapOvr>
-    <a:masterClrMapping/>
-  </p:clrMapOvr>
-</p:notes>
-</file>
-
-<file path=ppt/notesSlides/notesSlide33.xml><?xml version="1.0" encoding="utf-8"?>
-<p:notes xmlns:a="http://schemas.openxmlformats.org/drawingml/2006/main" xmlns:p="http://schemas.openxmlformats.org/presentationml/2006/main" xmlns:r="http://schemas.openxmlformats.org/officeDocument/2006/relationships">
-  <p:cSld>
-    <p:spTree>
-      <p:nvGrpSpPr>
-        <p:cNvPr id="1" name=""/>
-        <p:cNvGrpSpPr/>
-        <p:nvPr/>
-      </p:nvGrpSpPr>
-      <p:grpSpPr>
-        <a:xfrm>
-          <a:off x="0" y="0"/>
-          <a:ext cx="0" cy="0"/>
-          <a:chOff x="0" y="0"/>
-          <a:chExt cx="0" cy="0"/>
-        </a:xfrm>
-      </p:grpSpPr>
-      <p:sp>
-        <p:nvSpPr>
-          <p:cNvPr id="2" name="Slide Image Placeholder 1"/>
-          <p:cNvSpPr>
-            <a:spLocks noGrp="1"/>
-          </p:cNvSpPr>
-          <p:nvPr>
-            <p:ph type="sldImg" idx="2"/>
-          </p:nvPr>
-        </p:nvSpPr>
-        <p:spPr/>
-      </p:sp>
-      <p:sp>
-        <p:nvSpPr>
-          <p:cNvPr id="3" name="Notes Placeholder 2"/>
-          <p:cNvSpPr>
-            <a:spLocks noGrp="1"/>
-          </p:cNvSpPr>
-          <p:nvPr>
-            <p:ph type="body" idx="3" sz="quarter"/>
-          </p:nvPr>
-        </p:nvSpPr>
-        <p:spPr/>
-        <p:txBody>
-          <a:bodyPr/>
-          <a:lstStyle/>
-          <a:p>
-            <a:r>
-              <a:t>VO: PAERA works across sectors. The same framework applies to education, to health, to social protection, to agriculture. Once your country builds the EA muscle for one sector, every next sector reuses the same investment. The framework does not get re-bought, re-trained, re-customised. The second sector is cheaper than the first. The third is cheaper still.</a:t>
-            </a:r>
-          </a:p>
-        </p:txBody>
-      </p:sp>
-      <p:sp>
-        <p:nvSpPr>
-          <p:cNvPr id="4" name="Slide Number Placeholder 3"/>
-          <p:cNvSpPr>
-            <a:spLocks noGrp="1"/>
-          </p:cNvSpPr>
-          <p:nvPr>
-            <p:ph type="sldNum" idx="5" sz="quarter"/>
-          </p:nvPr>
-        </p:nvSpPr>
-        <p:spPr/>
-      </p:sp>
-    </p:spTree>
-  </p:cSld>
-  <p:clrMapOvr>
-    <a:masterClrMapping/>
-  </p:clrMapOvr>
-</p:notes>
-</file>
-
 <file path=ppt/notesSlides/notesSlide34.xml><?xml version="1.0" encoding="utf-8"?>
 <p:notes xmlns:a="http://schemas.openxmlformats.org/drawingml/2006/main" xmlns:p="http://schemas.openxmlformats.org/presentationml/2006/main" xmlns:r="http://schemas.openxmlformats.org/officeDocument/2006/relationships">
   <p:cSld>
@@ -1325,13 +933,7 @@
           <a:lstStyle/>
           <a:p>
             <a:r>
-              <a:t>Keep this factual, not promotional — these are real assets a country gets access to, not buzzwords.</a:t>
-            </a:r>
-          </a:p>
-          <a:p/>
-          <a:p>
-            <a:r>
-              <a:t>VO: PAERA is not a standalone document. It connects to a working network — building block specifications, a marketplace of vendor-built implementations that have been checked for compliance, a certification programme, a sandbox you can test in, a shared knowledge base. Adopting PAERA means joining a network of countries and partners actively building these resources together.</a:t>
+              <a:t>Title card — the cold open. The hosts name the module, the video number, the title and the single message on this slide; no scripted narration. Hold until the opener begins; the opener is narrated on the next slide.</a:t>
             </a:r>
           </a:p>
         </p:txBody>
@@ -1401,13 +1003,7 @@
           <a:lstStyle/>
           <a:p>
             <a:r>
-              <a:t>PRACTICE BOX (on-screen only — never read it, never paraphrase it, never point at it). It replaces the narrated handoff: this video ends on the recap and the Sources slide.</a:t>
-            </a:r>
-          </a:p>
-          <a:p/>
-          <a:p>
-            <a:r>
-              <a:t>VO: PAERA is not a vendor choice. It is the choice to start with the work other countries have already done — so your team spends their time on what is specific to your country.</a:t>
+              <a:t>VO: An Enterprise Architecture is the agreed picture of your government. Which framework do you use to draw it? You have two paths — design one for your country from scratch, or anchor on one that already exists.</a:t>
             </a:r>
           </a:p>
         </p:txBody>
@@ -1433,6 +1029,410 @@
 </file>
 
 <file path=ppt/notesSlides/notesSlide36.xml><?xml version="1.0" encoding="utf-8"?>
+<p:notes xmlns:a="http://schemas.openxmlformats.org/drawingml/2006/main" xmlns:p="http://schemas.openxmlformats.org/presentationml/2006/main" xmlns:r="http://schemas.openxmlformats.org/officeDocument/2006/relationships">
+  <p:cSld>
+    <p:spTree>
+      <p:nvGrpSpPr>
+        <p:cNvPr id="1" name=""/>
+        <p:cNvGrpSpPr/>
+        <p:nvPr/>
+      </p:nvGrpSpPr>
+      <p:grpSpPr>
+        <a:xfrm>
+          <a:off x="0" y="0"/>
+          <a:ext cx="0" cy="0"/>
+          <a:chOff x="0" y="0"/>
+          <a:chExt cx="0" cy="0"/>
+        </a:xfrm>
+      </p:grpSpPr>
+      <p:sp>
+        <p:nvSpPr>
+          <p:cNvPr id="2" name="Slide Image Placeholder 1"/>
+          <p:cNvSpPr>
+            <a:spLocks noGrp="1"/>
+          </p:cNvSpPr>
+          <p:nvPr>
+            <p:ph type="sldImg" idx="2"/>
+          </p:nvPr>
+        </p:nvSpPr>
+        <p:spPr/>
+      </p:sp>
+      <p:sp>
+        <p:nvSpPr>
+          <p:cNvPr id="3" name="Notes Placeholder 2"/>
+          <p:cNvSpPr>
+            <a:spLocks noGrp="1"/>
+          </p:cNvSpPr>
+          <p:nvPr>
+            <p:ph type="body" idx="3" sz="quarter"/>
+          </p:nvPr>
+        </p:nvSpPr>
+        <p:spPr/>
+        <p:txBody>
+          <a:bodyPr/>
+          <a:lstStyle/>
+          <a:p>
+            <a:r>
+              <a:t>Bar length is the visual: the long grey bar is the time you spend before architecture work starts; the short blue bar is PAERA. Do not label the top bar pejoratively — the lengths do the work.</a:t>
+            </a:r>
+          </a:p>
+          <a:p/>
+          <a:p>
+            <a:r>
+              <a:t>VO: The first path: hire consultants to design an EA framework specifically for your country — new terms, new principles, a new method. Twelve to eighteen months before any architect has drawn a single picture of any ministry. You have paid for groundwork, not for architecture. The second path: anchor on a framework that already exists, built for the public-sector use case, with the groundwork done, so your team starts on day one. PAERA is that framework — the Public Administration Ecosystem Reference Architecture, published in 2024 under GovStack.</a:t>
+            </a:r>
+          </a:p>
+        </p:txBody>
+      </p:sp>
+      <p:sp>
+        <p:nvSpPr>
+          <p:cNvPr id="4" name="Slide Number Placeholder 3"/>
+          <p:cNvSpPr>
+            <a:spLocks noGrp="1"/>
+          </p:cNvSpPr>
+          <p:nvPr>
+            <p:ph type="sldNum" idx="5" sz="quarter"/>
+          </p:nvPr>
+        </p:nvSpPr>
+        <p:spPr/>
+      </p:sp>
+    </p:spTree>
+  </p:cSld>
+  <p:clrMapOvr>
+    <a:masterClrMapping/>
+  </p:clrMapOvr>
+</p:notes>
+</file>
+
+<file path=ppt/notesSlides/notesSlide37.xml><?xml version="1.0" encoding="utf-8"?>
+<p:notes xmlns:a="http://schemas.openxmlformats.org/drawingml/2006/main" xmlns:p="http://schemas.openxmlformats.org/presentationml/2006/main" xmlns:r="http://schemas.openxmlformats.org/officeDocument/2006/relationships">
+  <p:cSld>
+    <p:spTree>
+      <p:nvGrpSpPr>
+        <p:cNvPr id="1" name=""/>
+        <p:cNvGrpSpPr/>
+        <p:nvPr/>
+      </p:nvGrpSpPr>
+      <p:grpSpPr>
+        <a:xfrm>
+          <a:off x="0" y="0"/>
+          <a:ext cx="0" cy="0"/>
+          <a:chOff x="0" y="0"/>
+          <a:chExt cx="0" cy="0"/>
+        </a:xfrm>
+      </p:grpSpPr>
+      <p:sp>
+        <p:nvSpPr>
+          <p:cNvPr id="2" name="Slide Image Placeholder 1"/>
+          <p:cNvSpPr>
+            <a:spLocks noGrp="1"/>
+          </p:cNvSpPr>
+          <p:nvPr>
+            <p:ph type="sldImg" idx="2"/>
+          </p:nvPr>
+        </p:nvSpPr>
+        <p:spPr/>
+      </p:sp>
+      <p:sp>
+        <p:nvSpPr>
+          <p:cNvPr id="3" name="Notes Placeholder 2"/>
+          <p:cNvSpPr>
+            <a:spLocks noGrp="1"/>
+          </p:cNvSpPr>
+          <p:nvPr>
+            <p:ph type="body" idx="3" sz="quarter"/>
+          </p:nvPr>
+        </p:nvSpPr>
+        <p:spPr/>
+        <p:txBody>
+          <a:bodyPr/>
+          <a:lstStyle/>
+          <a:p>
+            <a:r>
+              <a:t>Rows reveal one at a time. This is the substantive payload of video 1.5.</a:t>
+            </a:r>
+          </a:p>
+          <a:p/>
+          <a:p>
+            <a:r>
+              <a:t>VO: Five things PAERA gives your team on day one. Five things you do not pay to invent.</a:t>
+            </a:r>
+          </a:p>
+          <a:p/>
+          <a:p>
+            <a:r>
+              <a:t>VO: First, a way to organise ministries and authorities. Every government body in your country fits one of three types — a policy unit, a regulatory agency, a service-delivery authority — with a small set of supporting elements like state registries. Your architects do not spend three months arguing about which type each ministry is. The classification is published.</a:t>
+            </a:r>
+          </a:p>
+          <a:p/>
+          <a:p>
+            <a:r>
+              <a:t>VO: Second, plain words for the basic terms. Capability. Service. Application. Data domain. Each one defined, in plain language. Day one, your architects are using the vocabulary, not designing it.</a:t>
+            </a:r>
+          </a:p>
+          <a:p/>
+          <a:p>
+            <a:r>
+              <a:t>VO: Third, a library of common building blocks. Identity. Payments. Information sharing. Registries. Each one is a published specification with working examples. When your team needs to design a national identity system, they reach for the pattern. They do not invent it from scratch.</a:t>
+            </a:r>
+          </a:p>
+          <a:p/>
+          <a:p>
+            <a:r>
+              <a:t>VO: Fourth, a set of architectural principles. Ten of them — from rule of law, through security and privacy, to user-centred design. Already debated across many countries. You extend them for your country's context. You do not draft them.</a:t>
+            </a:r>
+          </a:p>
+          <a:p/>
+          <a:p>
+            <a:r>
+              <a:t>VO: Fifth, a way to run the work. The lifecycle — Discover, Assess, Adapt, Plan, Execute and Govern — already exists, with roles, decisions and sign-off points defined per phase. We walk it in the next video.</a:t>
+            </a:r>
+          </a:p>
+        </p:txBody>
+      </p:sp>
+      <p:sp>
+        <p:nvSpPr>
+          <p:cNvPr id="4" name="Slide Number Placeholder 3"/>
+          <p:cNvSpPr>
+            <a:spLocks noGrp="1"/>
+          </p:cNvSpPr>
+          <p:nvPr>
+            <p:ph type="sldNum" idx="5" sz="quarter"/>
+          </p:nvPr>
+        </p:nvSpPr>
+        <p:spPr/>
+      </p:sp>
+    </p:spTree>
+  </p:cSld>
+  <p:clrMapOvr>
+    <a:masterClrMapping/>
+  </p:clrMapOvr>
+</p:notes>
+</file>
+
+<file path=ppt/notesSlides/notesSlide38.xml><?xml version="1.0" encoding="utf-8"?>
+<p:notes xmlns:a="http://schemas.openxmlformats.org/drawingml/2006/main" xmlns:p="http://schemas.openxmlformats.org/presentationml/2006/main" xmlns:r="http://schemas.openxmlformats.org/officeDocument/2006/relationships">
+  <p:cSld>
+    <p:spTree>
+      <p:nvGrpSpPr>
+        <p:cNvPr id="1" name=""/>
+        <p:cNvGrpSpPr/>
+        <p:nvPr/>
+      </p:nvGrpSpPr>
+      <p:grpSpPr>
+        <a:xfrm>
+          <a:off x="0" y="0"/>
+          <a:ext cx="0" cy="0"/>
+          <a:chOff x="0" y="0"/>
+          <a:chExt cx="0" cy="0"/>
+        </a:xfrm>
+      </p:grpSpPr>
+      <p:sp>
+        <p:nvSpPr>
+          <p:cNvPr id="2" name="Slide Image Placeholder 1"/>
+          <p:cNvSpPr>
+            <a:spLocks noGrp="1"/>
+          </p:cNvSpPr>
+          <p:nvPr>
+            <p:ph type="sldImg" idx="2"/>
+          </p:nvPr>
+        </p:nvSpPr>
+        <p:spPr/>
+      </p:sp>
+      <p:sp>
+        <p:nvSpPr>
+          <p:cNvPr id="3" name="Notes Placeholder 2"/>
+          <p:cNvSpPr>
+            <a:spLocks noGrp="1"/>
+          </p:cNvSpPr>
+          <p:nvPr>
+            <p:ph type="body" idx="3" sz="quarter"/>
+          </p:nvPr>
+        </p:nvSpPr>
+        <p:spPr/>
+        <p:txBody>
+          <a:bodyPr/>
+          <a:lstStyle/>
+          <a:p>
+            <a:r>
+              <a:t>VO: PAERA works across sectors. The same framework applies to education, to health, to social protection, to agriculture. Once your country builds the EA muscle for one sector, every next sector reuses the same investment. The framework does not get re-bought, re-trained, re-customised. The second sector is cheaper than the first. The third is cheaper still.</a:t>
+            </a:r>
+          </a:p>
+        </p:txBody>
+      </p:sp>
+      <p:sp>
+        <p:nvSpPr>
+          <p:cNvPr id="4" name="Slide Number Placeholder 3"/>
+          <p:cNvSpPr>
+            <a:spLocks noGrp="1"/>
+          </p:cNvSpPr>
+          <p:nvPr>
+            <p:ph type="sldNum" idx="5" sz="quarter"/>
+          </p:nvPr>
+        </p:nvSpPr>
+        <p:spPr/>
+      </p:sp>
+    </p:spTree>
+  </p:cSld>
+  <p:clrMapOvr>
+    <a:masterClrMapping/>
+  </p:clrMapOvr>
+</p:notes>
+</file>
+
+<file path=ppt/notesSlides/notesSlide39.xml><?xml version="1.0" encoding="utf-8"?>
+<p:notes xmlns:a="http://schemas.openxmlformats.org/drawingml/2006/main" xmlns:p="http://schemas.openxmlformats.org/presentationml/2006/main" xmlns:r="http://schemas.openxmlformats.org/officeDocument/2006/relationships">
+  <p:cSld>
+    <p:spTree>
+      <p:nvGrpSpPr>
+        <p:cNvPr id="1" name=""/>
+        <p:cNvGrpSpPr/>
+        <p:nvPr/>
+      </p:nvGrpSpPr>
+      <p:grpSpPr>
+        <a:xfrm>
+          <a:off x="0" y="0"/>
+          <a:ext cx="0" cy="0"/>
+          <a:chOff x="0" y="0"/>
+          <a:chExt cx="0" cy="0"/>
+        </a:xfrm>
+      </p:grpSpPr>
+      <p:sp>
+        <p:nvSpPr>
+          <p:cNvPr id="2" name="Slide Image Placeholder 1"/>
+          <p:cNvSpPr>
+            <a:spLocks noGrp="1"/>
+          </p:cNvSpPr>
+          <p:nvPr>
+            <p:ph type="sldImg" idx="2"/>
+          </p:nvPr>
+        </p:nvSpPr>
+        <p:spPr/>
+      </p:sp>
+      <p:sp>
+        <p:nvSpPr>
+          <p:cNvPr id="3" name="Notes Placeholder 2"/>
+          <p:cNvSpPr>
+            <a:spLocks noGrp="1"/>
+          </p:cNvSpPr>
+          <p:nvPr>
+            <p:ph type="body" idx="3" sz="quarter"/>
+          </p:nvPr>
+        </p:nvSpPr>
+        <p:spPr/>
+        <p:txBody>
+          <a:bodyPr/>
+          <a:lstStyle/>
+          <a:p>
+            <a:r>
+              <a:t>Keep this factual, not promotional — these are real assets a country gets access to, not buzzwords.</a:t>
+            </a:r>
+          </a:p>
+          <a:p/>
+          <a:p>
+            <a:r>
+              <a:t>VO: PAERA is not a standalone document. It connects to a working network — building block specifications, a marketplace of vendor-built implementations that have been checked for compliance, a certification programme, a sandbox you can test in, a shared knowledge base. Adopting PAERA means joining a network of countries and partners actively building these resources together.</a:t>
+            </a:r>
+          </a:p>
+        </p:txBody>
+      </p:sp>
+      <p:sp>
+        <p:nvSpPr>
+          <p:cNvPr id="4" name="Slide Number Placeholder 3"/>
+          <p:cNvSpPr>
+            <a:spLocks noGrp="1"/>
+          </p:cNvSpPr>
+          <p:nvPr>
+            <p:ph type="sldNum" idx="5" sz="quarter"/>
+          </p:nvPr>
+        </p:nvSpPr>
+        <p:spPr/>
+      </p:sp>
+    </p:spTree>
+  </p:cSld>
+  <p:clrMapOvr>
+    <a:masterClrMapping/>
+  </p:clrMapOvr>
+</p:notes>
+</file>
+
+<file path=ppt/notesSlides/notesSlide40.xml><?xml version="1.0" encoding="utf-8"?>
+<p:notes xmlns:a="http://schemas.openxmlformats.org/drawingml/2006/main" xmlns:p="http://schemas.openxmlformats.org/presentationml/2006/main" xmlns:r="http://schemas.openxmlformats.org/officeDocument/2006/relationships">
+  <p:cSld>
+    <p:spTree>
+      <p:nvGrpSpPr>
+        <p:cNvPr id="1" name=""/>
+        <p:cNvGrpSpPr/>
+        <p:nvPr/>
+      </p:nvGrpSpPr>
+      <p:grpSpPr>
+        <a:xfrm>
+          <a:off x="0" y="0"/>
+          <a:ext cx="0" cy="0"/>
+          <a:chOff x="0" y="0"/>
+          <a:chExt cx="0" cy="0"/>
+        </a:xfrm>
+      </p:grpSpPr>
+      <p:sp>
+        <p:nvSpPr>
+          <p:cNvPr id="2" name="Slide Image Placeholder 1"/>
+          <p:cNvSpPr>
+            <a:spLocks noGrp="1"/>
+          </p:cNvSpPr>
+          <p:nvPr>
+            <p:ph type="sldImg" idx="2"/>
+          </p:nvPr>
+        </p:nvSpPr>
+        <p:spPr/>
+      </p:sp>
+      <p:sp>
+        <p:nvSpPr>
+          <p:cNvPr id="3" name="Notes Placeholder 2"/>
+          <p:cNvSpPr>
+            <a:spLocks noGrp="1"/>
+          </p:cNvSpPr>
+          <p:nvPr>
+            <p:ph type="body" idx="3" sz="quarter"/>
+          </p:nvPr>
+        </p:nvSpPr>
+        <p:spPr/>
+        <p:txBody>
+          <a:bodyPr/>
+          <a:lstStyle/>
+          <a:p>
+            <a:r>
+              <a:t>PRACTICE BOX (on-screen only — never read it, never paraphrase it, never point at it). It replaces the narrated handoff: this video ends on the recap and the Sources slide.</a:t>
+            </a:r>
+          </a:p>
+          <a:p/>
+          <a:p>
+            <a:r>
+              <a:t>VO: PAERA is not a vendor choice. It is the choice to start with the work other countries have already done — so your team spends their time on what is specific to your country.</a:t>
+            </a:r>
+          </a:p>
+        </p:txBody>
+      </p:sp>
+      <p:sp>
+        <p:nvSpPr>
+          <p:cNvPr id="4" name="Slide Number Placeholder 3"/>
+          <p:cNvSpPr>
+            <a:spLocks noGrp="1"/>
+          </p:cNvSpPr>
+          <p:nvPr>
+            <p:ph type="sldNum" idx="5" sz="quarter"/>
+          </p:nvPr>
+        </p:nvSpPr>
+        <p:spPr/>
+      </p:sp>
+    </p:spTree>
+  </p:cSld>
+  <p:clrMapOvr>
+    <a:masterClrMapping/>
+  </p:clrMapOvr>
+</p:notes>
+</file>
+
+<file path=ppt/notesSlides/notesSlide41.xml><?xml version="1.0" encoding="utf-8"?>
 <p:notes xmlns:a="http://schemas.openxmlformats.org/drawingml/2006/main" xmlns:p="http://schemas.openxmlformats.org/presentationml/2006/main" xmlns:r="http://schemas.openxmlformats.org/officeDocument/2006/relationships">
   <p:cSld>
     <p:spTree>
@@ -11638,2754 +11638,6 @@
 </p:sldMaster>
 </file>
 
-<file path=ppt/slides/slide1.xml><?xml version="1.0" encoding="utf-8"?>
-<p:sld xmlns:a="http://schemas.openxmlformats.org/drawingml/2006/main" xmlns:r="http://schemas.openxmlformats.org/officeDocument/2006/relationships" xmlns:p="http://schemas.openxmlformats.org/presentationml/2006/main">
-  <p:cSld>
-    <p:spTree>
-      <p:nvGrpSpPr>
-        <p:cNvPr id="1" name=""/>
-        <p:cNvGrpSpPr/>
-        <p:nvPr/>
-      </p:nvGrpSpPr>
-      <p:grpSpPr>
-        <a:xfrm>
-          <a:off x="0" y="0"/>
-          <a:ext cx="0" cy="0"/>
-          <a:chOff x="0" y="0"/>
-          <a:chExt cx="0" cy="0"/>
-        </a:xfrm>
-      </p:grpSpPr>
-      <p:cxnSp>
-        <p:nvCxnSpPr>
-          <p:cNvPr id="11" name="Straight Connector 10">
-            <a:extLst>
-              <a:ext uri="{FF2B5EF4-FFF2-40B4-BE49-F238E27FC236}">
-                <a16:creationId xmlns:a16="http://schemas.microsoft.com/office/drawing/2014/main" id="{D9AD66F2-F7C0-4D03-9150-D28F17AC561D}"/>
-              </a:ext>
-            </a:extLst>
-          </p:cNvPr>
-          <p:cNvCxnSpPr>
-            <a:cxnSpLocks/>
-          </p:cNvCxnSpPr>
-          <p:nvPr/>
-        </p:nvCxnSpPr>
-        <p:spPr>
-          <a:xfrm>
-            <a:off x="373021" y="2198718"/>
-            <a:ext cx="6843567" cy="0"/>
-          </a:xfrm>
-          <a:prstGeom prst="line">
-            <a:avLst/>
-          </a:prstGeom>
-          <a:ln w="12700">
-            <a:solidFill>
-              <a:srgbClr val="009CD6"/>
-            </a:solidFill>
-          </a:ln>
-        </p:spPr>
-        <p:style>
-          <a:lnRef idx="1">
-            <a:schemeClr val="accent1"/>
-          </a:lnRef>
-          <a:fillRef idx="0">
-            <a:schemeClr val="accent1"/>
-          </a:fillRef>
-          <a:effectRef idx="0">
-            <a:schemeClr val="accent1"/>
-          </a:effectRef>
-          <a:fontRef idx="minor">
-            <a:schemeClr val="tx1"/>
-          </a:fontRef>
-        </p:style>
-      </p:cxnSp>
-      <p:sp>
-        <p:nvSpPr>
-          <p:cNvPr id="12" name="Title 9">
-            <a:extLst>
-              <a:ext uri="{FF2B5EF4-FFF2-40B4-BE49-F238E27FC236}">
-                <a16:creationId xmlns:a16="http://schemas.microsoft.com/office/drawing/2014/main" id="{EEB08032-CE0E-4986-AEDF-A41026C0E8B9}"/>
-              </a:ext>
-            </a:extLst>
-          </p:cNvPr>
-          <p:cNvSpPr txBox="1">
-            <a:spLocks/>
-          </p:cNvSpPr>
-          <p:nvPr/>
-        </p:nvSpPr>
-        <p:spPr>
-          <a:xfrm>
-            <a:off x="237734" y="702833"/>
-            <a:ext cx="6432007" cy="1218817"/>
-          </a:xfrm>
-          <a:prstGeom prst="rect">
-            <a:avLst/>
-          </a:prstGeom>
-        </p:spPr>
-        <p:txBody>
-          <a:bodyPr anchor="b" wrap="square">
-            <a:noAutofit/>
-          </a:bodyPr>
-          <a:lstStyle>
-            <a:lvl1pPr algn="l" defTabSz="914400" rtl="0" eaLnBrk="1" latinLnBrk="0" hangingPunct="1">
-              <a:lnSpc>
-                <a:spcPct val="90000"/>
-              </a:lnSpc>
-              <a:spcBef>
-                <a:spcPct val="0"/>
-              </a:spcBef>
-              <a:buNone/>
-              <a:defRPr sz="4000" kern="1200">
-                <a:solidFill>
-                  <a:schemeClr val="bg1"/>
-                </a:solidFill>
-                <a:latin typeface="Arial" panose="020B0604020202020204" pitchFamily="34" charset="0"/>
-                <a:ea typeface="+mj-ea"/>
-                <a:cs typeface="Arial" panose="020B0604020202020204" pitchFamily="34" charset="0"/>
-              </a:defRPr>
-            </a:lvl1pPr>
-          </a:lstStyle>
-          <a:p>
-            <a:r>
-              <a:rPr sz="2800" b="1" i="0">
-                <a:solidFill>
-                  <a:srgbClr val="1A1A1A"/>
-                </a:solidFill>
-                <a:latin typeface="Arial"/>
-              </a:rPr>
-              <a:t>1.5 — Why PAERA-anchored</a:t>
-            </a:r>
-          </a:p>
-        </p:txBody>
-      </p:sp>
-      <p:pic>
-        <p:nvPicPr>
-          <p:cNvPr id="7" name="Picture 6">
-            <a:extLst>
-              <a:ext uri="{FF2B5EF4-FFF2-40B4-BE49-F238E27FC236}">
-                <a16:creationId xmlns:a16="http://schemas.microsoft.com/office/drawing/2014/main" id="{A2066351-C569-4C4C-A096-308777FCDC32}"/>
-              </a:ext>
-            </a:extLst>
-          </p:cNvPr>
-          <p:cNvPicPr>
-            <a:picLocks noChangeAspect="1"/>
-          </p:cNvPicPr>
-          <p:nvPr/>
-        </p:nvPicPr>
-        <p:blipFill>
-          <a:blip r:embed="rId2">
-            <a:extLst>
-              <a:ext uri="{28A0092B-C50C-407E-A947-70E740481C1C}">
-                <a14:useLocalDpi xmlns:a14="http://schemas.microsoft.com/office/drawing/2010/main" val="0"/>
-              </a:ext>
-            </a:extLst>
-          </a:blip>
-          <a:srcRect t="20219" b="14729"/>
-          <a:stretch>
-            <a:fillRect/>
-          </a:stretch>
-        </p:blipFill>
-        <p:spPr>
-          <a:xfrm>
-            <a:off x="0" y="5620871"/>
-            <a:ext cx="1323975" cy="1218816"/>
-          </a:xfrm>
-          <a:prstGeom prst="rect">
-            <a:avLst/>
-          </a:prstGeom>
-        </p:spPr>
-      </p:pic>
-      <p:sp>
-        <p:nvSpPr>
-          <p:cNvPr id="14" name="Title 9">
-            <a:extLst>
-              <a:ext uri="{FF2B5EF4-FFF2-40B4-BE49-F238E27FC236}">
-                <a16:creationId xmlns:a16="http://schemas.microsoft.com/office/drawing/2014/main" id="{B5087B80-3EE4-1881-0130-ED58CA625092}"/>
-              </a:ext>
-            </a:extLst>
-          </p:cNvPr>
-          <p:cNvSpPr txBox="1">
-            <a:spLocks/>
-          </p:cNvSpPr>
-          <p:nvPr/>
-        </p:nvSpPr>
-        <p:spPr>
-          <a:xfrm>
-            <a:off x="284452" y="2475786"/>
-            <a:ext cx="6382893" cy="953213"/>
-          </a:xfrm>
-          <a:prstGeom prst="rect">
-            <a:avLst/>
-          </a:prstGeom>
-        </p:spPr>
-        <p:txBody>
-          <a:bodyPr anchor="t" wrap="square">
-            <a:noAutofit/>
-          </a:bodyPr>
-          <a:lstStyle>
-            <a:lvl1pPr algn="l" defTabSz="914400" rtl="0" eaLnBrk="1" latinLnBrk="0" hangingPunct="1">
-              <a:lnSpc>
-                <a:spcPct val="90000"/>
-              </a:lnSpc>
-              <a:spcBef>
-                <a:spcPct val="0"/>
-              </a:spcBef>
-              <a:buNone/>
-              <a:defRPr sz="4000" kern="1200">
-                <a:solidFill>
-                  <a:schemeClr val="bg1"/>
-                </a:solidFill>
-                <a:latin typeface="Arial" panose="020B0604020202020204" pitchFamily="34" charset="0"/>
-                <a:ea typeface="+mj-ea"/>
-                <a:cs typeface="Arial" panose="020B0604020202020204" pitchFamily="34" charset="0"/>
-              </a:defRPr>
-            </a:lvl1pPr>
-          </a:lstStyle>
-          <a:p>
-            <a:pPr marL="0" marR="0" lvl="0" indent="0" rtl="0">
-              <a:spcBef>
-                <a:spcPts val="600"/>
-              </a:spcBef>
-              <a:spcAft>
-                <a:spcPts val="600"/>
-              </a:spcAft>
-              <a:buNone/>
-            </a:pPr>
-            <a:r>
-              <a:rPr sz="1300" b="1" i="0">
-                <a:solidFill>
-                  <a:srgbClr val="006E96"/>
-                </a:solidFill>
-                <a:latin typeface="Arial"/>
-              </a:rPr>
-              <a:t>KP1 · Government Enterprise Architecture · Module 1 · Video 1.5</a:t>
-            </a:r>
-          </a:p>
-          <a:p>
-            <a:r>
-              <a:rPr sz="1200" b="0" i="1">
-                <a:solidFill>
-                  <a:srgbClr val="595959"/>
-                </a:solidFill>
-                <a:latin typeface="Arial"/>
-              </a:rPr>
-              <a:t>PAERA gives your team five years of head start. Adopt it, and the architecture work begins on day one. Do not adopt it, and your first year is spent inventing what others have already published.</a:t>
-            </a:r>
-          </a:p>
-        </p:txBody>
-      </p:sp>
-      <p:sp>
-        <p:nvSpPr>
-          <p:cNvPr id="17" name="Title 9">
-            <a:extLst>
-              <a:ext uri="{FF2B5EF4-FFF2-40B4-BE49-F238E27FC236}">
-                <a16:creationId xmlns:a16="http://schemas.microsoft.com/office/drawing/2014/main" id="{5E8796F7-DD26-D250-5E97-B38B22298E72}"/>
-              </a:ext>
-            </a:extLst>
-          </p:cNvPr>
-          <p:cNvSpPr txBox="1">
-            <a:spLocks/>
-          </p:cNvSpPr>
-          <p:nvPr/>
-        </p:nvSpPr>
-        <p:spPr>
-          <a:xfrm>
-            <a:off x="284452" y="4363897"/>
-            <a:ext cx="6382893" cy="953213"/>
-          </a:xfrm>
-          <a:prstGeom prst="rect">
-            <a:avLst/>
-          </a:prstGeom>
-        </p:spPr>
-        <p:txBody>
-          <a:bodyPr anchor="t" wrap="square">
-            <a:noAutofit/>
-          </a:bodyPr>
-          <a:lstStyle>
-            <a:lvl1pPr algn="l" defTabSz="914400" rtl="0" eaLnBrk="1" latinLnBrk="0" hangingPunct="1">
-              <a:lnSpc>
-                <a:spcPct val="90000"/>
-              </a:lnSpc>
-              <a:spcBef>
-                <a:spcPct val="0"/>
-              </a:spcBef>
-              <a:buNone/>
-              <a:defRPr sz="4000" kern="1200">
-                <a:solidFill>
-                  <a:schemeClr val="bg1"/>
-                </a:solidFill>
-                <a:latin typeface="Arial" panose="020B0604020202020204" pitchFamily="34" charset="0"/>
-                <a:ea typeface="+mj-ea"/>
-                <a:cs typeface="Arial" panose="020B0604020202020204" pitchFamily="34" charset="0"/>
-              </a:defRPr>
-            </a:lvl1pPr>
-          </a:lstStyle>
-          <a:p>
-            <a:pPr marL="0" marR="0" lvl="0" indent="0" rtl="0">
-              <a:spcBef>
-                <a:spcPts val="600"/>
-              </a:spcBef>
-              <a:spcAft>
-                <a:spcPts val="400"/>
-              </a:spcAft>
-              <a:buNone/>
-            </a:pPr>
-            <a:r>
-              <a:rPr sz="1400" b="1" i="0">
-                <a:solidFill>
-                  <a:srgbClr val="1A1A1A"/>
-                </a:solidFill>
-                <a:latin typeface="Arial"/>
-              </a:rPr>
-              <a:t>Target audience: </a:t>
-            </a:r>
-            <a:r>
-              <a:rPr sz="1400" b="0" i="0">
-                <a:solidFill>
-                  <a:srgbClr val="1A1A1A"/>
-                </a:solidFill>
-                <a:latin typeface="Arial"/>
-              </a:rPr>
-              <a:t>CDO · Director-General · sector minister</a:t>
-            </a:r>
-          </a:p>
-        </p:txBody>
-      </p:sp>
-      <p:sp>
-        <p:nvSpPr>
-          <p:cNvPr id="18" name="Rectangle 17"/>
-          <p:cNvSpPr/>
-          <p:nvPr/>
-        </p:nvSpPr>
-        <p:spPr>
-          <a:xfrm>
-            <a:off x="7022592" y="0"/>
-            <a:ext cx="5169103" cy="6858000"/>
-          </a:xfrm>
-          <a:prstGeom prst="rect">
-            <a:avLst/>
-          </a:prstGeom>
-          <a:solidFill>
-            <a:srgbClr val="009CD6"/>
-          </a:solidFill>
-          <a:ln>
-            <a:noFill/>
-          </a:ln>
-          <a:effectLst/>
-        </p:spPr>
-        <p:style>
-          <a:lnRef idx="1">
-            <a:schemeClr val="accent1"/>
-          </a:lnRef>
-          <a:fillRef idx="3">
-            <a:schemeClr val="accent1"/>
-          </a:fillRef>
-          <a:effectRef idx="2">
-            <a:schemeClr val="accent1"/>
-          </a:effectRef>
-          <a:fontRef idx="minor">
-            <a:schemeClr val="lt1"/>
-          </a:fontRef>
-        </p:style>
-        <p:txBody>
-          <a:bodyPr rtlCol="0" anchor="ctr"/>
-          <a:lstStyle/>
-          <a:p>
-            <a:pPr algn="ctr"/>
-          </a:p>
-        </p:txBody>
-      </p:sp>
-      <p:sp>
-        <p:nvSpPr>
-          <p:cNvPr id="19" name="TextBox 18"/>
-          <p:cNvSpPr txBox="1"/>
-          <p:nvPr/>
-        </p:nvSpPr>
-        <p:spPr>
-          <a:xfrm>
-            <a:off x="7452360" y="457200"/>
-            <a:ext cx="4297680" cy="457200"/>
-          </a:xfrm>
-          <a:prstGeom prst="rect">
-            <a:avLst/>
-          </a:prstGeom>
-          <a:noFill/>
-        </p:spPr>
-        <p:txBody>
-          <a:bodyPr wrap="square">
-            <a:spAutoFit/>
-          </a:bodyPr>
-          <a:lstStyle/>
-          <a:p>
-            <a:r>
-              <a:rPr sz="1100" b="1" i="0">
-                <a:solidFill>
-                  <a:srgbClr val="E5F5FB"/>
-                </a:solidFill>
-                <a:latin typeface="Arial"/>
-              </a:rPr>
-              <a:t>THE LIFECYCLE THIS MODULE TEACHES</a:t>
-            </a:r>
-          </a:p>
-        </p:txBody>
-      </p:sp>
-      <p:sp>
-        <p:nvSpPr>
-          <p:cNvPr id="20" name="Rounded Rectangle 19"/>
-          <p:cNvSpPr/>
-          <p:nvPr/>
-        </p:nvSpPr>
-        <p:spPr>
-          <a:xfrm>
-            <a:off x="7452360" y="960120"/>
-            <a:ext cx="3840480" cy="658368"/>
-          </a:xfrm>
-          <a:prstGeom prst="roundRect">
-            <a:avLst>
-              <a:gd name="adj" fmla="val 14000"/>
-            </a:avLst>
-          </a:prstGeom>
-          <a:solidFill>
-            <a:srgbClr val="FFFFFF"/>
-          </a:solidFill>
-          <a:ln>
-            <a:noFill/>
-          </a:ln>
-          <a:effectLst/>
-        </p:spPr>
-        <p:style>
-          <a:lnRef idx="1">
-            <a:schemeClr val="accent1"/>
-          </a:lnRef>
-          <a:fillRef idx="3">
-            <a:schemeClr val="accent1"/>
-          </a:fillRef>
-          <a:effectRef idx="2">
-            <a:schemeClr val="accent1"/>
-          </a:effectRef>
-          <a:fontRef idx="minor">
-            <a:schemeClr val="lt1"/>
-          </a:fontRef>
-        </p:style>
-        <p:txBody>
-          <a:bodyPr rtlCol="0" anchor="ctr" lIns="164592" wrap="square"/>
-          <a:lstStyle/>
-          <a:p>
-            <a:pPr algn="ctr"/>
-            <a:r>
-              <a:rPr sz="1500" b="1" i="0">
-                <a:solidFill>
-                  <a:srgbClr val="1A1A1A"/>
-                </a:solidFill>
-                <a:latin typeface="Arial"/>
-              </a:rPr>
-              <a:t>Discover</a:t>
-            </a:r>
-          </a:p>
-        </p:txBody>
-      </p:sp>
-      <p:sp>
-        <p:nvSpPr>
-          <p:cNvPr id="21" name="Diamond 20"/>
-          <p:cNvSpPr/>
-          <p:nvPr/>
-        </p:nvSpPr>
-        <p:spPr>
-          <a:xfrm>
-            <a:off x="7333488" y="1677924"/>
-            <a:ext cx="128016" cy="128016"/>
-          </a:xfrm>
-          <a:prstGeom prst="diamond">
-            <a:avLst/>
-          </a:prstGeom>
-          <a:solidFill>
-            <a:srgbClr val="E5F5FB"/>
-          </a:solidFill>
-          <a:ln>
-            <a:noFill/>
-          </a:ln>
-          <a:effectLst/>
-        </p:spPr>
-        <p:style>
-          <a:lnRef idx="1">
-            <a:schemeClr val="accent1"/>
-          </a:lnRef>
-          <a:fillRef idx="3">
-            <a:schemeClr val="accent1"/>
-          </a:fillRef>
-          <a:effectRef idx="2">
-            <a:schemeClr val="accent1"/>
-          </a:effectRef>
-          <a:fontRef idx="minor">
-            <a:schemeClr val="lt1"/>
-          </a:fontRef>
-        </p:style>
-        <p:txBody>
-          <a:bodyPr rtlCol="0" anchor="ctr"/>
-          <a:lstStyle/>
-          <a:p>
-            <a:pPr algn="ctr"/>
-          </a:p>
-        </p:txBody>
-      </p:sp>
-      <p:sp>
-        <p:nvSpPr>
-          <p:cNvPr id="22" name="Rounded Rectangle 21"/>
-          <p:cNvSpPr/>
-          <p:nvPr/>
-        </p:nvSpPr>
-        <p:spPr>
-          <a:xfrm>
-            <a:off x="7452360" y="1892808"/>
-            <a:ext cx="3840480" cy="658368"/>
-          </a:xfrm>
-          <a:prstGeom prst="roundRect">
-            <a:avLst>
-              <a:gd name="adj" fmla="val 14000"/>
-            </a:avLst>
-          </a:prstGeom>
-          <a:solidFill>
-            <a:srgbClr val="FFFFFF"/>
-          </a:solidFill>
-          <a:ln>
-            <a:noFill/>
-          </a:ln>
-          <a:effectLst/>
-        </p:spPr>
-        <p:style>
-          <a:lnRef idx="1">
-            <a:schemeClr val="accent1"/>
-          </a:lnRef>
-          <a:fillRef idx="3">
-            <a:schemeClr val="accent1"/>
-          </a:fillRef>
-          <a:effectRef idx="2">
-            <a:schemeClr val="accent1"/>
-          </a:effectRef>
-          <a:fontRef idx="minor">
-            <a:schemeClr val="lt1"/>
-          </a:fontRef>
-        </p:style>
-        <p:txBody>
-          <a:bodyPr rtlCol="0" anchor="ctr" lIns="164592" wrap="square"/>
-          <a:lstStyle/>
-          <a:p>
-            <a:pPr algn="ctr"/>
-            <a:r>
-              <a:rPr sz="1500" b="1" i="0">
-                <a:solidFill>
-                  <a:srgbClr val="1A1A1A"/>
-                </a:solidFill>
-                <a:latin typeface="Arial"/>
-              </a:rPr>
-              <a:t>Assess</a:t>
-            </a:r>
-          </a:p>
-        </p:txBody>
-      </p:sp>
-      <p:sp>
-        <p:nvSpPr>
-          <p:cNvPr id="23" name="Diamond 22"/>
-          <p:cNvSpPr/>
-          <p:nvPr/>
-        </p:nvSpPr>
-        <p:spPr>
-          <a:xfrm>
-            <a:off x="7333488" y="2610612"/>
-            <a:ext cx="128016" cy="128016"/>
-          </a:xfrm>
-          <a:prstGeom prst="diamond">
-            <a:avLst/>
-          </a:prstGeom>
-          <a:solidFill>
-            <a:srgbClr val="E5F5FB"/>
-          </a:solidFill>
-          <a:ln>
-            <a:noFill/>
-          </a:ln>
-          <a:effectLst/>
-        </p:spPr>
-        <p:style>
-          <a:lnRef idx="1">
-            <a:schemeClr val="accent1"/>
-          </a:lnRef>
-          <a:fillRef idx="3">
-            <a:schemeClr val="accent1"/>
-          </a:fillRef>
-          <a:effectRef idx="2">
-            <a:schemeClr val="accent1"/>
-          </a:effectRef>
-          <a:fontRef idx="minor">
-            <a:schemeClr val="lt1"/>
-          </a:fontRef>
-        </p:style>
-        <p:txBody>
-          <a:bodyPr rtlCol="0" anchor="ctr"/>
-          <a:lstStyle/>
-          <a:p>
-            <a:pPr algn="ctr"/>
-          </a:p>
-        </p:txBody>
-      </p:sp>
-      <p:sp>
-        <p:nvSpPr>
-          <p:cNvPr id="24" name="Rounded Rectangle 23"/>
-          <p:cNvSpPr/>
-          <p:nvPr/>
-        </p:nvSpPr>
-        <p:spPr>
-          <a:xfrm>
-            <a:off x="7452360" y="2825496"/>
-            <a:ext cx="3840480" cy="658368"/>
-          </a:xfrm>
-          <a:prstGeom prst="roundRect">
-            <a:avLst>
-              <a:gd name="adj" fmla="val 14000"/>
-            </a:avLst>
-          </a:prstGeom>
-          <a:solidFill>
-            <a:srgbClr val="FFFFFF"/>
-          </a:solidFill>
-          <a:ln>
-            <a:noFill/>
-          </a:ln>
-          <a:effectLst/>
-        </p:spPr>
-        <p:style>
-          <a:lnRef idx="1">
-            <a:schemeClr val="accent1"/>
-          </a:lnRef>
-          <a:fillRef idx="3">
-            <a:schemeClr val="accent1"/>
-          </a:fillRef>
-          <a:effectRef idx="2">
-            <a:schemeClr val="accent1"/>
-          </a:effectRef>
-          <a:fontRef idx="minor">
-            <a:schemeClr val="lt1"/>
-          </a:fontRef>
-        </p:style>
-        <p:txBody>
-          <a:bodyPr rtlCol="0" anchor="ctr" lIns="164592" wrap="square"/>
-          <a:lstStyle/>
-          <a:p>
-            <a:pPr algn="ctr"/>
-            <a:r>
-              <a:rPr sz="1500" b="1" i="0">
-                <a:solidFill>
-                  <a:srgbClr val="1A1A1A"/>
-                </a:solidFill>
-                <a:latin typeface="Arial"/>
-              </a:rPr>
-              <a:t>Adapt</a:t>
-            </a:r>
-          </a:p>
-        </p:txBody>
-      </p:sp>
-      <p:sp>
-        <p:nvSpPr>
-          <p:cNvPr id="25" name="Diamond 24"/>
-          <p:cNvSpPr/>
-          <p:nvPr/>
-        </p:nvSpPr>
-        <p:spPr>
-          <a:xfrm>
-            <a:off x="7333488" y="3543300"/>
-            <a:ext cx="128016" cy="128016"/>
-          </a:xfrm>
-          <a:prstGeom prst="diamond">
-            <a:avLst/>
-          </a:prstGeom>
-          <a:solidFill>
-            <a:srgbClr val="E5F5FB"/>
-          </a:solidFill>
-          <a:ln>
-            <a:noFill/>
-          </a:ln>
-          <a:effectLst/>
-        </p:spPr>
-        <p:style>
-          <a:lnRef idx="1">
-            <a:schemeClr val="accent1"/>
-          </a:lnRef>
-          <a:fillRef idx="3">
-            <a:schemeClr val="accent1"/>
-          </a:fillRef>
-          <a:effectRef idx="2">
-            <a:schemeClr val="accent1"/>
-          </a:effectRef>
-          <a:fontRef idx="minor">
-            <a:schemeClr val="lt1"/>
-          </a:fontRef>
-        </p:style>
-        <p:txBody>
-          <a:bodyPr rtlCol="0" anchor="ctr"/>
-          <a:lstStyle/>
-          <a:p>
-            <a:pPr algn="ctr"/>
-          </a:p>
-        </p:txBody>
-      </p:sp>
-      <p:sp>
-        <p:nvSpPr>
-          <p:cNvPr id="26" name="Rounded Rectangle 25"/>
-          <p:cNvSpPr/>
-          <p:nvPr/>
-        </p:nvSpPr>
-        <p:spPr>
-          <a:xfrm>
-            <a:off x="7452360" y="3758184"/>
-            <a:ext cx="3840480" cy="658368"/>
-          </a:xfrm>
-          <a:prstGeom prst="roundRect">
-            <a:avLst>
-              <a:gd name="adj" fmla="val 14000"/>
-            </a:avLst>
-          </a:prstGeom>
-          <a:solidFill>
-            <a:srgbClr val="FFFFFF"/>
-          </a:solidFill>
-          <a:ln>
-            <a:noFill/>
-          </a:ln>
-          <a:effectLst/>
-        </p:spPr>
-        <p:style>
-          <a:lnRef idx="1">
-            <a:schemeClr val="accent1"/>
-          </a:lnRef>
-          <a:fillRef idx="3">
-            <a:schemeClr val="accent1"/>
-          </a:fillRef>
-          <a:effectRef idx="2">
-            <a:schemeClr val="accent1"/>
-          </a:effectRef>
-          <a:fontRef idx="minor">
-            <a:schemeClr val="lt1"/>
-          </a:fontRef>
-        </p:style>
-        <p:txBody>
-          <a:bodyPr rtlCol="0" anchor="ctr" lIns="164592" wrap="square"/>
-          <a:lstStyle/>
-          <a:p>
-            <a:pPr algn="ctr"/>
-            <a:r>
-              <a:rPr sz="1500" b="1" i="0">
-                <a:solidFill>
-                  <a:srgbClr val="1A1A1A"/>
-                </a:solidFill>
-                <a:latin typeface="Arial"/>
-              </a:rPr>
-              <a:t>Plan</a:t>
-            </a:r>
-          </a:p>
-        </p:txBody>
-      </p:sp>
-      <p:sp>
-        <p:nvSpPr>
-          <p:cNvPr id="27" name="Diamond 26"/>
-          <p:cNvSpPr/>
-          <p:nvPr/>
-        </p:nvSpPr>
-        <p:spPr>
-          <a:xfrm>
-            <a:off x="7333488" y="4475988"/>
-            <a:ext cx="128016" cy="128016"/>
-          </a:xfrm>
-          <a:prstGeom prst="diamond">
-            <a:avLst/>
-          </a:prstGeom>
-          <a:solidFill>
-            <a:srgbClr val="E5F5FB"/>
-          </a:solidFill>
-          <a:ln>
-            <a:noFill/>
-          </a:ln>
-          <a:effectLst/>
-        </p:spPr>
-        <p:style>
-          <a:lnRef idx="1">
-            <a:schemeClr val="accent1"/>
-          </a:lnRef>
-          <a:fillRef idx="3">
-            <a:schemeClr val="accent1"/>
-          </a:fillRef>
-          <a:effectRef idx="2">
-            <a:schemeClr val="accent1"/>
-          </a:effectRef>
-          <a:fontRef idx="minor">
-            <a:schemeClr val="lt1"/>
-          </a:fontRef>
-        </p:style>
-        <p:txBody>
-          <a:bodyPr rtlCol="0" anchor="ctr"/>
-          <a:lstStyle/>
-          <a:p>
-            <a:pPr algn="ctr"/>
-          </a:p>
-        </p:txBody>
-      </p:sp>
-      <p:sp>
-        <p:nvSpPr>
-          <p:cNvPr id="28" name="Rounded Rectangle 27"/>
-          <p:cNvSpPr/>
-          <p:nvPr/>
-        </p:nvSpPr>
-        <p:spPr>
-          <a:xfrm>
-            <a:off x="7452360" y="4690872"/>
-            <a:ext cx="3840480" cy="658368"/>
-          </a:xfrm>
-          <a:prstGeom prst="roundRect">
-            <a:avLst>
-              <a:gd name="adj" fmla="val 14000"/>
-            </a:avLst>
-          </a:prstGeom>
-          <a:solidFill>
-            <a:srgbClr val="006E96"/>
-          </a:solidFill>
-          <a:ln>
-            <a:noFill/>
-          </a:ln>
-          <a:effectLst/>
-        </p:spPr>
-        <p:style>
-          <a:lnRef idx="1">
-            <a:schemeClr val="accent1"/>
-          </a:lnRef>
-          <a:fillRef idx="3">
-            <a:schemeClr val="accent1"/>
-          </a:fillRef>
-          <a:effectRef idx="2">
-            <a:schemeClr val="accent1"/>
-          </a:effectRef>
-          <a:fontRef idx="minor">
-            <a:schemeClr val="lt1"/>
-          </a:fontRef>
-        </p:style>
-        <p:txBody>
-          <a:bodyPr rtlCol="0" anchor="ctr" lIns="164592" wrap="square"/>
-          <a:lstStyle/>
-          <a:p>
-            <a:pPr algn="ctr"/>
-            <a:r>
-              <a:rPr sz="1500" b="1" i="0">
-                <a:solidFill>
-                  <a:srgbClr val="FFFFFF"/>
-                </a:solidFill>
-                <a:latin typeface="Arial"/>
-              </a:rPr>
-              <a:t>Execute &amp; Govern</a:t>
-            </a:r>
-          </a:p>
-        </p:txBody>
-      </p:sp>
-      <p:sp>
-        <p:nvSpPr>
-          <p:cNvPr id="29" name="TextBox 28"/>
-          <p:cNvSpPr txBox="1"/>
-          <p:nvPr/>
-        </p:nvSpPr>
-        <p:spPr>
-          <a:xfrm>
-            <a:off x="7452360" y="5806440"/>
-            <a:ext cx="4297680" cy="731520"/>
-          </a:xfrm>
-          <a:prstGeom prst="rect">
-            <a:avLst/>
-          </a:prstGeom>
-          <a:noFill/>
-        </p:spPr>
-        <p:txBody>
-          <a:bodyPr wrap="square">
-            <a:spAutoFit/>
-          </a:bodyPr>
-          <a:lstStyle/>
-          <a:p>
-            <a:r>
-              <a:rPr sz="1200" b="0" i="0">
-                <a:solidFill>
-                  <a:srgbClr val="FFFFFF"/>
-                </a:solidFill>
-                <a:latin typeface="Arial"/>
-              </a:rPr>
-              <a:t>4 sign-offs · 6 months to a roadmap · then ongoing</a:t>
-            </a:r>
-          </a:p>
-        </p:txBody>
-      </p:sp>
-    </p:spTree>
-    <p:extLst>
-      <p:ext uri="{BB962C8B-B14F-4D97-AF65-F5344CB8AC3E}">
-        <p14:creationId xmlns:p14="http://schemas.microsoft.com/office/powerpoint/2010/main" val="1196800265"/>
-      </p:ext>
-    </p:extLst>
-  </p:cSld>
-  <p:clrMapOvr>
-    <a:masterClrMapping/>
-  </p:clrMapOvr>
-</p:sld>
-</file>
-
-<file path=ppt/slides/slide30.xml><?xml version="1.0" encoding="utf-8"?>
-<p:sld xmlns:a="http://schemas.openxmlformats.org/drawingml/2006/main" xmlns:p="http://schemas.openxmlformats.org/presentationml/2006/main" xmlns:r="http://schemas.openxmlformats.org/officeDocument/2006/relationships">
-  <p:cSld>
-    <p:spTree>
-      <p:nvGrpSpPr>
-        <p:cNvPr id="1" name=""/>
-        <p:cNvGrpSpPr/>
-        <p:nvPr/>
-      </p:nvGrpSpPr>
-      <p:grpSpPr/>
-      <p:sp>
-        <p:nvSpPr>
-          <p:cNvPr id="2" name="TextBox 1"/>
-          <p:cNvSpPr txBox="1"/>
-          <p:nvPr/>
-        </p:nvSpPr>
-        <p:spPr>
-          <a:xfrm>
-            <a:off x="822960" y="822960"/>
-            <a:ext cx="7315200" cy="457200"/>
-          </a:xfrm>
-          <a:prstGeom prst="rect">
-            <a:avLst/>
-          </a:prstGeom>
-          <a:noFill/>
-        </p:spPr>
-        <p:txBody>
-          <a:bodyPr wrap="square">
-            <a:spAutoFit/>
-          </a:bodyPr>
-          <a:lstStyle/>
-          <a:p>
-            <a:r>
-              <a:rPr sz="1200" b="1" i="0">
-                <a:solidFill>
-                  <a:srgbClr val="595959"/>
-                </a:solidFill>
-                <a:latin typeface="Arial"/>
-              </a:rPr>
-              <a:t>KP1 · MODULE 1 · VIDEO 1.5</a:t>
-            </a:r>
-          </a:p>
-        </p:txBody>
-      </p:sp>
-      <p:sp>
-        <p:nvSpPr>
-          <p:cNvPr id="3" name="TextBox 2"/>
-          <p:cNvSpPr txBox="1"/>
-          <p:nvPr/>
-        </p:nvSpPr>
-        <p:spPr>
-          <a:xfrm>
-            <a:off x="822960" y="1828800"/>
-            <a:ext cx="2011680" cy="1097280"/>
-          </a:xfrm>
-          <a:prstGeom prst="rect">
-            <a:avLst/>
-          </a:prstGeom>
-          <a:noFill/>
-        </p:spPr>
-        <p:txBody>
-          <a:bodyPr wrap="square">
-            <a:spAutoFit/>
-          </a:bodyPr>
-          <a:lstStyle/>
-          <a:p>
-            <a:r>
-              <a:rPr sz="6000" b="1" i="0">
-                <a:solidFill>
-                  <a:srgbClr val="009CD6"/>
-                </a:solidFill>
-                <a:latin typeface="Arial"/>
-              </a:rPr>
-              <a:t>1.5</a:t>
-            </a:r>
-          </a:p>
-        </p:txBody>
-      </p:sp>
-      <p:sp>
-        <p:nvSpPr>
-          <p:cNvPr id="4" name="TextBox 3"/>
-          <p:cNvSpPr txBox="1"/>
-          <p:nvPr/>
-        </p:nvSpPr>
-        <p:spPr>
-          <a:xfrm>
-            <a:off x="822960" y="2880360"/>
-            <a:ext cx="9601200" cy="1371600"/>
-          </a:xfrm>
-          <a:prstGeom prst="rect">
-            <a:avLst/>
-          </a:prstGeom>
-          <a:noFill/>
-        </p:spPr>
-        <p:txBody>
-          <a:bodyPr wrap="square">
-            <a:spAutoFit/>
-          </a:bodyPr>
-          <a:lstStyle/>
-          <a:p>
-            <a:r>
-              <a:rPr sz="3400" b="1" i="0">
-                <a:solidFill>
-                  <a:srgbClr val="1A1A1A"/>
-                </a:solidFill>
-                <a:latin typeface="Arial"/>
-              </a:rPr>
-              <a:t>Why PAERA-anchored</a:t>
-            </a:r>
-          </a:p>
-        </p:txBody>
-      </p:sp>
-      <p:sp>
-        <p:nvSpPr>
-          <p:cNvPr id="5" name="TextBox 4"/>
-          <p:cNvSpPr txBox="1"/>
-          <p:nvPr/>
-        </p:nvSpPr>
-        <p:spPr>
-          <a:xfrm>
-            <a:off x="822960" y="4343400"/>
-            <a:ext cx="9875520" cy="1554480"/>
-          </a:xfrm>
-          <a:prstGeom prst="rect">
-            <a:avLst/>
-          </a:prstGeom>
-          <a:noFill/>
-        </p:spPr>
-        <p:txBody>
-          <a:bodyPr wrap="square">
-            <a:spAutoFit/>
-          </a:bodyPr>
-          <a:lstStyle/>
-          <a:p>
-            <a:r>
-              <a:rPr sz="1700" b="0" i="1">
-                <a:solidFill>
-                  <a:srgbClr val="595959"/>
-                </a:solidFill>
-                <a:latin typeface="Arial"/>
-              </a:rPr>
-              <a:t>PAERA gives your team five years of head start. Adopt it, and the architecture work begins on day one. Do not adopt it, and your first year is spent inventing what others have already published.</a:t>
-            </a:r>
-          </a:p>
-        </p:txBody>
-      </p:sp>
-      <p:sp>
-        <p:nvSpPr>
-          <p:cNvPr id="6" name="TextBox 5"/>
-          <p:cNvSpPr txBox="1"/>
-          <p:nvPr/>
-        </p:nvSpPr>
-        <p:spPr>
-          <a:xfrm>
-            <a:off x="822960" y="5989320"/>
-            <a:ext cx="7315200" cy="365760"/>
-          </a:xfrm>
-          <a:prstGeom prst="rect">
-            <a:avLst/>
-          </a:prstGeom>
-          <a:noFill/>
-        </p:spPr>
-        <p:txBody>
-          <a:bodyPr wrap="square">
-            <a:spAutoFit/>
-          </a:bodyPr>
-          <a:lstStyle/>
-          <a:p>
-            <a:r>
-              <a:rPr sz="1200" b="0" i="0">
-                <a:solidFill>
-                  <a:srgbClr val="595959"/>
-                </a:solidFill>
-                <a:latin typeface="Arial"/>
-              </a:rPr>
-              <a:t>standalone video · voice-over on text slides</a:t>
-            </a:r>
-          </a:p>
-        </p:txBody>
-      </p:sp>
-    </p:spTree>
-  </p:cSld>
-  <p:clrMapOvr>
-    <a:masterClrMapping/>
-  </p:clrMapOvr>
-</p:sld>
-</file>
-
-<file path=ppt/slides/slide31.xml><?xml version="1.0" encoding="utf-8"?>
-<p:sld xmlns:a="http://schemas.openxmlformats.org/drawingml/2006/main" xmlns:p="http://schemas.openxmlformats.org/presentationml/2006/main" xmlns:r="http://schemas.openxmlformats.org/officeDocument/2006/relationships">
-  <p:cSld>
-    <p:spTree>
-      <p:nvGrpSpPr>
-        <p:cNvPr id="1" name=""/>
-        <p:cNvGrpSpPr/>
-        <p:nvPr/>
-      </p:nvGrpSpPr>
-      <p:grpSpPr/>
-      <p:sp>
-        <p:nvSpPr>
-          <p:cNvPr id="2" name="Rectangle 1"/>
-          <p:cNvSpPr/>
-          <p:nvPr/>
-        </p:nvSpPr>
-        <p:spPr>
-          <a:xfrm>
-            <a:off x="457200" y="384048"/>
-            <a:ext cx="45720" cy="256032"/>
-          </a:xfrm>
-          <a:prstGeom prst="rect">
-            <a:avLst/>
-          </a:prstGeom>
-          <a:solidFill>
-            <a:srgbClr val="009CD6"/>
-          </a:solidFill>
-          <a:ln>
-            <a:noFill/>
-          </a:ln>
-          <a:effectLst/>
-        </p:spPr>
-        <p:style>
-          <a:lnRef idx="1">
-            <a:schemeClr val="accent1"/>
-          </a:lnRef>
-          <a:fillRef idx="3">
-            <a:schemeClr val="accent1"/>
-          </a:fillRef>
-          <a:effectRef idx="2">
-            <a:schemeClr val="accent1"/>
-          </a:effectRef>
-          <a:fontRef idx="minor">
-            <a:schemeClr val="lt1"/>
-          </a:fontRef>
-        </p:style>
-        <p:txBody>
-          <a:bodyPr rtlCol="0" anchor="ctr"/>
-          <a:lstStyle/>
-          <a:p>
-            <a:pPr algn="ctr"/>
-          </a:p>
-        </p:txBody>
-      </p:sp>
-      <p:sp>
-        <p:nvSpPr>
-          <p:cNvPr id="3" name="TextBox 2"/>
-          <p:cNvSpPr txBox="1"/>
-          <p:nvPr/>
-        </p:nvSpPr>
-        <p:spPr>
-          <a:xfrm>
-            <a:off x="621792" y="274320"/>
-            <a:ext cx="11247120" cy="914400"/>
-          </a:xfrm>
-          <a:prstGeom prst="rect">
-            <a:avLst/>
-          </a:prstGeom>
-          <a:noFill/>
-        </p:spPr>
-        <p:txBody>
-          <a:bodyPr wrap="square">
-            <a:spAutoFit/>
-          </a:bodyPr>
-          <a:lstStyle/>
-          <a:p>
-            <a:r>
-              <a:rPr sz="2800" b="1" i="0">
-                <a:solidFill>
-                  <a:srgbClr val="1A1A1A"/>
-                </a:solidFill>
-                <a:latin typeface="Arial"/>
-              </a:rPr>
-              <a:t>Two paths — one costs you a year before work begins</a:t>
-            </a:r>
-          </a:p>
-        </p:txBody>
-      </p:sp>
-      <p:sp>
-        <p:nvSpPr>
-          <p:cNvPr id="4" name="Rounded Rectangle 3"/>
-          <p:cNvSpPr/>
-          <p:nvPr/>
-        </p:nvSpPr>
-        <p:spPr>
-          <a:xfrm>
-            <a:off x="658368" y="1920240"/>
-            <a:ext cx="10881360" cy="1371600"/>
-          </a:xfrm>
-          <a:prstGeom prst="roundRect">
-            <a:avLst>
-              <a:gd name="adj" fmla="val 4500"/>
-            </a:avLst>
-          </a:prstGeom>
-          <a:solidFill>
-            <a:srgbClr val="F2F2F2"/>
-          </a:solidFill>
-          <a:ln>
-            <a:noFill/>
-          </a:ln>
-          <a:effectLst/>
-        </p:spPr>
-        <p:style>
-          <a:lnRef idx="1">
-            <a:schemeClr val="accent1"/>
-          </a:lnRef>
-          <a:fillRef idx="3">
-            <a:schemeClr val="accent1"/>
-          </a:fillRef>
-          <a:effectRef idx="2">
-            <a:schemeClr val="accent1"/>
-          </a:effectRef>
-          <a:fontRef idx="minor">
-            <a:schemeClr val="lt1"/>
-          </a:fontRef>
-        </p:style>
-        <p:txBody>
-          <a:bodyPr rtlCol="0" anchor="ctr"/>
-          <a:lstStyle/>
-          <a:p>
-            <a:pPr algn="ctr"/>
-          </a:p>
-        </p:txBody>
-      </p:sp>
-      <p:sp>
-        <p:nvSpPr>
-          <p:cNvPr id="5" name="TextBox 4"/>
-          <p:cNvSpPr txBox="1"/>
-          <p:nvPr/>
-        </p:nvSpPr>
-        <p:spPr>
-          <a:xfrm>
-            <a:off x="914400" y="2066544"/>
-            <a:ext cx="10369296" cy="1097280"/>
-          </a:xfrm>
-          <a:prstGeom prst="rect">
-            <a:avLst/>
-          </a:prstGeom>
-          <a:noFill/>
-        </p:spPr>
-        <p:txBody>
-          <a:bodyPr wrap="square">
-            <a:spAutoFit/>
-          </a:bodyPr>
-          <a:lstStyle/>
-          <a:p>
-            <a:pPr>
-              <a:spcAft>
-                <a:spcPts val="700"/>
-              </a:spcAft>
-            </a:pPr>
-            <a:r>
-              <a:rPr sz="1800" b="1" i="0">
-                <a:solidFill>
-                  <a:srgbClr val="1A1A1A"/>
-                </a:solidFill>
-                <a:latin typeface="Arial"/>
-              </a:rPr>
-              <a:t>Design your own framework</a:t>
-            </a:r>
-          </a:p>
-          <a:p>
-            <a:pPr>
-              <a:spcAft>
-                <a:spcPts val="700"/>
-              </a:spcAft>
-            </a:pPr>
-            <a:r>
-              <a:rPr sz="1500" b="0" i="0">
-                <a:solidFill>
-                  <a:srgbClr val="595959"/>
-                </a:solidFill>
-                <a:latin typeface="Arial"/>
-              </a:rPr>
-              <a:t>12 to 18 months of consultants and groundwork before any architect draws a single picture of any ministry</a:t>
-            </a:r>
-          </a:p>
-        </p:txBody>
-      </p:sp>
-      <p:sp>
-        <p:nvSpPr>
-          <p:cNvPr id="6" name="Rounded Rectangle 5"/>
-          <p:cNvSpPr/>
-          <p:nvPr/>
-        </p:nvSpPr>
-        <p:spPr>
-          <a:xfrm>
-            <a:off x="658368" y="3749039"/>
-            <a:ext cx="3291840" cy="1371600"/>
-          </a:xfrm>
-          <a:prstGeom prst="roundRect">
-            <a:avLst>
-              <a:gd name="adj" fmla="val 4500"/>
-            </a:avLst>
-          </a:prstGeom>
-          <a:solidFill>
-            <a:srgbClr val="009CD6"/>
-          </a:solidFill>
-          <a:ln>
-            <a:noFill/>
-          </a:ln>
-          <a:effectLst/>
-        </p:spPr>
-        <p:style>
-          <a:lnRef idx="1">
-            <a:schemeClr val="accent1"/>
-          </a:lnRef>
-          <a:fillRef idx="3">
-            <a:schemeClr val="accent1"/>
-          </a:fillRef>
-          <a:effectRef idx="2">
-            <a:schemeClr val="accent1"/>
-          </a:effectRef>
-          <a:fontRef idx="minor">
-            <a:schemeClr val="lt1"/>
-          </a:fontRef>
-        </p:style>
-        <p:txBody>
-          <a:bodyPr rtlCol="0" anchor="ctr"/>
-          <a:lstStyle/>
-          <a:p>
-            <a:pPr algn="ctr"/>
-          </a:p>
-        </p:txBody>
-      </p:sp>
-      <p:sp>
-        <p:nvSpPr>
-          <p:cNvPr id="7" name="TextBox 6"/>
-          <p:cNvSpPr txBox="1"/>
-          <p:nvPr/>
-        </p:nvSpPr>
-        <p:spPr>
-          <a:xfrm>
-            <a:off x="914400" y="3895344"/>
-            <a:ext cx="2779776" cy="1097280"/>
-          </a:xfrm>
-          <a:prstGeom prst="rect">
-            <a:avLst/>
-          </a:prstGeom>
-          <a:noFill/>
-        </p:spPr>
-        <p:txBody>
-          <a:bodyPr wrap="square">
-            <a:spAutoFit/>
-          </a:bodyPr>
-          <a:lstStyle/>
-          <a:p>
-            <a:pPr>
-              <a:spcAft>
-                <a:spcPts val="700"/>
-              </a:spcAft>
-            </a:pPr>
-            <a:r>
-              <a:rPr sz="1800" b="1" i="0">
-                <a:solidFill>
-                  <a:srgbClr val="FFFFFF"/>
-                </a:solidFill>
-                <a:latin typeface="Arial"/>
-              </a:rPr>
-              <a:t>Anchor on PAERA</a:t>
-            </a:r>
-          </a:p>
-          <a:p>
-            <a:pPr>
-              <a:spcAft>
-                <a:spcPts val="700"/>
-              </a:spcAft>
-            </a:pPr>
-            <a:r>
-              <a:rPr sz="1500" b="0" i="0">
-                <a:solidFill>
-                  <a:srgbClr val="FFFFFF"/>
-                </a:solidFill>
-                <a:latin typeface="Arial"/>
-              </a:rPr>
-              <a:t>work begins on day one</a:t>
-            </a:r>
-          </a:p>
-        </p:txBody>
-      </p:sp>
-      <p:sp>
-        <p:nvSpPr>
-          <p:cNvPr id="8" name="TextBox 7"/>
-          <p:cNvSpPr txBox="1"/>
-          <p:nvPr/>
-        </p:nvSpPr>
-        <p:spPr>
-          <a:xfrm>
-            <a:off x="4206240" y="3977639"/>
-            <a:ext cx="7315200" cy="1188720"/>
-          </a:xfrm>
-          <a:prstGeom prst="rect">
-            <a:avLst/>
-          </a:prstGeom>
-          <a:noFill/>
-        </p:spPr>
-        <p:txBody>
-          <a:bodyPr wrap="square">
-            <a:spAutoFit/>
-          </a:bodyPr>
-          <a:lstStyle/>
-          <a:p>
-            <a:r>
-              <a:rPr sz="1500" b="0" i="0">
-                <a:solidFill>
-                  <a:srgbClr val="595959"/>
-                </a:solidFill>
-                <a:latin typeface="Arial"/>
-              </a:rPr>
-              <a:t>The Public Administration Ecosystem Reference Architecture — published 2024 under GovStack, built for the public-sector use case, with the groundwork already done.</a:t>
-            </a:r>
-          </a:p>
-        </p:txBody>
-      </p:sp>
-      <p:sp>
-        <p:nvSpPr>
-          <p:cNvPr id="9" name="TextBox 8"/>
-          <p:cNvSpPr txBox="1"/>
-          <p:nvPr/>
-        </p:nvSpPr>
-        <p:spPr>
-          <a:xfrm>
-            <a:off x="457200" y="6473952"/>
-            <a:ext cx="7772400" cy="292608"/>
-          </a:xfrm>
-          <a:prstGeom prst="rect">
-            <a:avLst/>
-          </a:prstGeom>
-          <a:noFill/>
-        </p:spPr>
-        <p:txBody>
-          <a:bodyPr wrap="square">
-            <a:spAutoFit/>
-          </a:bodyPr>
-          <a:lstStyle/>
-          <a:p>
-            <a:r>
-              <a:rPr sz="900" b="0" i="0">
-                <a:solidFill>
-                  <a:srgbClr val="595959"/>
-                </a:solidFill>
-                <a:latin typeface="Arial"/>
-              </a:rPr>
-              <a:t>1.5 · Why PAERA-anchored</a:t>
-            </a:r>
-          </a:p>
-        </p:txBody>
-      </p:sp>
-    </p:spTree>
-  </p:cSld>
-  <p:clrMapOvr>
-    <a:masterClrMapping/>
-  </p:clrMapOvr>
-</p:sld>
-</file>
-
-<file path=ppt/slides/slide32.xml><?xml version="1.0" encoding="utf-8"?>
-<p:sld xmlns:a="http://schemas.openxmlformats.org/drawingml/2006/main" xmlns:p="http://schemas.openxmlformats.org/presentationml/2006/main" xmlns:r="http://schemas.openxmlformats.org/officeDocument/2006/relationships">
-  <p:cSld>
-    <p:spTree>
-      <p:nvGrpSpPr>
-        <p:cNvPr id="1" name=""/>
-        <p:cNvGrpSpPr/>
-        <p:nvPr/>
-      </p:nvGrpSpPr>
-      <p:grpSpPr/>
-      <p:sp>
-        <p:nvSpPr>
-          <p:cNvPr id="2" name="Rectangle 1"/>
-          <p:cNvSpPr/>
-          <p:nvPr/>
-        </p:nvSpPr>
-        <p:spPr>
-          <a:xfrm>
-            <a:off x="457200" y="384048"/>
-            <a:ext cx="45720" cy="256032"/>
-          </a:xfrm>
-          <a:prstGeom prst="rect">
-            <a:avLst/>
-          </a:prstGeom>
-          <a:solidFill>
-            <a:srgbClr val="009CD6"/>
-          </a:solidFill>
-          <a:ln>
-            <a:noFill/>
-          </a:ln>
-          <a:effectLst/>
-        </p:spPr>
-        <p:style>
-          <a:lnRef idx="1">
-            <a:schemeClr val="accent1"/>
-          </a:lnRef>
-          <a:fillRef idx="3">
-            <a:schemeClr val="accent1"/>
-          </a:fillRef>
-          <a:effectRef idx="2">
-            <a:schemeClr val="accent1"/>
-          </a:effectRef>
-          <a:fontRef idx="minor">
-            <a:schemeClr val="lt1"/>
-          </a:fontRef>
-        </p:style>
-        <p:txBody>
-          <a:bodyPr rtlCol="0" anchor="ctr"/>
-          <a:lstStyle/>
-          <a:p>
-            <a:pPr algn="ctr"/>
-          </a:p>
-        </p:txBody>
-      </p:sp>
-      <p:sp>
-        <p:nvSpPr>
-          <p:cNvPr id="3" name="TextBox 2"/>
-          <p:cNvSpPr txBox="1"/>
-          <p:nvPr/>
-        </p:nvSpPr>
-        <p:spPr>
-          <a:xfrm>
-            <a:off x="621792" y="274320"/>
-            <a:ext cx="11247120" cy="914400"/>
-          </a:xfrm>
-          <a:prstGeom prst="rect">
-            <a:avLst/>
-          </a:prstGeom>
-          <a:noFill/>
-        </p:spPr>
-        <p:txBody>
-          <a:bodyPr wrap="square">
-            <a:spAutoFit/>
-          </a:bodyPr>
-          <a:lstStyle/>
-          <a:p>
-            <a:r>
-              <a:rPr sz="2800" b="1" i="0">
-                <a:solidFill>
-                  <a:srgbClr val="1A1A1A"/>
-                </a:solidFill>
-                <a:latin typeface="Arial"/>
-              </a:rPr>
-              <a:t>Five things you do not pay to invent</a:t>
-            </a:r>
-          </a:p>
-        </p:txBody>
-      </p:sp>
-      <p:sp>
-        <p:nvSpPr>
-          <p:cNvPr id="4" name="Oval 3"/>
-          <p:cNvSpPr/>
-          <p:nvPr/>
-        </p:nvSpPr>
-        <p:spPr>
-          <a:xfrm>
-            <a:off x="621792" y="1417320"/>
-            <a:ext cx="310896" cy="310896"/>
-          </a:xfrm>
-          <a:prstGeom prst="ellipse">
-            <a:avLst/>
-          </a:prstGeom>
-          <a:solidFill>
-            <a:srgbClr val="009CD6"/>
-          </a:solidFill>
-          <a:ln>
-            <a:noFill/>
-          </a:ln>
-          <a:effectLst/>
-        </p:spPr>
-        <p:style>
-          <a:lnRef idx="1">
-            <a:schemeClr val="accent1"/>
-          </a:lnRef>
-          <a:fillRef idx="3">
-            <a:schemeClr val="accent1"/>
-          </a:fillRef>
-          <a:effectRef idx="2">
-            <a:schemeClr val="accent1"/>
-          </a:effectRef>
-          <a:fontRef idx="minor">
-            <a:schemeClr val="lt1"/>
-          </a:fontRef>
-        </p:style>
-        <p:txBody>
-          <a:bodyPr rtlCol="0" anchor="ctr" lIns="0" rIns="0" tIns="0" bIns="0" wrap="square"/>
-          <a:lstStyle/>
-          <a:p>
-            <a:pPr algn="ctr"/>
-            <a:r>
-              <a:rPr sz="1300" b="1" i="0">
-                <a:solidFill>
-                  <a:srgbClr val="FFFFFF"/>
-                </a:solidFill>
-                <a:latin typeface="Arial"/>
-              </a:rPr>
-              <a:t>1</a:t>
-            </a:r>
-          </a:p>
-        </p:txBody>
-      </p:sp>
-      <p:sp>
-        <p:nvSpPr>
-          <p:cNvPr id="5" name="TextBox 4"/>
-          <p:cNvSpPr txBox="1"/>
-          <p:nvPr/>
-        </p:nvSpPr>
-        <p:spPr>
-          <a:xfrm>
-            <a:off x="1115568" y="1371600"/>
-            <a:ext cx="10527487" cy="950976"/>
-          </a:xfrm>
-          <a:prstGeom prst="rect">
-            <a:avLst/>
-          </a:prstGeom>
-          <a:noFill/>
-        </p:spPr>
-        <p:txBody>
-          <a:bodyPr wrap="square">
-            <a:spAutoFit/>
-          </a:bodyPr>
-          <a:lstStyle/>
-          <a:p>
-            <a:pPr>
-              <a:spcAft>
-                <a:spcPts val="300"/>
-              </a:spcAft>
-            </a:pPr>
-            <a:r>
-              <a:rPr sz="1750" b="1" i="0">
-                <a:solidFill>
-                  <a:srgbClr val="1A1A1A"/>
-                </a:solidFill>
-                <a:latin typeface="Arial"/>
-              </a:rPr>
-              <a:t>A way to organise ministries and authorities</a:t>
-            </a:r>
-          </a:p>
-          <a:p>
-            <a:pPr>
-              <a:spcAft>
-                <a:spcPts val="300"/>
-              </a:spcAft>
-            </a:pPr>
-            <a:r>
-              <a:rPr sz="1350" b="0" i="0">
-                <a:solidFill>
-                  <a:srgbClr val="595959"/>
-                </a:solidFill>
-                <a:latin typeface="Arial"/>
-              </a:rPr>
-              <a:t>Every body is a policy unit, a regulatory agency or a service-delivery authority — the classification is published, not argued over for three months.</a:t>
-            </a:r>
-          </a:p>
-        </p:txBody>
-      </p:sp>
-      <p:sp>
-        <p:nvSpPr>
-          <p:cNvPr id="6" name="Rectangle 5"/>
-          <p:cNvSpPr/>
-          <p:nvPr/>
-        </p:nvSpPr>
-        <p:spPr>
-          <a:xfrm>
-            <a:off x="621792" y="2327148"/>
-            <a:ext cx="10881360" cy="12700"/>
-          </a:xfrm>
-          <a:prstGeom prst="rect">
-            <a:avLst/>
-          </a:prstGeom>
-          <a:solidFill>
-            <a:srgbClr val="DDECF4"/>
-          </a:solidFill>
-          <a:ln>
-            <a:noFill/>
-          </a:ln>
-          <a:effectLst/>
-        </p:spPr>
-        <p:style>
-          <a:lnRef idx="1">
-            <a:schemeClr val="accent1"/>
-          </a:lnRef>
-          <a:fillRef idx="3">
-            <a:schemeClr val="accent1"/>
-          </a:fillRef>
-          <a:effectRef idx="2">
-            <a:schemeClr val="accent1"/>
-          </a:effectRef>
-          <a:fontRef idx="minor">
-            <a:schemeClr val="lt1"/>
-          </a:fontRef>
-        </p:style>
-        <p:txBody>
-          <a:bodyPr rtlCol="0" anchor="ctr"/>
-          <a:lstStyle/>
-          <a:p>
-            <a:pPr algn="ctr"/>
-          </a:p>
-        </p:txBody>
-      </p:sp>
-      <p:sp>
-        <p:nvSpPr>
-          <p:cNvPr id="7" name="Oval 6"/>
-          <p:cNvSpPr/>
-          <p:nvPr/>
-        </p:nvSpPr>
-        <p:spPr>
-          <a:xfrm>
-            <a:off x="621792" y="2414015"/>
-            <a:ext cx="310896" cy="310896"/>
-          </a:xfrm>
-          <a:prstGeom prst="ellipse">
-            <a:avLst/>
-          </a:prstGeom>
-          <a:solidFill>
-            <a:srgbClr val="009CD6"/>
-          </a:solidFill>
-          <a:ln>
-            <a:noFill/>
-          </a:ln>
-          <a:effectLst/>
-        </p:spPr>
-        <p:style>
-          <a:lnRef idx="1">
-            <a:schemeClr val="accent1"/>
-          </a:lnRef>
-          <a:fillRef idx="3">
-            <a:schemeClr val="accent1"/>
-          </a:fillRef>
-          <a:effectRef idx="2">
-            <a:schemeClr val="accent1"/>
-          </a:effectRef>
-          <a:fontRef idx="minor">
-            <a:schemeClr val="lt1"/>
-          </a:fontRef>
-        </p:style>
-        <p:txBody>
-          <a:bodyPr rtlCol="0" anchor="ctr" lIns="0" rIns="0" tIns="0" bIns="0" wrap="square"/>
-          <a:lstStyle/>
-          <a:p>
-            <a:pPr algn="ctr"/>
-            <a:r>
-              <a:rPr sz="1300" b="1" i="0">
-                <a:solidFill>
-                  <a:srgbClr val="FFFFFF"/>
-                </a:solidFill>
-                <a:latin typeface="Arial"/>
-              </a:rPr>
-              <a:t>2</a:t>
-            </a:r>
-          </a:p>
-        </p:txBody>
-      </p:sp>
-      <p:sp>
-        <p:nvSpPr>
-          <p:cNvPr id="8" name="TextBox 7"/>
-          <p:cNvSpPr txBox="1"/>
-          <p:nvPr/>
-        </p:nvSpPr>
-        <p:spPr>
-          <a:xfrm>
-            <a:off x="1115568" y="2368296"/>
-            <a:ext cx="10527487" cy="950976"/>
-          </a:xfrm>
-          <a:prstGeom prst="rect">
-            <a:avLst/>
-          </a:prstGeom>
-          <a:noFill/>
-        </p:spPr>
-        <p:txBody>
-          <a:bodyPr wrap="square">
-            <a:spAutoFit/>
-          </a:bodyPr>
-          <a:lstStyle/>
-          <a:p>
-            <a:pPr>
-              <a:spcAft>
-                <a:spcPts val="300"/>
-              </a:spcAft>
-            </a:pPr>
-            <a:r>
-              <a:rPr sz="1750" b="1" i="0">
-                <a:solidFill>
-                  <a:srgbClr val="1A1A1A"/>
-                </a:solidFill>
-                <a:latin typeface="Arial"/>
-              </a:rPr>
-              <a:t>Plain words for the basic terms</a:t>
-            </a:r>
-          </a:p>
-          <a:p>
-            <a:pPr>
-              <a:spcAft>
-                <a:spcPts val="300"/>
-              </a:spcAft>
-            </a:pPr>
-            <a:r>
-              <a:rPr sz="1350" b="0" i="0">
-                <a:solidFill>
-                  <a:srgbClr val="595959"/>
-                </a:solidFill>
-                <a:latin typeface="Arial"/>
-              </a:rPr>
-              <a:t>Capability. Service. Application. Data domain. Defined on day one.</a:t>
-            </a:r>
-          </a:p>
-        </p:txBody>
-      </p:sp>
-      <p:sp>
-        <p:nvSpPr>
-          <p:cNvPr id="9" name="Rectangle 8"/>
-          <p:cNvSpPr/>
-          <p:nvPr/>
-        </p:nvSpPr>
-        <p:spPr>
-          <a:xfrm>
-            <a:off x="621792" y="3323844"/>
-            <a:ext cx="10881360" cy="12700"/>
-          </a:xfrm>
-          <a:prstGeom prst="rect">
-            <a:avLst/>
-          </a:prstGeom>
-          <a:solidFill>
-            <a:srgbClr val="DDECF4"/>
-          </a:solidFill>
-          <a:ln>
-            <a:noFill/>
-          </a:ln>
-          <a:effectLst/>
-        </p:spPr>
-        <p:style>
-          <a:lnRef idx="1">
-            <a:schemeClr val="accent1"/>
-          </a:lnRef>
-          <a:fillRef idx="3">
-            <a:schemeClr val="accent1"/>
-          </a:fillRef>
-          <a:effectRef idx="2">
-            <a:schemeClr val="accent1"/>
-          </a:effectRef>
-          <a:fontRef idx="minor">
-            <a:schemeClr val="lt1"/>
-          </a:fontRef>
-        </p:style>
-        <p:txBody>
-          <a:bodyPr rtlCol="0" anchor="ctr"/>
-          <a:lstStyle/>
-          <a:p>
-            <a:pPr algn="ctr"/>
-          </a:p>
-        </p:txBody>
-      </p:sp>
-      <p:sp>
-        <p:nvSpPr>
-          <p:cNvPr id="10" name="Oval 9"/>
-          <p:cNvSpPr/>
-          <p:nvPr/>
-        </p:nvSpPr>
-        <p:spPr>
-          <a:xfrm>
-            <a:off x="621792" y="3410712"/>
-            <a:ext cx="310896" cy="310896"/>
-          </a:xfrm>
-          <a:prstGeom prst="ellipse">
-            <a:avLst/>
-          </a:prstGeom>
-          <a:solidFill>
-            <a:srgbClr val="009CD6"/>
-          </a:solidFill>
-          <a:ln>
-            <a:noFill/>
-          </a:ln>
-          <a:effectLst/>
-        </p:spPr>
-        <p:style>
-          <a:lnRef idx="1">
-            <a:schemeClr val="accent1"/>
-          </a:lnRef>
-          <a:fillRef idx="3">
-            <a:schemeClr val="accent1"/>
-          </a:fillRef>
-          <a:effectRef idx="2">
-            <a:schemeClr val="accent1"/>
-          </a:effectRef>
-          <a:fontRef idx="minor">
-            <a:schemeClr val="lt1"/>
-          </a:fontRef>
-        </p:style>
-        <p:txBody>
-          <a:bodyPr rtlCol="0" anchor="ctr" lIns="0" rIns="0" tIns="0" bIns="0" wrap="square"/>
-          <a:lstStyle/>
-          <a:p>
-            <a:pPr algn="ctr"/>
-            <a:r>
-              <a:rPr sz="1300" b="1" i="0">
-                <a:solidFill>
-                  <a:srgbClr val="FFFFFF"/>
-                </a:solidFill>
-                <a:latin typeface="Arial"/>
-              </a:rPr>
-              <a:t>3</a:t>
-            </a:r>
-          </a:p>
-        </p:txBody>
-      </p:sp>
-      <p:sp>
-        <p:nvSpPr>
-          <p:cNvPr id="11" name="TextBox 10"/>
-          <p:cNvSpPr txBox="1"/>
-          <p:nvPr/>
-        </p:nvSpPr>
-        <p:spPr>
-          <a:xfrm>
-            <a:off x="1115568" y="3364992"/>
-            <a:ext cx="10527487" cy="950976"/>
-          </a:xfrm>
-          <a:prstGeom prst="rect">
-            <a:avLst/>
-          </a:prstGeom>
-          <a:noFill/>
-        </p:spPr>
-        <p:txBody>
-          <a:bodyPr wrap="square">
-            <a:spAutoFit/>
-          </a:bodyPr>
-          <a:lstStyle/>
-          <a:p>
-            <a:pPr>
-              <a:spcAft>
-                <a:spcPts val="300"/>
-              </a:spcAft>
-            </a:pPr>
-            <a:r>
-              <a:rPr sz="1750" b="1" i="0">
-                <a:solidFill>
-                  <a:srgbClr val="1A1A1A"/>
-                </a:solidFill>
-                <a:latin typeface="Arial"/>
-              </a:rPr>
-              <a:t>A library of common building blocks</a:t>
-            </a:r>
-          </a:p>
-          <a:p>
-            <a:pPr>
-              <a:spcAft>
-                <a:spcPts val="300"/>
-              </a:spcAft>
-            </a:pPr>
-            <a:r>
-              <a:rPr sz="1350" b="0" i="0">
-                <a:solidFill>
-                  <a:srgbClr val="595959"/>
-                </a:solidFill>
-                <a:latin typeface="Arial"/>
-              </a:rPr>
-              <a:t>Identity, payments, information sharing, registries — published specifications with working examples.</a:t>
-            </a:r>
-          </a:p>
-        </p:txBody>
-      </p:sp>
-      <p:sp>
-        <p:nvSpPr>
-          <p:cNvPr id="12" name="Rectangle 11"/>
-          <p:cNvSpPr/>
-          <p:nvPr/>
-        </p:nvSpPr>
-        <p:spPr>
-          <a:xfrm>
-            <a:off x="621792" y="4320540"/>
-            <a:ext cx="10881360" cy="12700"/>
-          </a:xfrm>
-          <a:prstGeom prst="rect">
-            <a:avLst/>
-          </a:prstGeom>
-          <a:solidFill>
-            <a:srgbClr val="DDECF4"/>
-          </a:solidFill>
-          <a:ln>
-            <a:noFill/>
-          </a:ln>
-          <a:effectLst/>
-        </p:spPr>
-        <p:style>
-          <a:lnRef idx="1">
-            <a:schemeClr val="accent1"/>
-          </a:lnRef>
-          <a:fillRef idx="3">
-            <a:schemeClr val="accent1"/>
-          </a:fillRef>
-          <a:effectRef idx="2">
-            <a:schemeClr val="accent1"/>
-          </a:effectRef>
-          <a:fontRef idx="minor">
-            <a:schemeClr val="lt1"/>
-          </a:fontRef>
-        </p:style>
-        <p:txBody>
-          <a:bodyPr rtlCol="0" anchor="ctr"/>
-          <a:lstStyle/>
-          <a:p>
-            <a:pPr algn="ctr"/>
-          </a:p>
-        </p:txBody>
-      </p:sp>
-      <p:sp>
-        <p:nvSpPr>
-          <p:cNvPr id="13" name="Oval 12"/>
-          <p:cNvSpPr/>
-          <p:nvPr/>
-        </p:nvSpPr>
-        <p:spPr>
-          <a:xfrm>
-            <a:off x="621792" y="4407408"/>
-            <a:ext cx="310896" cy="310896"/>
-          </a:xfrm>
-          <a:prstGeom prst="ellipse">
-            <a:avLst/>
-          </a:prstGeom>
-          <a:solidFill>
-            <a:srgbClr val="009CD6"/>
-          </a:solidFill>
-          <a:ln>
-            <a:noFill/>
-          </a:ln>
-          <a:effectLst/>
-        </p:spPr>
-        <p:style>
-          <a:lnRef idx="1">
-            <a:schemeClr val="accent1"/>
-          </a:lnRef>
-          <a:fillRef idx="3">
-            <a:schemeClr val="accent1"/>
-          </a:fillRef>
-          <a:effectRef idx="2">
-            <a:schemeClr val="accent1"/>
-          </a:effectRef>
-          <a:fontRef idx="minor">
-            <a:schemeClr val="lt1"/>
-          </a:fontRef>
-        </p:style>
-        <p:txBody>
-          <a:bodyPr rtlCol="0" anchor="ctr" lIns="0" rIns="0" tIns="0" bIns="0" wrap="square"/>
-          <a:lstStyle/>
-          <a:p>
-            <a:pPr algn="ctr"/>
-            <a:r>
-              <a:rPr sz="1300" b="1" i="0">
-                <a:solidFill>
-                  <a:srgbClr val="FFFFFF"/>
-                </a:solidFill>
-                <a:latin typeface="Arial"/>
-              </a:rPr>
-              <a:t>4</a:t>
-            </a:r>
-          </a:p>
-        </p:txBody>
-      </p:sp>
-      <p:sp>
-        <p:nvSpPr>
-          <p:cNvPr id="14" name="TextBox 13"/>
-          <p:cNvSpPr txBox="1"/>
-          <p:nvPr/>
-        </p:nvSpPr>
-        <p:spPr>
-          <a:xfrm>
-            <a:off x="1115568" y="4361688"/>
-            <a:ext cx="10527487" cy="950976"/>
-          </a:xfrm>
-          <a:prstGeom prst="rect">
-            <a:avLst/>
-          </a:prstGeom>
-          <a:noFill/>
-        </p:spPr>
-        <p:txBody>
-          <a:bodyPr wrap="square">
-            <a:spAutoFit/>
-          </a:bodyPr>
-          <a:lstStyle/>
-          <a:p>
-            <a:pPr>
-              <a:spcAft>
-                <a:spcPts val="300"/>
-              </a:spcAft>
-            </a:pPr>
-            <a:r>
-              <a:rPr sz="1750" b="1" i="0">
-                <a:solidFill>
-                  <a:srgbClr val="1A1A1A"/>
-                </a:solidFill>
-                <a:latin typeface="Arial"/>
-              </a:rPr>
-              <a:t>Ten architectural principles</a:t>
-            </a:r>
-          </a:p>
-          <a:p>
-            <a:pPr>
-              <a:spcAft>
-                <a:spcPts val="300"/>
-              </a:spcAft>
-            </a:pPr>
-            <a:r>
-              <a:rPr sz="1350" b="0" i="0">
-                <a:solidFill>
-                  <a:srgbClr val="595959"/>
-                </a:solidFill>
-                <a:latin typeface="Arial"/>
-              </a:rPr>
-              <a:t>From rule of law to user-centred design — already debated across many countries. You extend them; you do not draft them.</a:t>
-            </a:r>
-          </a:p>
-        </p:txBody>
-      </p:sp>
-      <p:sp>
-        <p:nvSpPr>
-          <p:cNvPr id="15" name="Rectangle 14"/>
-          <p:cNvSpPr/>
-          <p:nvPr/>
-        </p:nvSpPr>
-        <p:spPr>
-          <a:xfrm>
-            <a:off x="621792" y="5317236"/>
-            <a:ext cx="10881360" cy="12700"/>
-          </a:xfrm>
-          <a:prstGeom prst="rect">
-            <a:avLst/>
-          </a:prstGeom>
-          <a:solidFill>
-            <a:srgbClr val="DDECF4"/>
-          </a:solidFill>
-          <a:ln>
-            <a:noFill/>
-          </a:ln>
-          <a:effectLst/>
-        </p:spPr>
-        <p:style>
-          <a:lnRef idx="1">
-            <a:schemeClr val="accent1"/>
-          </a:lnRef>
-          <a:fillRef idx="3">
-            <a:schemeClr val="accent1"/>
-          </a:fillRef>
-          <a:effectRef idx="2">
-            <a:schemeClr val="accent1"/>
-          </a:effectRef>
-          <a:fontRef idx="minor">
-            <a:schemeClr val="lt1"/>
-          </a:fontRef>
-        </p:style>
-        <p:txBody>
-          <a:bodyPr rtlCol="0" anchor="ctr"/>
-          <a:lstStyle/>
-          <a:p>
-            <a:pPr algn="ctr"/>
-          </a:p>
-        </p:txBody>
-      </p:sp>
-      <p:sp>
-        <p:nvSpPr>
-          <p:cNvPr id="16" name="Oval 15"/>
-          <p:cNvSpPr/>
-          <p:nvPr/>
-        </p:nvSpPr>
-        <p:spPr>
-          <a:xfrm>
-            <a:off x="621792" y="5404104"/>
-            <a:ext cx="310896" cy="310896"/>
-          </a:xfrm>
-          <a:prstGeom prst="ellipse">
-            <a:avLst/>
-          </a:prstGeom>
-          <a:solidFill>
-            <a:srgbClr val="009CD6"/>
-          </a:solidFill>
-          <a:ln>
-            <a:noFill/>
-          </a:ln>
-          <a:effectLst/>
-        </p:spPr>
-        <p:style>
-          <a:lnRef idx="1">
-            <a:schemeClr val="accent1"/>
-          </a:lnRef>
-          <a:fillRef idx="3">
-            <a:schemeClr val="accent1"/>
-          </a:fillRef>
-          <a:effectRef idx="2">
-            <a:schemeClr val="accent1"/>
-          </a:effectRef>
-          <a:fontRef idx="minor">
-            <a:schemeClr val="lt1"/>
-          </a:fontRef>
-        </p:style>
-        <p:txBody>
-          <a:bodyPr rtlCol="0" anchor="ctr" lIns="0" rIns="0" tIns="0" bIns="0" wrap="square"/>
-          <a:lstStyle/>
-          <a:p>
-            <a:pPr algn="ctr"/>
-            <a:r>
-              <a:rPr sz="1300" b="1" i="0">
-                <a:solidFill>
-                  <a:srgbClr val="FFFFFF"/>
-                </a:solidFill>
-                <a:latin typeface="Arial"/>
-              </a:rPr>
-              <a:t>5</a:t>
-            </a:r>
-          </a:p>
-        </p:txBody>
-      </p:sp>
-      <p:sp>
-        <p:nvSpPr>
-          <p:cNvPr id="17" name="TextBox 16"/>
-          <p:cNvSpPr txBox="1"/>
-          <p:nvPr/>
-        </p:nvSpPr>
-        <p:spPr>
-          <a:xfrm>
-            <a:off x="1115568" y="5358384"/>
-            <a:ext cx="10527487" cy="950976"/>
-          </a:xfrm>
-          <a:prstGeom prst="rect">
-            <a:avLst/>
-          </a:prstGeom>
-          <a:noFill/>
-        </p:spPr>
-        <p:txBody>
-          <a:bodyPr wrap="square">
-            <a:spAutoFit/>
-          </a:bodyPr>
-          <a:lstStyle/>
-          <a:p>
-            <a:pPr>
-              <a:spcAft>
-                <a:spcPts val="300"/>
-              </a:spcAft>
-            </a:pPr>
-            <a:r>
-              <a:rPr sz="1750" b="1" i="0">
-                <a:solidFill>
-                  <a:srgbClr val="1A1A1A"/>
-                </a:solidFill>
-                <a:latin typeface="Arial"/>
-              </a:rPr>
-              <a:t>A way to run the work</a:t>
-            </a:r>
-          </a:p>
-          <a:p>
-            <a:pPr>
-              <a:spcAft>
-                <a:spcPts val="300"/>
-              </a:spcAft>
-            </a:pPr>
-            <a:r>
-              <a:rPr sz="1350" b="0" i="0">
-                <a:solidFill>
-                  <a:srgbClr val="595959"/>
-                </a:solidFill>
-                <a:latin typeface="Arial"/>
-              </a:rPr>
-              <a:t>The lifecycle — Discover, Assess, Adapt, Plan, Execute &amp; Govern — with roles, decisions and sign-offs per phase. Next video.</a:t>
-            </a:r>
-          </a:p>
-        </p:txBody>
-      </p:sp>
-      <p:sp>
-        <p:nvSpPr>
-          <p:cNvPr id="18" name="TextBox 17"/>
-          <p:cNvSpPr txBox="1"/>
-          <p:nvPr/>
-        </p:nvSpPr>
-        <p:spPr>
-          <a:xfrm>
-            <a:off x="457200" y="6473952"/>
-            <a:ext cx="7772400" cy="292608"/>
-          </a:xfrm>
-          <a:prstGeom prst="rect">
-            <a:avLst/>
-          </a:prstGeom>
-          <a:noFill/>
-        </p:spPr>
-        <p:txBody>
-          <a:bodyPr wrap="square">
-            <a:spAutoFit/>
-          </a:bodyPr>
-          <a:lstStyle/>
-          <a:p>
-            <a:r>
-              <a:rPr sz="900" b="0" i="0">
-                <a:solidFill>
-                  <a:srgbClr val="595959"/>
-                </a:solidFill>
-                <a:latin typeface="Arial"/>
-              </a:rPr>
-              <a:t>1.5 · Why PAERA-anchored</a:t>
-            </a:r>
-          </a:p>
-        </p:txBody>
-      </p:sp>
-    </p:spTree>
-  </p:cSld>
-  <p:clrMapOvr>
-    <a:masterClrMapping/>
-  </p:clrMapOvr>
-</p:sld>
-</file>
-
-<file path=ppt/slides/slide33.xml><?xml version="1.0" encoding="utf-8"?>
-<p:sld xmlns:a="http://schemas.openxmlformats.org/drawingml/2006/main" xmlns:p="http://schemas.openxmlformats.org/presentationml/2006/main" xmlns:r="http://schemas.openxmlformats.org/officeDocument/2006/relationships">
-  <p:cSld>
-    <p:spTree>
-      <p:nvGrpSpPr>
-        <p:cNvPr id="1" name=""/>
-        <p:cNvGrpSpPr/>
-        <p:nvPr/>
-      </p:nvGrpSpPr>
-      <p:grpSpPr/>
-      <p:sp>
-        <p:nvSpPr>
-          <p:cNvPr id="2" name="Rectangle 1"/>
-          <p:cNvSpPr/>
-          <p:nvPr/>
-        </p:nvSpPr>
-        <p:spPr>
-          <a:xfrm>
-            <a:off x="457200" y="384048"/>
-            <a:ext cx="45720" cy="256032"/>
-          </a:xfrm>
-          <a:prstGeom prst="rect">
-            <a:avLst/>
-          </a:prstGeom>
-          <a:solidFill>
-            <a:srgbClr val="009CD6"/>
-          </a:solidFill>
-          <a:ln>
-            <a:noFill/>
-          </a:ln>
-          <a:effectLst/>
-        </p:spPr>
-        <p:style>
-          <a:lnRef idx="1">
-            <a:schemeClr val="accent1"/>
-          </a:lnRef>
-          <a:fillRef idx="3">
-            <a:schemeClr val="accent1"/>
-          </a:fillRef>
-          <a:effectRef idx="2">
-            <a:schemeClr val="accent1"/>
-          </a:effectRef>
-          <a:fontRef idx="minor">
-            <a:schemeClr val="lt1"/>
-          </a:fontRef>
-        </p:style>
-        <p:txBody>
-          <a:bodyPr rtlCol="0" anchor="ctr"/>
-          <a:lstStyle/>
-          <a:p>
-            <a:pPr algn="ctr"/>
-          </a:p>
-        </p:txBody>
-      </p:sp>
-      <p:sp>
-        <p:nvSpPr>
-          <p:cNvPr id="3" name="TextBox 2"/>
-          <p:cNvSpPr txBox="1"/>
-          <p:nvPr/>
-        </p:nvSpPr>
-        <p:spPr>
-          <a:xfrm>
-            <a:off x="621792" y="274320"/>
-            <a:ext cx="11247120" cy="914400"/>
-          </a:xfrm>
-          <a:prstGeom prst="rect">
-            <a:avLst/>
-          </a:prstGeom>
-          <a:noFill/>
-        </p:spPr>
-        <p:txBody>
-          <a:bodyPr wrap="square">
-            <a:spAutoFit/>
-          </a:bodyPr>
-          <a:lstStyle/>
-          <a:p>
-            <a:r>
-              <a:rPr sz="2800" b="1" i="0">
-                <a:solidFill>
-                  <a:srgbClr val="1A1A1A"/>
-                </a:solidFill>
-                <a:latin typeface="Arial"/>
-              </a:rPr>
-              <a:t>One framework — every sector reuses the investment</a:t>
-            </a:r>
-          </a:p>
-        </p:txBody>
-      </p:sp>
-      <p:sp>
-        <p:nvSpPr>
-          <p:cNvPr id="4" name="Rounded Rectangle 3"/>
-          <p:cNvSpPr/>
-          <p:nvPr/>
-        </p:nvSpPr>
-        <p:spPr>
-          <a:xfrm>
-            <a:off x="822960" y="2011680"/>
-            <a:ext cx="2514600" cy="914400"/>
-          </a:xfrm>
-          <a:prstGeom prst="roundRect">
-            <a:avLst>
-              <a:gd name="adj" fmla="val 4500"/>
-            </a:avLst>
-          </a:prstGeom>
-          <a:solidFill>
-            <a:srgbClr val="E5F5FB"/>
-          </a:solidFill>
-          <a:ln>
-            <a:noFill/>
-          </a:ln>
-          <a:effectLst/>
-        </p:spPr>
-        <p:style>
-          <a:lnRef idx="1">
-            <a:schemeClr val="accent1"/>
-          </a:lnRef>
-          <a:fillRef idx="3">
-            <a:schemeClr val="accent1"/>
-          </a:fillRef>
-          <a:effectRef idx="2">
-            <a:schemeClr val="accent1"/>
-          </a:effectRef>
-          <a:fontRef idx="minor">
-            <a:schemeClr val="lt1"/>
-          </a:fontRef>
-        </p:style>
-        <p:txBody>
-          <a:bodyPr rtlCol="0" anchor="ctr" wrap="square"/>
-          <a:lstStyle/>
-          <a:p>
-            <a:pPr algn="ctr"/>
-            <a:r>
-              <a:rPr sz="1600" b="1" i="0">
-                <a:solidFill>
-                  <a:srgbClr val="1A1A1A"/>
-                </a:solidFill>
-                <a:latin typeface="Arial"/>
-              </a:rPr>
-              <a:t>Education</a:t>
-            </a:r>
-          </a:p>
-        </p:txBody>
-      </p:sp>
-      <p:sp>
-        <p:nvSpPr>
-          <p:cNvPr id="5" name="Rounded Rectangle 4"/>
-          <p:cNvSpPr/>
-          <p:nvPr/>
-        </p:nvSpPr>
-        <p:spPr>
-          <a:xfrm>
-            <a:off x="3474720" y="2011680"/>
-            <a:ext cx="2514600" cy="914400"/>
-          </a:xfrm>
-          <a:prstGeom prst="roundRect">
-            <a:avLst>
-              <a:gd name="adj" fmla="val 4500"/>
-            </a:avLst>
-          </a:prstGeom>
-          <a:solidFill>
-            <a:srgbClr val="E5F5FB"/>
-          </a:solidFill>
-          <a:ln>
-            <a:noFill/>
-          </a:ln>
-          <a:effectLst/>
-        </p:spPr>
-        <p:style>
-          <a:lnRef idx="1">
-            <a:schemeClr val="accent1"/>
-          </a:lnRef>
-          <a:fillRef idx="3">
-            <a:schemeClr val="accent1"/>
-          </a:fillRef>
-          <a:effectRef idx="2">
-            <a:schemeClr val="accent1"/>
-          </a:effectRef>
-          <a:fontRef idx="minor">
-            <a:schemeClr val="lt1"/>
-          </a:fontRef>
-        </p:style>
-        <p:txBody>
-          <a:bodyPr rtlCol="0" anchor="ctr" wrap="square"/>
-          <a:lstStyle/>
-          <a:p>
-            <a:pPr algn="ctr"/>
-            <a:r>
-              <a:rPr sz="1600" b="1" i="0">
-                <a:solidFill>
-                  <a:srgbClr val="1A1A1A"/>
-                </a:solidFill>
-                <a:latin typeface="Arial"/>
-              </a:rPr>
-              <a:t>Health</a:t>
-            </a:r>
-          </a:p>
-        </p:txBody>
-      </p:sp>
-      <p:sp>
-        <p:nvSpPr>
-          <p:cNvPr id="6" name="Rounded Rectangle 5"/>
-          <p:cNvSpPr/>
-          <p:nvPr/>
-        </p:nvSpPr>
-        <p:spPr>
-          <a:xfrm>
-            <a:off x="6126480" y="2011680"/>
-            <a:ext cx="2514600" cy="914400"/>
-          </a:xfrm>
-          <a:prstGeom prst="roundRect">
-            <a:avLst>
-              <a:gd name="adj" fmla="val 4500"/>
-            </a:avLst>
-          </a:prstGeom>
-          <a:solidFill>
-            <a:srgbClr val="E5F5FB"/>
-          </a:solidFill>
-          <a:ln>
-            <a:noFill/>
-          </a:ln>
-          <a:effectLst/>
-        </p:spPr>
-        <p:style>
-          <a:lnRef idx="1">
-            <a:schemeClr val="accent1"/>
-          </a:lnRef>
-          <a:fillRef idx="3">
-            <a:schemeClr val="accent1"/>
-          </a:fillRef>
-          <a:effectRef idx="2">
-            <a:schemeClr val="accent1"/>
-          </a:effectRef>
-          <a:fontRef idx="minor">
-            <a:schemeClr val="lt1"/>
-          </a:fontRef>
-        </p:style>
-        <p:txBody>
-          <a:bodyPr rtlCol="0" anchor="ctr" wrap="square"/>
-          <a:lstStyle/>
-          <a:p>
-            <a:pPr algn="ctr"/>
-            <a:r>
-              <a:rPr sz="1600" b="1" i="0">
-                <a:solidFill>
-                  <a:srgbClr val="1A1A1A"/>
-                </a:solidFill>
-                <a:latin typeface="Arial"/>
-              </a:rPr>
-              <a:t>Social protection</a:t>
-            </a:r>
-          </a:p>
-        </p:txBody>
-      </p:sp>
-      <p:sp>
-        <p:nvSpPr>
-          <p:cNvPr id="7" name="Rounded Rectangle 6"/>
-          <p:cNvSpPr/>
-          <p:nvPr/>
-        </p:nvSpPr>
-        <p:spPr>
-          <a:xfrm>
-            <a:off x="8778240" y="2011680"/>
-            <a:ext cx="2514600" cy="914400"/>
-          </a:xfrm>
-          <a:prstGeom prst="roundRect">
-            <a:avLst>
-              <a:gd name="adj" fmla="val 4500"/>
-            </a:avLst>
-          </a:prstGeom>
-          <a:solidFill>
-            <a:srgbClr val="E5F5FB"/>
-          </a:solidFill>
-          <a:ln>
-            <a:noFill/>
-          </a:ln>
-          <a:effectLst/>
-        </p:spPr>
-        <p:style>
-          <a:lnRef idx="1">
-            <a:schemeClr val="accent1"/>
-          </a:lnRef>
-          <a:fillRef idx="3">
-            <a:schemeClr val="accent1"/>
-          </a:fillRef>
-          <a:effectRef idx="2">
-            <a:schemeClr val="accent1"/>
-          </a:effectRef>
-          <a:fontRef idx="minor">
-            <a:schemeClr val="lt1"/>
-          </a:fontRef>
-        </p:style>
-        <p:txBody>
-          <a:bodyPr rtlCol="0" anchor="ctr" wrap="square"/>
-          <a:lstStyle/>
-          <a:p>
-            <a:pPr algn="ctr"/>
-            <a:r>
-              <a:rPr sz="1600" b="1" i="0">
-                <a:solidFill>
-                  <a:srgbClr val="1A1A1A"/>
-                </a:solidFill>
-                <a:latin typeface="Arial"/>
-              </a:rPr>
-              <a:t>Agriculture</a:t>
-            </a:r>
-          </a:p>
-        </p:txBody>
-      </p:sp>
-      <p:sp>
-        <p:nvSpPr>
-          <p:cNvPr id="8" name="Rounded Rectangle 7"/>
-          <p:cNvSpPr/>
-          <p:nvPr/>
-        </p:nvSpPr>
-        <p:spPr>
-          <a:xfrm>
-            <a:off x="822960" y="3200400"/>
-            <a:ext cx="10469880" cy="914400"/>
-          </a:xfrm>
-          <a:prstGeom prst="roundRect">
-            <a:avLst>
-              <a:gd name="adj" fmla="val 4500"/>
-            </a:avLst>
-          </a:prstGeom>
-          <a:solidFill>
-            <a:srgbClr val="009CD6"/>
-          </a:solidFill>
-          <a:ln>
-            <a:noFill/>
-          </a:ln>
-          <a:effectLst/>
-        </p:spPr>
-        <p:style>
-          <a:lnRef idx="1">
-            <a:schemeClr val="accent1"/>
-          </a:lnRef>
-          <a:fillRef idx="3">
-            <a:schemeClr val="accent1"/>
-          </a:fillRef>
-          <a:effectRef idx="2">
-            <a:schemeClr val="accent1"/>
-          </a:effectRef>
-          <a:fontRef idx="minor">
-            <a:schemeClr val="lt1"/>
-          </a:fontRef>
-        </p:style>
-        <p:txBody>
-          <a:bodyPr rtlCol="0" anchor="ctr" wrap="square"/>
-          <a:lstStyle/>
-          <a:p>
-            <a:pPr algn="ctr"/>
-            <a:r>
-              <a:rPr sz="1800" b="1" i="0">
-                <a:solidFill>
-                  <a:srgbClr val="FFFFFF"/>
-                </a:solidFill>
-                <a:latin typeface="Arial"/>
-              </a:rPr>
-              <a:t>PAERA — the same framework underneath</a:t>
-            </a:r>
-          </a:p>
-        </p:txBody>
-      </p:sp>
-      <p:sp>
-        <p:nvSpPr>
-          <p:cNvPr id="9" name="TextBox 8"/>
-          <p:cNvSpPr txBox="1"/>
-          <p:nvPr/>
-        </p:nvSpPr>
-        <p:spPr>
-          <a:xfrm>
-            <a:off x="822960" y="4572000"/>
-            <a:ext cx="10515600" cy="1280160"/>
-          </a:xfrm>
-          <a:prstGeom prst="rect">
-            <a:avLst/>
-          </a:prstGeom>
-          <a:noFill/>
-        </p:spPr>
-        <p:txBody>
-          <a:bodyPr wrap="square">
-            <a:spAutoFit/>
-          </a:bodyPr>
-          <a:lstStyle/>
-          <a:p>
-            <a:pPr>
-              <a:spcAft>
-                <a:spcPts val="800"/>
-              </a:spcAft>
-            </a:pPr>
-            <a:r>
-              <a:rPr sz="1800" b="0" i="0">
-                <a:solidFill>
-                  <a:srgbClr val="1A1A1A"/>
-                </a:solidFill>
-                <a:latin typeface="Arial"/>
-              </a:rPr>
-              <a:t>Once your country builds the EA muscle for one sector, every next sector reuses the same investment.</a:t>
-            </a:r>
-          </a:p>
-          <a:p>
-            <a:pPr>
-              <a:spcAft>
-                <a:spcPts val="800"/>
-              </a:spcAft>
-            </a:pPr>
-            <a:r>
-              <a:rPr sz="1800" b="1" i="0">
-                <a:solidFill>
-                  <a:srgbClr val="006E96"/>
-                </a:solidFill>
-                <a:latin typeface="Arial"/>
-              </a:rPr>
-              <a:t>The second sector is cheaper than the first. The third is cheaper still.</a:t>
-            </a:r>
-          </a:p>
-        </p:txBody>
-      </p:sp>
-      <p:sp>
-        <p:nvSpPr>
-          <p:cNvPr id="10" name="TextBox 9"/>
-          <p:cNvSpPr txBox="1"/>
-          <p:nvPr/>
-        </p:nvSpPr>
-        <p:spPr>
-          <a:xfrm>
-            <a:off x="457200" y="6473952"/>
-            <a:ext cx="7772400" cy="292608"/>
-          </a:xfrm>
-          <a:prstGeom prst="rect">
-            <a:avLst/>
-          </a:prstGeom>
-          <a:noFill/>
-        </p:spPr>
-        <p:txBody>
-          <a:bodyPr wrap="square">
-            <a:spAutoFit/>
-          </a:bodyPr>
-          <a:lstStyle/>
-          <a:p>
-            <a:r>
-              <a:rPr sz="900" b="0" i="0">
-                <a:solidFill>
-                  <a:srgbClr val="595959"/>
-                </a:solidFill>
-                <a:latin typeface="Arial"/>
-              </a:rPr>
-              <a:t>1.5 · Why PAERA-anchored</a:t>
-            </a:r>
-          </a:p>
-        </p:txBody>
-      </p:sp>
-    </p:spTree>
-  </p:cSld>
-  <p:clrMapOvr>
-    <a:masterClrMapping/>
-  </p:clrMapOvr>
-</p:sld>
-</file>
-
 <file path=ppt/slides/slide34.xml><?xml version="1.0" encoding="utf-8"?>
 <p:sld xmlns:a="http://schemas.openxmlformats.org/drawingml/2006/main" xmlns:p="http://schemas.openxmlformats.org/presentationml/2006/main" xmlns:r="http://schemas.openxmlformats.org/officeDocument/2006/relationships">
   <p:cSld>
@@ -14398,58 +11650,14 @@
       <p:grpSpPr/>
       <p:sp>
         <p:nvSpPr>
-          <p:cNvPr id="2" name="Rectangle 1"/>
-          <p:cNvSpPr/>
-          <p:nvPr/>
-        </p:nvSpPr>
-        <p:spPr>
-          <a:xfrm>
-            <a:off x="457200" y="384048"/>
-            <a:ext cx="45720" cy="256032"/>
-          </a:xfrm>
-          <a:prstGeom prst="rect">
-            <a:avLst/>
-          </a:prstGeom>
-          <a:solidFill>
-            <a:srgbClr val="009CD6"/>
-          </a:solidFill>
-          <a:ln>
-            <a:noFill/>
-          </a:ln>
-          <a:effectLst/>
-        </p:spPr>
-        <p:style>
-          <a:lnRef idx="1">
-            <a:schemeClr val="accent1"/>
-          </a:lnRef>
-          <a:fillRef idx="3">
-            <a:schemeClr val="accent1"/>
-          </a:fillRef>
-          <a:effectRef idx="2">
-            <a:schemeClr val="accent1"/>
-          </a:effectRef>
-          <a:fontRef idx="minor">
-            <a:schemeClr val="lt1"/>
-          </a:fontRef>
-        </p:style>
-        <p:txBody>
-          <a:bodyPr rtlCol="0" anchor="ctr"/>
-          <a:lstStyle/>
-          <a:p>
-            <a:pPr algn="ctr"/>
-          </a:p>
-        </p:txBody>
-      </p:sp>
-      <p:sp>
-        <p:nvSpPr>
-          <p:cNvPr id="3" name="TextBox 2"/>
+          <p:cNvPr id="2" name="TextBox 1"/>
           <p:cNvSpPr txBox="1"/>
           <p:nvPr/>
         </p:nvSpPr>
         <p:spPr>
           <a:xfrm>
-            <a:off x="621792" y="274320"/>
-            <a:ext cx="11247120" cy="914400"/>
+            <a:off x="822960" y="822960"/>
+            <a:ext cx="7315200" cy="457200"/>
           </a:xfrm>
           <a:prstGeom prst="rect">
             <a:avLst/>
@@ -14463,532 +11671,95 @@
           <a:lstStyle/>
           <a:p>
             <a:r>
-              <a:rPr sz="2800" b="1" i="0">
+              <a:rPr sz="1200" b="1" i="0">
+                <a:solidFill>
+                  <a:srgbClr val="595959"/>
+                </a:solidFill>
+                <a:latin typeface="Arial"/>
+              </a:rPr>
+              <a:t>KP1 · MODULE 1 · VIDEO 1.5</a:t>
+            </a:r>
+          </a:p>
+        </p:txBody>
+      </p:sp>
+      <p:sp>
+        <p:nvSpPr>
+          <p:cNvPr id="3" name="TextBox 2"/>
+          <p:cNvSpPr txBox="1"/>
+          <p:nvPr/>
+        </p:nvSpPr>
+        <p:spPr>
+          <a:xfrm>
+            <a:off x="822960" y="1828800"/>
+            <a:ext cx="2011680" cy="1097280"/>
+          </a:xfrm>
+          <a:prstGeom prst="rect">
+            <a:avLst/>
+          </a:prstGeom>
+          <a:noFill/>
+        </p:spPr>
+        <p:txBody>
+          <a:bodyPr wrap="square">
+            <a:spAutoFit/>
+          </a:bodyPr>
+          <a:lstStyle/>
+          <a:p>
+            <a:r>
+              <a:rPr sz="6000" b="1" i="0">
+                <a:solidFill>
+                  <a:srgbClr val="009CD6"/>
+                </a:solidFill>
+                <a:latin typeface="Arial"/>
+              </a:rPr>
+              <a:t>1.5</a:t>
+            </a:r>
+          </a:p>
+        </p:txBody>
+      </p:sp>
+      <p:sp>
+        <p:nvSpPr>
+          <p:cNvPr id="4" name="TextBox 3"/>
+          <p:cNvSpPr txBox="1"/>
+          <p:nvPr/>
+        </p:nvSpPr>
+        <p:spPr>
+          <a:xfrm>
+            <a:off x="822960" y="2880360"/>
+            <a:ext cx="9601200" cy="1371600"/>
+          </a:xfrm>
+          <a:prstGeom prst="rect">
+            <a:avLst/>
+          </a:prstGeom>
+          <a:noFill/>
+        </p:spPr>
+        <p:txBody>
+          <a:bodyPr wrap="square">
+            <a:spAutoFit/>
+          </a:bodyPr>
+          <a:lstStyle/>
+          <a:p>
+            <a:r>
+              <a:rPr sz="3400" b="1" i="0">
                 <a:solidFill>
                   <a:srgbClr val="1A1A1A"/>
                 </a:solidFill>
                 <a:latin typeface="Arial"/>
               </a:rPr>
-              <a:t>PAERA connects your team to a working network</a:t>
-            </a:r>
-          </a:p>
-        </p:txBody>
-      </p:sp>
-      <p:cxnSp>
-        <p:nvCxnSpPr>
-          <p:cNvPr id="4" name="Connector 3"/>
-          <p:cNvCxnSpPr/>
-          <p:nvPr/>
-        </p:nvCxnSpPr>
-        <p:spPr>
-          <a:xfrm>
-            <a:off x="2926079" y="2034540"/>
-            <a:ext cx="3172969" cy="1348740"/>
-          </a:xfrm>
-          <a:prstGeom prst="line">
-            <a:avLst/>
-          </a:prstGeom>
-          <a:ln w="15240">
-            <a:solidFill>
-              <a:srgbClr val="BFBFBF"/>
-            </a:solidFill>
-          </a:ln>
-        </p:spPr>
-        <p:style>
-          <a:lnRef idx="2">
-            <a:schemeClr val="accent1"/>
-          </a:lnRef>
-          <a:fillRef idx="0">
-            <a:schemeClr val="accent1"/>
-          </a:fillRef>
-          <a:effectRef idx="1">
-            <a:schemeClr val="accent1"/>
-          </a:effectRef>
-          <a:fontRef idx="minor">
-            <a:schemeClr val="tx1"/>
-          </a:fontRef>
-        </p:style>
-      </p:cxnSp>
-      <p:cxnSp>
-        <p:nvCxnSpPr>
-          <p:cNvPr id="5" name="Connector 4"/>
-          <p:cNvCxnSpPr/>
-          <p:nvPr/>
-        </p:nvCxnSpPr>
-        <p:spPr>
-          <a:xfrm flipH="1">
-            <a:off x="6099048" y="2034540"/>
-            <a:ext cx="2953511" cy="1348740"/>
-          </a:xfrm>
-          <a:prstGeom prst="line">
-            <a:avLst/>
-          </a:prstGeom>
-          <a:ln w="15240">
-            <a:solidFill>
-              <a:srgbClr val="BFBFBF"/>
-            </a:solidFill>
-          </a:ln>
-        </p:spPr>
-        <p:style>
-          <a:lnRef idx="2">
-            <a:schemeClr val="accent1"/>
-          </a:lnRef>
-          <a:fillRef idx="0">
-            <a:schemeClr val="accent1"/>
-          </a:fillRef>
-          <a:effectRef idx="1">
-            <a:schemeClr val="accent1"/>
-          </a:effectRef>
-          <a:fontRef idx="minor">
-            <a:schemeClr val="tx1"/>
-          </a:fontRef>
-        </p:style>
-      </p:cxnSp>
-      <p:cxnSp>
-        <p:nvCxnSpPr>
-          <p:cNvPr id="6" name="Connector 5"/>
-          <p:cNvCxnSpPr/>
-          <p:nvPr/>
-        </p:nvCxnSpPr>
-        <p:spPr>
-          <a:xfrm flipV="1">
-            <a:off x="2926079" y="3383280"/>
-            <a:ext cx="3172969" cy="1623060"/>
-          </a:xfrm>
-          <a:prstGeom prst="line">
-            <a:avLst/>
-          </a:prstGeom>
-          <a:ln w="15240">
-            <a:solidFill>
-              <a:srgbClr val="BFBFBF"/>
-            </a:solidFill>
-          </a:ln>
-        </p:spPr>
-        <p:style>
-          <a:lnRef idx="2">
-            <a:schemeClr val="accent1"/>
-          </a:lnRef>
-          <a:fillRef idx="0">
-            <a:schemeClr val="accent1"/>
-          </a:fillRef>
-          <a:effectRef idx="1">
-            <a:schemeClr val="accent1"/>
-          </a:effectRef>
-          <a:fontRef idx="minor">
-            <a:schemeClr val="tx1"/>
-          </a:fontRef>
-        </p:style>
-      </p:cxnSp>
-      <p:cxnSp>
-        <p:nvCxnSpPr>
-          <p:cNvPr id="7" name="Connector 6"/>
-          <p:cNvCxnSpPr/>
-          <p:nvPr/>
-        </p:nvCxnSpPr>
-        <p:spPr>
-          <a:xfrm flipH="1" flipV="1">
-            <a:off x="6099048" y="3383280"/>
-            <a:ext cx="2953511" cy="1623060"/>
-          </a:xfrm>
-          <a:prstGeom prst="line">
-            <a:avLst/>
-          </a:prstGeom>
-          <a:ln w="15240">
-            <a:solidFill>
-              <a:srgbClr val="BFBFBF"/>
-            </a:solidFill>
-          </a:ln>
-        </p:spPr>
-        <p:style>
-          <a:lnRef idx="2">
-            <a:schemeClr val="accent1"/>
-          </a:lnRef>
-          <a:fillRef idx="0">
-            <a:schemeClr val="accent1"/>
-          </a:fillRef>
-          <a:effectRef idx="1">
-            <a:schemeClr val="accent1"/>
-          </a:effectRef>
-          <a:fontRef idx="minor">
-            <a:schemeClr val="tx1"/>
-          </a:fontRef>
-        </p:style>
-      </p:cxnSp>
-      <p:cxnSp>
-        <p:nvCxnSpPr>
-          <p:cNvPr id="8" name="Connector 7"/>
-          <p:cNvCxnSpPr/>
-          <p:nvPr/>
-        </p:nvCxnSpPr>
-        <p:spPr>
-          <a:xfrm flipH="1" flipV="1">
-            <a:off x="6099048" y="3383280"/>
-            <a:ext cx="27432" cy="2446020"/>
-          </a:xfrm>
-          <a:prstGeom prst="line">
-            <a:avLst/>
-          </a:prstGeom>
-          <a:ln w="15240">
-            <a:solidFill>
-              <a:srgbClr val="BFBFBF"/>
-            </a:solidFill>
-          </a:ln>
-        </p:spPr>
-        <p:style>
-          <a:lnRef idx="2">
-            <a:schemeClr val="accent1"/>
-          </a:lnRef>
-          <a:fillRef idx="0">
-            <a:schemeClr val="accent1"/>
-          </a:fillRef>
-          <a:effectRef idx="1">
-            <a:schemeClr val="accent1"/>
-          </a:effectRef>
-          <a:fontRef idx="minor">
-            <a:schemeClr val="tx1"/>
-          </a:fontRef>
-        </p:style>
-      </p:cxnSp>
-      <p:sp>
-        <p:nvSpPr>
-          <p:cNvPr id="9" name="Rounded Rectangle 8"/>
-          <p:cNvSpPr/>
-          <p:nvPr/>
-        </p:nvSpPr>
-        <p:spPr>
-          <a:xfrm>
-            <a:off x="822960" y="1600200"/>
-            <a:ext cx="4206240" cy="868680"/>
-          </a:xfrm>
-          <a:prstGeom prst="roundRect">
-            <a:avLst>
-              <a:gd name="adj" fmla="val 4500"/>
-            </a:avLst>
-          </a:prstGeom>
-          <a:solidFill>
-            <a:srgbClr val="E5F5FB"/>
-          </a:solidFill>
-          <a:ln>
-            <a:noFill/>
-          </a:ln>
-          <a:effectLst/>
-        </p:spPr>
-        <p:style>
-          <a:lnRef idx="1">
-            <a:schemeClr val="accent1"/>
-          </a:lnRef>
-          <a:fillRef idx="3">
-            <a:schemeClr val="accent1"/>
-          </a:fillRef>
-          <a:effectRef idx="2">
-            <a:schemeClr val="accent1"/>
-          </a:effectRef>
-          <a:fontRef idx="minor">
-            <a:schemeClr val="lt1"/>
-          </a:fontRef>
-        </p:style>
-        <p:txBody>
-          <a:bodyPr rtlCol="0" anchor="ctr" lIns="137160" wrap="square"/>
-          <a:lstStyle/>
-          <a:p>
-            <a:pPr algn="ctr"/>
-            <a:r>
-              <a:rPr sz="1450" b="1" i="0">
-                <a:solidFill>
-                  <a:srgbClr val="1A1A1A"/>
-                </a:solidFill>
-                <a:latin typeface="Arial"/>
-              </a:rPr>
-              <a:t>Building Block specifications</a:t>
-            </a:r>
-          </a:p>
-        </p:txBody>
-      </p:sp>
-      <p:sp>
-        <p:nvSpPr>
-          <p:cNvPr id="10" name="Rounded Rectangle 9"/>
-          <p:cNvSpPr/>
-          <p:nvPr/>
-        </p:nvSpPr>
-        <p:spPr>
-          <a:xfrm>
-            <a:off x="6949440" y="1600200"/>
-            <a:ext cx="4206240" cy="868680"/>
-          </a:xfrm>
-          <a:prstGeom prst="roundRect">
-            <a:avLst>
-              <a:gd name="adj" fmla="val 4500"/>
-            </a:avLst>
-          </a:prstGeom>
-          <a:solidFill>
-            <a:srgbClr val="E5F5FB"/>
-          </a:solidFill>
-          <a:ln>
-            <a:noFill/>
-          </a:ln>
-          <a:effectLst/>
-        </p:spPr>
-        <p:style>
-          <a:lnRef idx="1">
-            <a:schemeClr val="accent1"/>
-          </a:lnRef>
-          <a:fillRef idx="3">
-            <a:schemeClr val="accent1"/>
-          </a:fillRef>
-          <a:effectRef idx="2">
-            <a:schemeClr val="accent1"/>
-          </a:effectRef>
-          <a:fontRef idx="minor">
-            <a:schemeClr val="lt1"/>
-          </a:fontRef>
-        </p:style>
-        <p:txBody>
-          <a:bodyPr rtlCol="0" anchor="ctr" lIns="137160" wrap="square"/>
-          <a:lstStyle/>
-          <a:p>
-            <a:pPr algn="ctr"/>
-            <a:r>
-              <a:rPr sz="1450" b="1" i="0">
-                <a:solidFill>
-                  <a:srgbClr val="1A1A1A"/>
-                </a:solidFill>
-                <a:latin typeface="Arial"/>
-              </a:rPr>
-              <a:t>GovMarket — compliance-checked implementations</a:t>
-            </a:r>
-          </a:p>
-        </p:txBody>
-      </p:sp>
-      <p:sp>
-        <p:nvSpPr>
-          <p:cNvPr id="11" name="Rounded Rectangle 10"/>
-          <p:cNvSpPr/>
-          <p:nvPr/>
-        </p:nvSpPr>
-        <p:spPr>
-          <a:xfrm>
-            <a:off x="822960" y="4572000"/>
-            <a:ext cx="4206240" cy="868680"/>
-          </a:xfrm>
-          <a:prstGeom prst="roundRect">
-            <a:avLst>
-              <a:gd name="adj" fmla="val 4500"/>
-            </a:avLst>
-          </a:prstGeom>
-          <a:solidFill>
-            <a:srgbClr val="E5F5FB"/>
-          </a:solidFill>
-          <a:ln>
-            <a:noFill/>
-          </a:ln>
-          <a:effectLst/>
-        </p:spPr>
-        <p:style>
-          <a:lnRef idx="1">
-            <a:schemeClr val="accent1"/>
-          </a:lnRef>
-          <a:fillRef idx="3">
-            <a:schemeClr val="accent1"/>
-          </a:fillRef>
-          <a:effectRef idx="2">
-            <a:schemeClr val="accent1"/>
-          </a:effectRef>
-          <a:fontRef idx="minor">
-            <a:schemeClr val="lt1"/>
-          </a:fontRef>
-        </p:style>
-        <p:txBody>
-          <a:bodyPr rtlCol="0" anchor="ctr" lIns="137160" wrap="square"/>
-          <a:lstStyle/>
-          <a:p>
-            <a:pPr algn="ctr"/>
-            <a:r>
-              <a:rPr sz="1450" b="1" i="0">
-                <a:solidFill>
-                  <a:srgbClr val="1A1A1A"/>
-                </a:solidFill>
-                <a:latin typeface="Arial"/>
-              </a:rPr>
-              <a:t>Certification programme</a:t>
-            </a:r>
-          </a:p>
-        </p:txBody>
-      </p:sp>
-      <p:sp>
-        <p:nvSpPr>
-          <p:cNvPr id="12" name="Rounded Rectangle 11"/>
-          <p:cNvSpPr/>
-          <p:nvPr/>
-        </p:nvSpPr>
-        <p:spPr>
-          <a:xfrm>
-            <a:off x="6949440" y="4572000"/>
-            <a:ext cx="4206240" cy="868680"/>
-          </a:xfrm>
-          <a:prstGeom prst="roundRect">
-            <a:avLst>
-              <a:gd name="adj" fmla="val 4500"/>
-            </a:avLst>
-          </a:prstGeom>
-          <a:solidFill>
-            <a:srgbClr val="E5F5FB"/>
-          </a:solidFill>
-          <a:ln>
-            <a:noFill/>
-          </a:ln>
-          <a:effectLst/>
-        </p:spPr>
-        <p:style>
-          <a:lnRef idx="1">
-            <a:schemeClr val="accent1"/>
-          </a:lnRef>
-          <a:fillRef idx="3">
-            <a:schemeClr val="accent1"/>
-          </a:fillRef>
-          <a:effectRef idx="2">
-            <a:schemeClr val="accent1"/>
-          </a:effectRef>
-          <a:fontRef idx="minor">
-            <a:schemeClr val="lt1"/>
-          </a:fontRef>
-        </p:style>
-        <p:txBody>
-          <a:bodyPr rtlCol="0" anchor="ctr" lIns="137160" wrap="square"/>
-          <a:lstStyle/>
-          <a:p>
-            <a:pPr algn="ctr"/>
-            <a:r>
-              <a:rPr sz="1450" b="1" i="0">
-                <a:solidFill>
-                  <a:srgbClr val="1A1A1A"/>
-                </a:solidFill>
-                <a:latin typeface="Arial"/>
-              </a:rPr>
-              <a:t>Sandbox for prototyping</a:t>
-            </a:r>
-          </a:p>
-        </p:txBody>
-      </p:sp>
-      <p:sp>
-        <p:nvSpPr>
-          <p:cNvPr id="13" name="Rounded Rectangle 12"/>
-          <p:cNvSpPr/>
-          <p:nvPr/>
-        </p:nvSpPr>
-        <p:spPr>
-          <a:xfrm>
-            <a:off x="4023360" y="5394960"/>
-            <a:ext cx="4206240" cy="868680"/>
-          </a:xfrm>
-          <a:prstGeom prst="roundRect">
-            <a:avLst>
-              <a:gd name="adj" fmla="val 4500"/>
-            </a:avLst>
-          </a:prstGeom>
-          <a:solidFill>
-            <a:srgbClr val="E5F5FB"/>
-          </a:solidFill>
-          <a:ln>
-            <a:noFill/>
-          </a:ln>
-          <a:effectLst/>
-        </p:spPr>
-        <p:style>
-          <a:lnRef idx="1">
-            <a:schemeClr val="accent1"/>
-          </a:lnRef>
-          <a:fillRef idx="3">
-            <a:schemeClr val="accent1"/>
-          </a:fillRef>
-          <a:effectRef idx="2">
-            <a:schemeClr val="accent1"/>
-          </a:effectRef>
-          <a:fontRef idx="minor">
-            <a:schemeClr val="lt1"/>
-          </a:fontRef>
-        </p:style>
-        <p:txBody>
-          <a:bodyPr rtlCol="0" anchor="ctr" lIns="137160" wrap="square"/>
-          <a:lstStyle/>
-          <a:p>
-            <a:pPr algn="ctr"/>
-            <a:r>
-              <a:rPr sz="1450" b="1" i="0">
-                <a:solidFill>
-                  <a:srgbClr val="1A1A1A"/>
-                </a:solidFill>
-                <a:latin typeface="Arial"/>
-              </a:rPr>
-              <a:t>Shared knowledge base</a:t>
-            </a:r>
-          </a:p>
-        </p:txBody>
-      </p:sp>
-      <p:sp>
-        <p:nvSpPr>
-          <p:cNvPr id="14" name="Rounded Rectangle 13"/>
-          <p:cNvSpPr/>
-          <p:nvPr/>
-        </p:nvSpPr>
-        <p:spPr>
-          <a:xfrm>
-            <a:off x="4818888" y="2880360"/>
-            <a:ext cx="2560320" cy="1005840"/>
-          </a:xfrm>
-          <a:prstGeom prst="roundRect">
-            <a:avLst>
-              <a:gd name="adj" fmla="val 4500"/>
-            </a:avLst>
-          </a:prstGeom>
-          <a:solidFill>
-            <a:srgbClr val="009CD6"/>
-          </a:solidFill>
-          <a:ln>
-            <a:noFill/>
-          </a:ln>
-          <a:effectLst/>
-        </p:spPr>
-        <p:style>
-          <a:lnRef idx="1">
-            <a:schemeClr val="accent1"/>
-          </a:lnRef>
-          <a:fillRef idx="3">
-            <a:schemeClr val="accent1"/>
-          </a:fillRef>
-          <a:effectRef idx="2">
-            <a:schemeClr val="accent1"/>
-          </a:effectRef>
-          <a:fontRef idx="minor">
-            <a:schemeClr val="lt1"/>
-          </a:fontRef>
-        </p:style>
-        <p:txBody>
-          <a:bodyPr rtlCol="0" anchor="ctr" wrap="square"/>
-          <a:lstStyle/>
-          <a:p>
-            <a:pPr algn="ctr"/>
-            <a:r>
-              <a:rPr sz="2200" b="1" i="0">
-                <a:solidFill>
-                  <a:srgbClr val="FFFFFF"/>
-                </a:solidFill>
-                <a:latin typeface="Arial"/>
-              </a:rPr>
-              <a:t>PAERA</a:t>
-            </a:r>
-          </a:p>
-        </p:txBody>
-      </p:sp>
-      <p:sp>
-        <p:nvSpPr>
-          <p:cNvPr id="15" name="TextBox 14"/>
+              <a:t>Why PAERA-anchored</a:t>
+            </a:r>
+          </a:p>
+        </p:txBody>
+      </p:sp>
+      <p:sp>
+        <p:nvSpPr>
+          <p:cNvPr id="5" name="TextBox 4"/>
           <p:cNvSpPr txBox="1"/>
           <p:nvPr/>
         </p:nvSpPr>
         <p:spPr>
           <a:xfrm>
-            <a:off x="457200" y="6473952"/>
-            <a:ext cx="7772400" cy="292608"/>
+            <a:off x="822960" y="4343400"/>
+            <a:ext cx="9875520" cy="1554480"/>
           </a:xfrm>
           <a:prstGeom prst="rect">
             <a:avLst/>
@@ -15002,13 +11773,47 @@
           <a:lstStyle/>
           <a:p>
             <a:r>
-              <a:rPr sz="900" b="0" i="0">
+              <a:rPr sz="1700" b="0" i="1">
                 <a:solidFill>
                   <a:srgbClr val="595959"/>
                 </a:solidFill>
                 <a:latin typeface="Arial"/>
               </a:rPr>
-              <a:t>1.5 · Why PAERA-anchored</a:t>
+              <a:t>PAERA gives your team five years of head start. Adopt it, and the architecture work begins on day one. Do not adopt it, and your first year is spent inventing what others have already published.</a:t>
+            </a:r>
+          </a:p>
+        </p:txBody>
+      </p:sp>
+      <p:sp>
+        <p:nvSpPr>
+          <p:cNvPr id="6" name="TextBox 5"/>
+          <p:cNvSpPr txBox="1"/>
+          <p:nvPr/>
+        </p:nvSpPr>
+        <p:spPr>
+          <a:xfrm>
+            <a:off x="822960" y="5989320"/>
+            <a:ext cx="7315200" cy="365760"/>
+          </a:xfrm>
+          <a:prstGeom prst="rect">
+            <a:avLst/>
+          </a:prstGeom>
+          <a:noFill/>
+        </p:spPr>
+        <p:txBody>
+          <a:bodyPr wrap="square">
+            <a:spAutoFit/>
+          </a:bodyPr>
+          <a:lstStyle/>
+          <a:p>
+            <a:r>
+              <a:rPr sz="1200" b="0" i="0">
+                <a:solidFill>
+                  <a:srgbClr val="595959"/>
+                </a:solidFill>
+                <a:latin typeface="Arial"/>
+              </a:rPr>
+              <a:t>standalone video · voice-over on text slides</a:t>
             </a:r>
           </a:p>
         </p:txBody>
@@ -15039,6 +11844,2523 @@
         </p:nvSpPr>
         <p:spPr>
           <a:xfrm>
+            <a:off x="1005840" y="1325880"/>
+            <a:ext cx="5486400" cy="365760"/>
+          </a:xfrm>
+          <a:prstGeom prst="rect">
+            <a:avLst/>
+          </a:prstGeom>
+          <a:noFill/>
+        </p:spPr>
+        <p:txBody>
+          <a:bodyPr wrap="square">
+            <a:spAutoFit/>
+          </a:bodyPr>
+          <a:lstStyle/>
+          <a:p>
+            <a:r>
+              <a:rPr sz="1200" b="1" i="0">
+                <a:solidFill>
+                  <a:srgbClr val="006E96"/>
+                </a:solidFill>
+                <a:latin typeface="Arial"/>
+              </a:rPr>
+              <a:t>WHERE WE START</a:t>
+            </a:r>
+          </a:p>
+        </p:txBody>
+      </p:sp>
+      <p:sp>
+        <p:nvSpPr>
+          <p:cNvPr id="3" name="TextBox 2"/>
+          <p:cNvSpPr txBox="1"/>
+          <p:nvPr/>
+        </p:nvSpPr>
+        <p:spPr>
+          <a:xfrm>
+            <a:off x="1005840" y="1783080"/>
+            <a:ext cx="10149840" cy="1737360"/>
+          </a:xfrm>
+          <a:prstGeom prst="rect">
+            <a:avLst/>
+          </a:prstGeom>
+          <a:noFill/>
+        </p:spPr>
+        <p:txBody>
+          <a:bodyPr wrap="square">
+            <a:spAutoFit/>
+          </a:bodyPr>
+          <a:lstStyle/>
+          <a:p>
+            <a:r>
+              <a:rPr sz="3000" b="1" i="0">
+                <a:solidFill>
+                  <a:srgbClr val="1A1A1A"/>
+                </a:solidFill>
+                <a:latin typeface="Arial"/>
+              </a:rPr>
+              <a:t>Which framework do you use to draw the picture?</a:t>
+            </a:r>
+          </a:p>
+        </p:txBody>
+      </p:sp>
+      <p:sp>
+        <p:nvSpPr>
+          <p:cNvPr id="4" name="TextBox 3"/>
+          <p:cNvSpPr txBox="1"/>
+          <p:nvPr/>
+        </p:nvSpPr>
+        <p:spPr>
+          <a:xfrm>
+            <a:off x="1005840" y="3611880"/>
+            <a:ext cx="10149840" cy="2377440"/>
+          </a:xfrm>
+          <a:prstGeom prst="rect">
+            <a:avLst/>
+          </a:prstGeom>
+          <a:noFill/>
+        </p:spPr>
+        <p:txBody>
+          <a:bodyPr wrap="square">
+            <a:spAutoFit/>
+          </a:bodyPr>
+          <a:lstStyle/>
+          <a:p>
+            <a:pPr>
+              <a:spcAft>
+                <a:spcPts val="800"/>
+              </a:spcAft>
+            </a:pPr>
+            <a:r>
+              <a:rPr sz="1700" b="0" i="0">
+                <a:solidFill>
+                  <a:srgbClr val="595959"/>
+                </a:solidFill>
+                <a:latin typeface="Arial"/>
+              </a:rPr>
+              <a:t>Design one for your country from scratch —</a:t>
+            </a:r>
+          </a:p>
+          <a:p>
+            <a:pPr>
+              <a:spcAft>
+                <a:spcPts val="800"/>
+              </a:spcAft>
+            </a:pPr>
+            <a:r>
+              <a:rPr sz="1700" b="0" i="0">
+                <a:solidFill>
+                  <a:srgbClr val="595959"/>
+                </a:solidFill>
+                <a:latin typeface="Arial"/>
+              </a:rPr>
+              <a:t>or anchor on one that already exists.</a:t>
+            </a:r>
+          </a:p>
+        </p:txBody>
+      </p:sp>
+      <p:sp>
+        <p:nvSpPr>
+          <p:cNvPr id="5" name="TextBox 4"/>
+          <p:cNvSpPr txBox="1"/>
+          <p:nvPr/>
+        </p:nvSpPr>
+        <p:spPr>
+          <a:xfrm>
+            <a:off x="457200" y="6473952"/>
+            <a:ext cx="7772400" cy="292608"/>
+          </a:xfrm>
+          <a:prstGeom prst="rect">
+            <a:avLst/>
+          </a:prstGeom>
+          <a:noFill/>
+        </p:spPr>
+        <p:txBody>
+          <a:bodyPr wrap="square">
+            <a:spAutoFit/>
+          </a:bodyPr>
+          <a:lstStyle/>
+          <a:p>
+            <a:r>
+              <a:rPr sz="900" b="0" i="0">
+                <a:solidFill>
+                  <a:srgbClr val="595959"/>
+                </a:solidFill>
+                <a:latin typeface="Arial"/>
+              </a:rPr>
+              <a:t>1.5 · Why PAERA-anchored</a:t>
+            </a:r>
+          </a:p>
+        </p:txBody>
+      </p:sp>
+      <p:sp>
+        <p:nvSpPr>
+          <p:cNvPr id="6" name="TextBox 5"/>
+          <p:cNvSpPr txBox="1"/>
+          <p:nvPr/>
+        </p:nvSpPr>
+        <p:spPr>
+          <a:xfrm>
+            <a:off x="10058400" y="6473952"/>
+            <a:ext cx="1673352" cy="292608"/>
+          </a:xfrm>
+          <a:prstGeom prst="rect">
+            <a:avLst/>
+          </a:prstGeom>
+          <a:noFill/>
+        </p:spPr>
+        <p:txBody>
+          <a:bodyPr wrap="square">
+            <a:spAutoFit/>
+          </a:bodyPr>
+          <a:lstStyle/>
+          <a:p>
+            <a:pPr algn="r"/>
+            <a:r>
+              <a:rPr sz="900" b="0" i="0">
+                <a:solidFill>
+                  <a:srgbClr val="595959"/>
+                </a:solidFill>
+                <a:latin typeface="Arial"/>
+              </a:rPr>
+              <a:t>www.itu.int</a:t>
+            </a:r>
+          </a:p>
+        </p:txBody>
+      </p:sp>
+    </p:spTree>
+  </p:cSld>
+  <p:clrMapOvr>
+    <a:masterClrMapping/>
+  </p:clrMapOvr>
+</p:sld>
+</file>
+
+<file path=ppt/slides/slide36.xml><?xml version="1.0" encoding="utf-8"?>
+<p:sld xmlns:a="http://schemas.openxmlformats.org/drawingml/2006/main" xmlns:p="http://schemas.openxmlformats.org/presentationml/2006/main" xmlns:r="http://schemas.openxmlformats.org/officeDocument/2006/relationships">
+  <p:cSld>
+    <p:spTree>
+      <p:nvGrpSpPr>
+        <p:cNvPr id="1" name=""/>
+        <p:cNvGrpSpPr/>
+        <p:nvPr/>
+      </p:nvGrpSpPr>
+      <p:grpSpPr/>
+      <p:sp>
+        <p:nvSpPr>
+          <p:cNvPr id="2" name="Rectangle 1"/>
+          <p:cNvSpPr/>
+          <p:nvPr/>
+        </p:nvSpPr>
+        <p:spPr>
+          <a:xfrm>
+            <a:off x="457200" y="384048"/>
+            <a:ext cx="45720" cy="256032"/>
+          </a:xfrm>
+          <a:prstGeom prst="rect">
+            <a:avLst/>
+          </a:prstGeom>
+          <a:solidFill>
+            <a:srgbClr val="009CD6"/>
+          </a:solidFill>
+          <a:ln>
+            <a:noFill/>
+          </a:ln>
+          <a:effectLst/>
+        </p:spPr>
+        <p:style>
+          <a:lnRef idx="1">
+            <a:schemeClr val="accent1"/>
+          </a:lnRef>
+          <a:fillRef idx="3">
+            <a:schemeClr val="accent1"/>
+          </a:fillRef>
+          <a:effectRef idx="2">
+            <a:schemeClr val="accent1"/>
+          </a:effectRef>
+          <a:fontRef idx="minor">
+            <a:schemeClr val="lt1"/>
+          </a:fontRef>
+        </p:style>
+        <p:txBody>
+          <a:bodyPr rtlCol="0" anchor="ctr"/>
+          <a:lstStyle/>
+          <a:p>
+            <a:pPr algn="ctr"/>
+          </a:p>
+        </p:txBody>
+      </p:sp>
+      <p:sp>
+        <p:nvSpPr>
+          <p:cNvPr id="3" name="TextBox 2"/>
+          <p:cNvSpPr txBox="1"/>
+          <p:nvPr/>
+        </p:nvSpPr>
+        <p:spPr>
+          <a:xfrm>
+            <a:off x="621792" y="274320"/>
+            <a:ext cx="11247120" cy="914400"/>
+          </a:xfrm>
+          <a:prstGeom prst="rect">
+            <a:avLst/>
+          </a:prstGeom>
+          <a:noFill/>
+        </p:spPr>
+        <p:txBody>
+          <a:bodyPr wrap="square">
+            <a:spAutoFit/>
+          </a:bodyPr>
+          <a:lstStyle/>
+          <a:p>
+            <a:r>
+              <a:rPr sz="2800" b="1" i="0">
+                <a:solidFill>
+                  <a:srgbClr val="1A1A1A"/>
+                </a:solidFill>
+                <a:latin typeface="Arial"/>
+              </a:rPr>
+              <a:t>Two paths — one costs you a year before work begins</a:t>
+            </a:r>
+          </a:p>
+        </p:txBody>
+      </p:sp>
+      <p:sp>
+        <p:nvSpPr>
+          <p:cNvPr id="4" name="Rounded Rectangle 3"/>
+          <p:cNvSpPr/>
+          <p:nvPr/>
+        </p:nvSpPr>
+        <p:spPr>
+          <a:xfrm>
+            <a:off x="658368" y="1920240"/>
+            <a:ext cx="10881360" cy="1371600"/>
+          </a:xfrm>
+          <a:prstGeom prst="roundRect">
+            <a:avLst>
+              <a:gd name="adj" fmla="val 4500"/>
+            </a:avLst>
+          </a:prstGeom>
+          <a:solidFill>
+            <a:srgbClr val="F2F2F2"/>
+          </a:solidFill>
+          <a:ln>
+            <a:noFill/>
+          </a:ln>
+          <a:effectLst/>
+        </p:spPr>
+        <p:style>
+          <a:lnRef idx="1">
+            <a:schemeClr val="accent1"/>
+          </a:lnRef>
+          <a:fillRef idx="3">
+            <a:schemeClr val="accent1"/>
+          </a:fillRef>
+          <a:effectRef idx="2">
+            <a:schemeClr val="accent1"/>
+          </a:effectRef>
+          <a:fontRef idx="minor">
+            <a:schemeClr val="lt1"/>
+          </a:fontRef>
+        </p:style>
+        <p:txBody>
+          <a:bodyPr rtlCol="0" anchor="ctr"/>
+          <a:lstStyle/>
+          <a:p>
+            <a:pPr algn="ctr"/>
+          </a:p>
+        </p:txBody>
+      </p:sp>
+      <p:sp>
+        <p:nvSpPr>
+          <p:cNvPr id="5" name="TextBox 4"/>
+          <p:cNvSpPr txBox="1"/>
+          <p:nvPr/>
+        </p:nvSpPr>
+        <p:spPr>
+          <a:xfrm>
+            <a:off x="914400" y="2066544"/>
+            <a:ext cx="10369296" cy="1097280"/>
+          </a:xfrm>
+          <a:prstGeom prst="rect">
+            <a:avLst/>
+          </a:prstGeom>
+          <a:noFill/>
+        </p:spPr>
+        <p:txBody>
+          <a:bodyPr wrap="square">
+            <a:spAutoFit/>
+          </a:bodyPr>
+          <a:lstStyle/>
+          <a:p>
+            <a:pPr>
+              <a:spcAft>
+                <a:spcPts val="700"/>
+              </a:spcAft>
+            </a:pPr>
+            <a:r>
+              <a:rPr sz="1800" b="1" i="0">
+                <a:solidFill>
+                  <a:srgbClr val="1A1A1A"/>
+                </a:solidFill>
+                <a:latin typeface="Arial"/>
+              </a:rPr>
+              <a:t>Design your own framework</a:t>
+            </a:r>
+          </a:p>
+          <a:p>
+            <a:pPr>
+              <a:spcAft>
+                <a:spcPts val="700"/>
+              </a:spcAft>
+            </a:pPr>
+            <a:r>
+              <a:rPr sz="1500" b="0" i="0">
+                <a:solidFill>
+                  <a:srgbClr val="595959"/>
+                </a:solidFill>
+                <a:latin typeface="Arial"/>
+              </a:rPr>
+              <a:t>12 to 18 months of consultants and groundwork before any architect draws a single picture of any ministry</a:t>
+            </a:r>
+          </a:p>
+        </p:txBody>
+      </p:sp>
+      <p:sp>
+        <p:nvSpPr>
+          <p:cNvPr id="6" name="Rounded Rectangle 5"/>
+          <p:cNvSpPr/>
+          <p:nvPr/>
+        </p:nvSpPr>
+        <p:spPr>
+          <a:xfrm>
+            <a:off x="658368" y="3749039"/>
+            <a:ext cx="3291840" cy="1371600"/>
+          </a:xfrm>
+          <a:prstGeom prst="roundRect">
+            <a:avLst>
+              <a:gd name="adj" fmla="val 4500"/>
+            </a:avLst>
+          </a:prstGeom>
+          <a:solidFill>
+            <a:srgbClr val="009CD6"/>
+          </a:solidFill>
+          <a:ln>
+            <a:noFill/>
+          </a:ln>
+          <a:effectLst/>
+        </p:spPr>
+        <p:style>
+          <a:lnRef idx="1">
+            <a:schemeClr val="accent1"/>
+          </a:lnRef>
+          <a:fillRef idx="3">
+            <a:schemeClr val="accent1"/>
+          </a:fillRef>
+          <a:effectRef idx="2">
+            <a:schemeClr val="accent1"/>
+          </a:effectRef>
+          <a:fontRef idx="minor">
+            <a:schemeClr val="lt1"/>
+          </a:fontRef>
+        </p:style>
+        <p:txBody>
+          <a:bodyPr rtlCol="0" anchor="ctr"/>
+          <a:lstStyle/>
+          <a:p>
+            <a:pPr algn="ctr"/>
+          </a:p>
+        </p:txBody>
+      </p:sp>
+      <p:sp>
+        <p:nvSpPr>
+          <p:cNvPr id="7" name="TextBox 6"/>
+          <p:cNvSpPr txBox="1"/>
+          <p:nvPr/>
+        </p:nvSpPr>
+        <p:spPr>
+          <a:xfrm>
+            <a:off x="914400" y="3895344"/>
+            <a:ext cx="2779776" cy="1097280"/>
+          </a:xfrm>
+          <a:prstGeom prst="rect">
+            <a:avLst/>
+          </a:prstGeom>
+          <a:noFill/>
+        </p:spPr>
+        <p:txBody>
+          <a:bodyPr wrap="square">
+            <a:spAutoFit/>
+          </a:bodyPr>
+          <a:lstStyle/>
+          <a:p>
+            <a:pPr>
+              <a:spcAft>
+                <a:spcPts val="700"/>
+              </a:spcAft>
+            </a:pPr>
+            <a:r>
+              <a:rPr sz="1800" b="1" i="0">
+                <a:solidFill>
+                  <a:srgbClr val="FFFFFF"/>
+                </a:solidFill>
+                <a:latin typeface="Arial"/>
+              </a:rPr>
+              <a:t>Anchor on PAERA</a:t>
+            </a:r>
+          </a:p>
+          <a:p>
+            <a:pPr>
+              <a:spcAft>
+                <a:spcPts val="700"/>
+              </a:spcAft>
+            </a:pPr>
+            <a:r>
+              <a:rPr sz="1500" b="0" i="0">
+                <a:solidFill>
+                  <a:srgbClr val="FFFFFF"/>
+                </a:solidFill>
+                <a:latin typeface="Arial"/>
+              </a:rPr>
+              <a:t>work begins on day one</a:t>
+            </a:r>
+          </a:p>
+        </p:txBody>
+      </p:sp>
+      <p:sp>
+        <p:nvSpPr>
+          <p:cNvPr id="8" name="TextBox 7"/>
+          <p:cNvSpPr txBox="1"/>
+          <p:nvPr/>
+        </p:nvSpPr>
+        <p:spPr>
+          <a:xfrm>
+            <a:off x="4206240" y="3977639"/>
+            <a:ext cx="7315200" cy="1188720"/>
+          </a:xfrm>
+          <a:prstGeom prst="rect">
+            <a:avLst/>
+          </a:prstGeom>
+          <a:noFill/>
+        </p:spPr>
+        <p:txBody>
+          <a:bodyPr wrap="square">
+            <a:spAutoFit/>
+          </a:bodyPr>
+          <a:lstStyle/>
+          <a:p>
+            <a:r>
+              <a:rPr sz="1500" b="0" i="0">
+                <a:solidFill>
+                  <a:srgbClr val="595959"/>
+                </a:solidFill>
+                <a:latin typeface="Arial"/>
+              </a:rPr>
+              <a:t>The Public Administration Ecosystem Reference Architecture — published 2024 under GovStack, built for the public-sector use case, with the groundwork already done.</a:t>
+            </a:r>
+          </a:p>
+        </p:txBody>
+      </p:sp>
+      <p:sp>
+        <p:nvSpPr>
+          <p:cNvPr id="9" name="TextBox 8"/>
+          <p:cNvSpPr txBox="1"/>
+          <p:nvPr/>
+        </p:nvSpPr>
+        <p:spPr>
+          <a:xfrm>
+            <a:off x="457200" y="6473952"/>
+            <a:ext cx="7772400" cy="292608"/>
+          </a:xfrm>
+          <a:prstGeom prst="rect">
+            <a:avLst/>
+          </a:prstGeom>
+          <a:noFill/>
+        </p:spPr>
+        <p:txBody>
+          <a:bodyPr wrap="square">
+            <a:spAutoFit/>
+          </a:bodyPr>
+          <a:lstStyle/>
+          <a:p>
+            <a:r>
+              <a:rPr sz="900" b="0" i="0">
+                <a:solidFill>
+                  <a:srgbClr val="595959"/>
+                </a:solidFill>
+                <a:latin typeface="Arial"/>
+              </a:rPr>
+              <a:t>1.5 · Why PAERA-anchored</a:t>
+            </a:r>
+          </a:p>
+        </p:txBody>
+      </p:sp>
+    </p:spTree>
+  </p:cSld>
+  <p:clrMapOvr>
+    <a:masterClrMapping/>
+  </p:clrMapOvr>
+</p:sld>
+</file>
+
+<file path=ppt/slides/slide37.xml><?xml version="1.0" encoding="utf-8"?>
+<p:sld xmlns:a="http://schemas.openxmlformats.org/drawingml/2006/main" xmlns:p="http://schemas.openxmlformats.org/presentationml/2006/main" xmlns:r="http://schemas.openxmlformats.org/officeDocument/2006/relationships">
+  <p:cSld>
+    <p:spTree>
+      <p:nvGrpSpPr>
+        <p:cNvPr id="1" name=""/>
+        <p:cNvGrpSpPr/>
+        <p:nvPr/>
+      </p:nvGrpSpPr>
+      <p:grpSpPr/>
+      <p:sp>
+        <p:nvSpPr>
+          <p:cNvPr id="2" name="Rectangle 1"/>
+          <p:cNvSpPr/>
+          <p:nvPr/>
+        </p:nvSpPr>
+        <p:spPr>
+          <a:xfrm>
+            <a:off x="457200" y="384048"/>
+            <a:ext cx="45720" cy="256032"/>
+          </a:xfrm>
+          <a:prstGeom prst="rect">
+            <a:avLst/>
+          </a:prstGeom>
+          <a:solidFill>
+            <a:srgbClr val="009CD6"/>
+          </a:solidFill>
+          <a:ln>
+            <a:noFill/>
+          </a:ln>
+          <a:effectLst/>
+        </p:spPr>
+        <p:style>
+          <a:lnRef idx="1">
+            <a:schemeClr val="accent1"/>
+          </a:lnRef>
+          <a:fillRef idx="3">
+            <a:schemeClr val="accent1"/>
+          </a:fillRef>
+          <a:effectRef idx="2">
+            <a:schemeClr val="accent1"/>
+          </a:effectRef>
+          <a:fontRef idx="minor">
+            <a:schemeClr val="lt1"/>
+          </a:fontRef>
+        </p:style>
+        <p:txBody>
+          <a:bodyPr rtlCol="0" anchor="ctr"/>
+          <a:lstStyle/>
+          <a:p>
+            <a:pPr algn="ctr"/>
+          </a:p>
+        </p:txBody>
+      </p:sp>
+      <p:sp>
+        <p:nvSpPr>
+          <p:cNvPr id="3" name="TextBox 2"/>
+          <p:cNvSpPr txBox="1"/>
+          <p:nvPr/>
+        </p:nvSpPr>
+        <p:spPr>
+          <a:xfrm>
+            <a:off x="621792" y="274320"/>
+            <a:ext cx="11247120" cy="914400"/>
+          </a:xfrm>
+          <a:prstGeom prst="rect">
+            <a:avLst/>
+          </a:prstGeom>
+          <a:noFill/>
+        </p:spPr>
+        <p:txBody>
+          <a:bodyPr wrap="square">
+            <a:spAutoFit/>
+          </a:bodyPr>
+          <a:lstStyle/>
+          <a:p>
+            <a:r>
+              <a:rPr sz="2800" b="1" i="0">
+                <a:solidFill>
+                  <a:srgbClr val="1A1A1A"/>
+                </a:solidFill>
+                <a:latin typeface="Arial"/>
+              </a:rPr>
+              <a:t>Five things you do not pay to invent</a:t>
+            </a:r>
+          </a:p>
+        </p:txBody>
+      </p:sp>
+      <p:sp>
+        <p:nvSpPr>
+          <p:cNvPr id="4" name="Oval 3"/>
+          <p:cNvSpPr/>
+          <p:nvPr/>
+        </p:nvSpPr>
+        <p:spPr>
+          <a:xfrm>
+            <a:off x="621792" y="1417320"/>
+            <a:ext cx="310896" cy="310896"/>
+          </a:xfrm>
+          <a:prstGeom prst="ellipse">
+            <a:avLst/>
+          </a:prstGeom>
+          <a:solidFill>
+            <a:srgbClr val="009CD6"/>
+          </a:solidFill>
+          <a:ln>
+            <a:noFill/>
+          </a:ln>
+          <a:effectLst/>
+        </p:spPr>
+        <p:style>
+          <a:lnRef idx="1">
+            <a:schemeClr val="accent1"/>
+          </a:lnRef>
+          <a:fillRef idx="3">
+            <a:schemeClr val="accent1"/>
+          </a:fillRef>
+          <a:effectRef idx="2">
+            <a:schemeClr val="accent1"/>
+          </a:effectRef>
+          <a:fontRef idx="minor">
+            <a:schemeClr val="lt1"/>
+          </a:fontRef>
+        </p:style>
+        <p:txBody>
+          <a:bodyPr rtlCol="0" anchor="ctr" lIns="0" rIns="0" tIns="0" bIns="0" wrap="square"/>
+          <a:lstStyle/>
+          <a:p>
+            <a:pPr algn="ctr"/>
+            <a:r>
+              <a:rPr sz="1300" b="1" i="0">
+                <a:solidFill>
+                  <a:srgbClr val="FFFFFF"/>
+                </a:solidFill>
+                <a:latin typeface="Arial"/>
+              </a:rPr>
+              <a:t>1</a:t>
+            </a:r>
+          </a:p>
+        </p:txBody>
+      </p:sp>
+      <p:sp>
+        <p:nvSpPr>
+          <p:cNvPr id="5" name="TextBox 4"/>
+          <p:cNvSpPr txBox="1"/>
+          <p:nvPr/>
+        </p:nvSpPr>
+        <p:spPr>
+          <a:xfrm>
+            <a:off x="1115568" y="1371600"/>
+            <a:ext cx="10527487" cy="950976"/>
+          </a:xfrm>
+          <a:prstGeom prst="rect">
+            <a:avLst/>
+          </a:prstGeom>
+          <a:noFill/>
+        </p:spPr>
+        <p:txBody>
+          <a:bodyPr wrap="square">
+            <a:spAutoFit/>
+          </a:bodyPr>
+          <a:lstStyle/>
+          <a:p>
+            <a:pPr>
+              <a:spcAft>
+                <a:spcPts val="300"/>
+              </a:spcAft>
+            </a:pPr>
+            <a:r>
+              <a:rPr sz="1750" b="1" i="0">
+                <a:solidFill>
+                  <a:srgbClr val="1A1A1A"/>
+                </a:solidFill>
+                <a:latin typeface="Arial"/>
+              </a:rPr>
+              <a:t>A way to organise ministries and authorities</a:t>
+            </a:r>
+          </a:p>
+          <a:p>
+            <a:pPr>
+              <a:spcAft>
+                <a:spcPts val="300"/>
+              </a:spcAft>
+            </a:pPr>
+            <a:r>
+              <a:rPr sz="1350" b="0" i="0">
+                <a:solidFill>
+                  <a:srgbClr val="595959"/>
+                </a:solidFill>
+                <a:latin typeface="Arial"/>
+              </a:rPr>
+              <a:t>Every body is a policy unit, a regulatory agency or a service-delivery authority — the classification is published, not argued over for three months.</a:t>
+            </a:r>
+          </a:p>
+        </p:txBody>
+      </p:sp>
+      <p:sp>
+        <p:nvSpPr>
+          <p:cNvPr id="6" name="Rectangle 5"/>
+          <p:cNvSpPr/>
+          <p:nvPr/>
+        </p:nvSpPr>
+        <p:spPr>
+          <a:xfrm>
+            <a:off x="621792" y="2327148"/>
+            <a:ext cx="10881360" cy="12700"/>
+          </a:xfrm>
+          <a:prstGeom prst="rect">
+            <a:avLst/>
+          </a:prstGeom>
+          <a:solidFill>
+            <a:srgbClr val="DDECF4"/>
+          </a:solidFill>
+          <a:ln>
+            <a:noFill/>
+          </a:ln>
+          <a:effectLst/>
+        </p:spPr>
+        <p:style>
+          <a:lnRef idx="1">
+            <a:schemeClr val="accent1"/>
+          </a:lnRef>
+          <a:fillRef idx="3">
+            <a:schemeClr val="accent1"/>
+          </a:fillRef>
+          <a:effectRef idx="2">
+            <a:schemeClr val="accent1"/>
+          </a:effectRef>
+          <a:fontRef idx="minor">
+            <a:schemeClr val="lt1"/>
+          </a:fontRef>
+        </p:style>
+        <p:txBody>
+          <a:bodyPr rtlCol="0" anchor="ctr"/>
+          <a:lstStyle/>
+          <a:p>
+            <a:pPr algn="ctr"/>
+          </a:p>
+        </p:txBody>
+      </p:sp>
+      <p:sp>
+        <p:nvSpPr>
+          <p:cNvPr id="7" name="Oval 6"/>
+          <p:cNvSpPr/>
+          <p:nvPr/>
+        </p:nvSpPr>
+        <p:spPr>
+          <a:xfrm>
+            <a:off x="621792" y="2414015"/>
+            <a:ext cx="310896" cy="310896"/>
+          </a:xfrm>
+          <a:prstGeom prst="ellipse">
+            <a:avLst/>
+          </a:prstGeom>
+          <a:solidFill>
+            <a:srgbClr val="009CD6"/>
+          </a:solidFill>
+          <a:ln>
+            <a:noFill/>
+          </a:ln>
+          <a:effectLst/>
+        </p:spPr>
+        <p:style>
+          <a:lnRef idx="1">
+            <a:schemeClr val="accent1"/>
+          </a:lnRef>
+          <a:fillRef idx="3">
+            <a:schemeClr val="accent1"/>
+          </a:fillRef>
+          <a:effectRef idx="2">
+            <a:schemeClr val="accent1"/>
+          </a:effectRef>
+          <a:fontRef idx="minor">
+            <a:schemeClr val="lt1"/>
+          </a:fontRef>
+        </p:style>
+        <p:txBody>
+          <a:bodyPr rtlCol="0" anchor="ctr" lIns="0" rIns="0" tIns="0" bIns="0" wrap="square"/>
+          <a:lstStyle/>
+          <a:p>
+            <a:pPr algn="ctr"/>
+            <a:r>
+              <a:rPr sz="1300" b="1" i="0">
+                <a:solidFill>
+                  <a:srgbClr val="FFFFFF"/>
+                </a:solidFill>
+                <a:latin typeface="Arial"/>
+              </a:rPr>
+              <a:t>2</a:t>
+            </a:r>
+          </a:p>
+        </p:txBody>
+      </p:sp>
+      <p:sp>
+        <p:nvSpPr>
+          <p:cNvPr id="8" name="TextBox 7"/>
+          <p:cNvSpPr txBox="1"/>
+          <p:nvPr/>
+        </p:nvSpPr>
+        <p:spPr>
+          <a:xfrm>
+            <a:off x="1115568" y="2368296"/>
+            <a:ext cx="10527487" cy="950976"/>
+          </a:xfrm>
+          <a:prstGeom prst="rect">
+            <a:avLst/>
+          </a:prstGeom>
+          <a:noFill/>
+        </p:spPr>
+        <p:txBody>
+          <a:bodyPr wrap="square">
+            <a:spAutoFit/>
+          </a:bodyPr>
+          <a:lstStyle/>
+          <a:p>
+            <a:pPr>
+              <a:spcAft>
+                <a:spcPts val="300"/>
+              </a:spcAft>
+            </a:pPr>
+            <a:r>
+              <a:rPr sz="1750" b="1" i="0">
+                <a:solidFill>
+                  <a:srgbClr val="1A1A1A"/>
+                </a:solidFill>
+                <a:latin typeface="Arial"/>
+              </a:rPr>
+              <a:t>Plain words for the basic terms</a:t>
+            </a:r>
+          </a:p>
+          <a:p>
+            <a:pPr>
+              <a:spcAft>
+                <a:spcPts val="300"/>
+              </a:spcAft>
+            </a:pPr>
+            <a:r>
+              <a:rPr sz="1350" b="0" i="0">
+                <a:solidFill>
+                  <a:srgbClr val="595959"/>
+                </a:solidFill>
+                <a:latin typeface="Arial"/>
+              </a:rPr>
+              <a:t>Capability. Service. Application. Data domain. Defined on day one.</a:t>
+            </a:r>
+          </a:p>
+        </p:txBody>
+      </p:sp>
+      <p:sp>
+        <p:nvSpPr>
+          <p:cNvPr id="9" name="Rectangle 8"/>
+          <p:cNvSpPr/>
+          <p:nvPr/>
+        </p:nvSpPr>
+        <p:spPr>
+          <a:xfrm>
+            <a:off x="621792" y="3323844"/>
+            <a:ext cx="10881360" cy="12700"/>
+          </a:xfrm>
+          <a:prstGeom prst="rect">
+            <a:avLst/>
+          </a:prstGeom>
+          <a:solidFill>
+            <a:srgbClr val="DDECF4"/>
+          </a:solidFill>
+          <a:ln>
+            <a:noFill/>
+          </a:ln>
+          <a:effectLst/>
+        </p:spPr>
+        <p:style>
+          <a:lnRef idx="1">
+            <a:schemeClr val="accent1"/>
+          </a:lnRef>
+          <a:fillRef idx="3">
+            <a:schemeClr val="accent1"/>
+          </a:fillRef>
+          <a:effectRef idx="2">
+            <a:schemeClr val="accent1"/>
+          </a:effectRef>
+          <a:fontRef idx="minor">
+            <a:schemeClr val="lt1"/>
+          </a:fontRef>
+        </p:style>
+        <p:txBody>
+          <a:bodyPr rtlCol="0" anchor="ctr"/>
+          <a:lstStyle/>
+          <a:p>
+            <a:pPr algn="ctr"/>
+          </a:p>
+        </p:txBody>
+      </p:sp>
+      <p:sp>
+        <p:nvSpPr>
+          <p:cNvPr id="10" name="Oval 9"/>
+          <p:cNvSpPr/>
+          <p:nvPr/>
+        </p:nvSpPr>
+        <p:spPr>
+          <a:xfrm>
+            <a:off x="621792" y="3410712"/>
+            <a:ext cx="310896" cy="310896"/>
+          </a:xfrm>
+          <a:prstGeom prst="ellipse">
+            <a:avLst/>
+          </a:prstGeom>
+          <a:solidFill>
+            <a:srgbClr val="009CD6"/>
+          </a:solidFill>
+          <a:ln>
+            <a:noFill/>
+          </a:ln>
+          <a:effectLst/>
+        </p:spPr>
+        <p:style>
+          <a:lnRef idx="1">
+            <a:schemeClr val="accent1"/>
+          </a:lnRef>
+          <a:fillRef idx="3">
+            <a:schemeClr val="accent1"/>
+          </a:fillRef>
+          <a:effectRef idx="2">
+            <a:schemeClr val="accent1"/>
+          </a:effectRef>
+          <a:fontRef idx="minor">
+            <a:schemeClr val="lt1"/>
+          </a:fontRef>
+        </p:style>
+        <p:txBody>
+          <a:bodyPr rtlCol="0" anchor="ctr" lIns="0" rIns="0" tIns="0" bIns="0" wrap="square"/>
+          <a:lstStyle/>
+          <a:p>
+            <a:pPr algn="ctr"/>
+            <a:r>
+              <a:rPr sz="1300" b="1" i="0">
+                <a:solidFill>
+                  <a:srgbClr val="FFFFFF"/>
+                </a:solidFill>
+                <a:latin typeface="Arial"/>
+              </a:rPr>
+              <a:t>3</a:t>
+            </a:r>
+          </a:p>
+        </p:txBody>
+      </p:sp>
+      <p:sp>
+        <p:nvSpPr>
+          <p:cNvPr id="11" name="TextBox 10"/>
+          <p:cNvSpPr txBox="1"/>
+          <p:nvPr/>
+        </p:nvSpPr>
+        <p:spPr>
+          <a:xfrm>
+            <a:off x="1115568" y="3364992"/>
+            <a:ext cx="10527487" cy="950976"/>
+          </a:xfrm>
+          <a:prstGeom prst="rect">
+            <a:avLst/>
+          </a:prstGeom>
+          <a:noFill/>
+        </p:spPr>
+        <p:txBody>
+          <a:bodyPr wrap="square">
+            <a:spAutoFit/>
+          </a:bodyPr>
+          <a:lstStyle/>
+          <a:p>
+            <a:pPr>
+              <a:spcAft>
+                <a:spcPts val="300"/>
+              </a:spcAft>
+            </a:pPr>
+            <a:r>
+              <a:rPr sz="1750" b="1" i="0">
+                <a:solidFill>
+                  <a:srgbClr val="1A1A1A"/>
+                </a:solidFill>
+                <a:latin typeface="Arial"/>
+              </a:rPr>
+              <a:t>A library of common building blocks</a:t>
+            </a:r>
+          </a:p>
+          <a:p>
+            <a:pPr>
+              <a:spcAft>
+                <a:spcPts val="300"/>
+              </a:spcAft>
+            </a:pPr>
+            <a:r>
+              <a:rPr sz="1350" b="0" i="0">
+                <a:solidFill>
+                  <a:srgbClr val="595959"/>
+                </a:solidFill>
+                <a:latin typeface="Arial"/>
+              </a:rPr>
+              <a:t>Identity, payments, information sharing, registries — published specifications with working examples.</a:t>
+            </a:r>
+          </a:p>
+        </p:txBody>
+      </p:sp>
+      <p:sp>
+        <p:nvSpPr>
+          <p:cNvPr id="12" name="Rectangle 11"/>
+          <p:cNvSpPr/>
+          <p:nvPr/>
+        </p:nvSpPr>
+        <p:spPr>
+          <a:xfrm>
+            <a:off x="621792" y="4320540"/>
+            <a:ext cx="10881360" cy="12700"/>
+          </a:xfrm>
+          <a:prstGeom prst="rect">
+            <a:avLst/>
+          </a:prstGeom>
+          <a:solidFill>
+            <a:srgbClr val="DDECF4"/>
+          </a:solidFill>
+          <a:ln>
+            <a:noFill/>
+          </a:ln>
+          <a:effectLst/>
+        </p:spPr>
+        <p:style>
+          <a:lnRef idx="1">
+            <a:schemeClr val="accent1"/>
+          </a:lnRef>
+          <a:fillRef idx="3">
+            <a:schemeClr val="accent1"/>
+          </a:fillRef>
+          <a:effectRef idx="2">
+            <a:schemeClr val="accent1"/>
+          </a:effectRef>
+          <a:fontRef idx="minor">
+            <a:schemeClr val="lt1"/>
+          </a:fontRef>
+        </p:style>
+        <p:txBody>
+          <a:bodyPr rtlCol="0" anchor="ctr"/>
+          <a:lstStyle/>
+          <a:p>
+            <a:pPr algn="ctr"/>
+          </a:p>
+        </p:txBody>
+      </p:sp>
+      <p:sp>
+        <p:nvSpPr>
+          <p:cNvPr id="13" name="Oval 12"/>
+          <p:cNvSpPr/>
+          <p:nvPr/>
+        </p:nvSpPr>
+        <p:spPr>
+          <a:xfrm>
+            <a:off x="621792" y="4407408"/>
+            <a:ext cx="310896" cy="310896"/>
+          </a:xfrm>
+          <a:prstGeom prst="ellipse">
+            <a:avLst/>
+          </a:prstGeom>
+          <a:solidFill>
+            <a:srgbClr val="009CD6"/>
+          </a:solidFill>
+          <a:ln>
+            <a:noFill/>
+          </a:ln>
+          <a:effectLst/>
+        </p:spPr>
+        <p:style>
+          <a:lnRef idx="1">
+            <a:schemeClr val="accent1"/>
+          </a:lnRef>
+          <a:fillRef idx="3">
+            <a:schemeClr val="accent1"/>
+          </a:fillRef>
+          <a:effectRef idx="2">
+            <a:schemeClr val="accent1"/>
+          </a:effectRef>
+          <a:fontRef idx="minor">
+            <a:schemeClr val="lt1"/>
+          </a:fontRef>
+        </p:style>
+        <p:txBody>
+          <a:bodyPr rtlCol="0" anchor="ctr" lIns="0" rIns="0" tIns="0" bIns="0" wrap="square"/>
+          <a:lstStyle/>
+          <a:p>
+            <a:pPr algn="ctr"/>
+            <a:r>
+              <a:rPr sz="1300" b="1" i="0">
+                <a:solidFill>
+                  <a:srgbClr val="FFFFFF"/>
+                </a:solidFill>
+                <a:latin typeface="Arial"/>
+              </a:rPr>
+              <a:t>4</a:t>
+            </a:r>
+          </a:p>
+        </p:txBody>
+      </p:sp>
+      <p:sp>
+        <p:nvSpPr>
+          <p:cNvPr id="14" name="TextBox 13"/>
+          <p:cNvSpPr txBox="1"/>
+          <p:nvPr/>
+        </p:nvSpPr>
+        <p:spPr>
+          <a:xfrm>
+            <a:off x="1115568" y="4361688"/>
+            <a:ext cx="10527487" cy="950976"/>
+          </a:xfrm>
+          <a:prstGeom prst="rect">
+            <a:avLst/>
+          </a:prstGeom>
+          <a:noFill/>
+        </p:spPr>
+        <p:txBody>
+          <a:bodyPr wrap="square">
+            <a:spAutoFit/>
+          </a:bodyPr>
+          <a:lstStyle/>
+          <a:p>
+            <a:pPr>
+              <a:spcAft>
+                <a:spcPts val="300"/>
+              </a:spcAft>
+            </a:pPr>
+            <a:r>
+              <a:rPr sz="1750" b="1" i="0">
+                <a:solidFill>
+                  <a:srgbClr val="1A1A1A"/>
+                </a:solidFill>
+                <a:latin typeface="Arial"/>
+              </a:rPr>
+              <a:t>Ten architectural principles</a:t>
+            </a:r>
+          </a:p>
+          <a:p>
+            <a:pPr>
+              <a:spcAft>
+                <a:spcPts val="300"/>
+              </a:spcAft>
+            </a:pPr>
+            <a:r>
+              <a:rPr sz="1350" b="0" i="0">
+                <a:solidFill>
+                  <a:srgbClr val="595959"/>
+                </a:solidFill>
+                <a:latin typeface="Arial"/>
+              </a:rPr>
+              <a:t>From rule of law to user-centred design — already debated across many countries. You extend them; you do not draft them.</a:t>
+            </a:r>
+          </a:p>
+        </p:txBody>
+      </p:sp>
+      <p:sp>
+        <p:nvSpPr>
+          <p:cNvPr id="15" name="Rectangle 14"/>
+          <p:cNvSpPr/>
+          <p:nvPr/>
+        </p:nvSpPr>
+        <p:spPr>
+          <a:xfrm>
+            <a:off x="621792" y="5317236"/>
+            <a:ext cx="10881360" cy="12700"/>
+          </a:xfrm>
+          <a:prstGeom prst="rect">
+            <a:avLst/>
+          </a:prstGeom>
+          <a:solidFill>
+            <a:srgbClr val="DDECF4"/>
+          </a:solidFill>
+          <a:ln>
+            <a:noFill/>
+          </a:ln>
+          <a:effectLst/>
+        </p:spPr>
+        <p:style>
+          <a:lnRef idx="1">
+            <a:schemeClr val="accent1"/>
+          </a:lnRef>
+          <a:fillRef idx="3">
+            <a:schemeClr val="accent1"/>
+          </a:fillRef>
+          <a:effectRef idx="2">
+            <a:schemeClr val="accent1"/>
+          </a:effectRef>
+          <a:fontRef idx="minor">
+            <a:schemeClr val="lt1"/>
+          </a:fontRef>
+        </p:style>
+        <p:txBody>
+          <a:bodyPr rtlCol="0" anchor="ctr"/>
+          <a:lstStyle/>
+          <a:p>
+            <a:pPr algn="ctr"/>
+          </a:p>
+        </p:txBody>
+      </p:sp>
+      <p:sp>
+        <p:nvSpPr>
+          <p:cNvPr id="16" name="Oval 15"/>
+          <p:cNvSpPr/>
+          <p:nvPr/>
+        </p:nvSpPr>
+        <p:spPr>
+          <a:xfrm>
+            <a:off x="621792" y="5404104"/>
+            <a:ext cx="310896" cy="310896"/>
+          </a:xfrm>
+          <a:prstGeom prst="ellipse">
+            <a:avLst/>
+          </a:prstGeom>
+          <a:solidFill>
+            <a:srgbClr val="009CD6"/>
+          </a:solidFill>
+          <a:ln>
+            <a:noFill/>
+          </a:ln>
+          <a:effectLst/>
+        </p:spPr>
+        <p:style>
+          <a:lnRef idx="1">
+            <a:schemeClr val="accent1"/>
+          </a:lnRef>
+          <a:fillRef idx="3">
+            <a:schemeClr val="accent1"/>
+          </a:fillRef>
+          <a:effectRef idx="2">
+            <a:schemeClr val="accent1"/>
+          </a:effectRef>
+          <a:fontRef idx="minor">
+            <a:schemeClr val="lt1"/>
+          </a:fontRef>
+        </p:style>
+        <p:txBody>
+          <a:bodyPr rtlCol="0" anchor="ctr" lIns="0" rIns="0" tIns="0" bIns="0" wrap="square"/>
+          <a:lstStyle/>
+          <a:p>
+            <a:pPr algn="ctr"/>
+            <a:r>
+              <a:rPr sz="1300" b="1" i="0">
+                <a:solidFill>
+                  <a:srgbClr val="FFFFFF"/>
+                </a:solidFill>
+                <a:latin typeface="Arial"/>
+              </a:rPr>
+              <a:t>5</a:t>
+            </a:r>
+          </a:p>
+        </p:txBody>
+      </p:sp>
+      <p:sp>
+        <p:nvSpPr>
+          <p:cNvPr id="17" name="TextBox 16"/>
+          <p:cNvSpPr txBox="1"/>
+          <p:nvPr/>
+        </p:nvSpPr>
+        <p:spPr>
+          <a:xfrm>
+            <a:off x="1115568" y="5358384"/>
+            <a:ext cx="10527487" cy="950976"/>
+          </a:xfrm>
+          <a:prstGeom prst="rect">
+            <a:avLst/>
+          </a:prstGeom>
+          <a:noFill/>
+        </p:spPr>
+        <p:txBody>
+          <a:bodyPr wrap="square">
+            <a:spAutoFit/>
+          </a:bodyPr>
+          <a:lstStyle/>
+          <a:p>
+            <a:pPr>
+              <a:spcAft>
+                <a:spcPts val="300"/>
+              </a:spcAft>
+            </a:pPr>
+            <a:r>
+              <a:rPr sz="1750" b="1" i="0">
+                <a:solidFill>
+                  <a:srgbClr val="1A1A1A"/>
+                </a:solidFill>
+                <a:latin typeface="Arial"/>
+              </a:rPr>
+              <a:t>A way to run the work</a:t>
+            </a:r>
+          </a:p>
+          <a:p>
+            <a:pPr>
+              <a:spcAft>
+                <a:spcPts val="300"/>
+              </a:spcAft>
+            </a:pPr>
+            <a:r>
+              <a:rPr sz="1350" b="0" i="0">
+                <a:solidFill>
+                  <a:srgbClr val="595959"/>
+                </a:solidFill>
+                <a:latin typeface="Arial"/>
+              </a:rPr>
+              <a:t>The lifecycle — Discover, Assess, Adapt, Plan, Execute &amp; Govern — with roles, decisions and sign-offs per phase. Next video.</a:t>
+            </a:r>
+          </a:p>
+        </p:txBody>
+      </p:sp>
+      <p:sp>
+        <p:nvSpPr>
+          <p:cNvPr id="18" name="TextBox 17"/>
+          <p:cNvSpPr txBox="1"/>
+          <p:nvPr/>
+        </p:nvSpPr>
+        <p:spPr>
+          <a:xfrm>
+            <a:off x="457200" y="6473952"/>
+            <a:ext cx="7772400" cy="292608"/>
+          </a:xfrm>
+          <a:prstGeom prst="rect">
+            <a:avLst/>
+          </a:prstGeom>
+          <a:noFill/>
+        </p:spPr>
+        <p:txBody>
+          <a:bodyPr wrap="square">
+            <a:spAutoFit/>
+          </a:bodyPr>
+          <a:lstStyle/>
+          <a:p>
+            <a:r>
+              <a:rPr sz="900" b="0" i="0">
+                <a:solidFill>
+                  <a:srgbClr val="595959"/>
+                </a:solidFill>
+                <a:latin typeface="Arial"/>
+              </a:rPr>
+              <a:t>1.5 · Why PAERA-anchored</a:t>
+            </a:r>
+          </a:p>
+        </p:txBody>
+      </p:sp>
+    </p:spTree>
+  </p:cSld>
+  <p:clrMapOvr>
+    <a:masterClrMapping/>
+  </p:clrMapOvr>
+</p:sld>
+</file>
+
+<file path=ppt/slides/slide38.xml><?xml version="1.0" encoding="utf-8"?>
+<p:sld xmlns:a="http://schemas.openxmlformats.org/drawingml/2006/main" xmlns:p="http://schemas.openxmlformats.org/presentationml/2006/main" xmlns:r="http://schemas.openxmlformats.org/officeDocument/2006/relationships">
+  <p:cSld>
+    <p:spTree>
+      <p:nvGrpSpPr>
+        <p:cNvPr id="1" name=""/>
+        <p:cNvGrpSpPr/>
+        <p:nvPr/>
+      </p:nvGrpSpPr>
+      <p:grpSpPr/>
+      <p:sp>
+        <p:nvSpPr>
+          <p:cNvPr id="2" name="Rectangle 1"/>
+          <p:cNvSpPr/>
+          <p:nvPr/>
+        </p:nvSpPr>
+        <p:spPr>
+          <a:xfrm>
+            <a:off x="457200" y="384048"/>
+            <a:ext cx="45720" cy="256032"/>
+          </a:xfrm>
+          <a:prstGeom prst="rect">
+            <a:avLst/>
+          </a:prstGeom>
+          <a:solidFill>
+            <a:srgbClr val="009CD6"/>
+          </a:solidFill>
+          <a:ln>
+            <a:noFill/>
+          </a:ln>
+          <a:effectLst/>
+        </p:spPr>
+        <p:style>
+          <a:lnRef idx="1">
+            <a:schemeClr val="accent1"/>
+          </a:lnRef>
+          <a:fillRef idx="3">
+            <a:schemeClr val="accent1"/>
+          </a:fillRef>
+          <a:effectRef idx="2">
+            <a:schemeClr val="accent1"/>
+          </a:effectRef>
+          <a:fontRef idx="minor">
+            <a:schemeClr val="lt1"/>
+          </a:fontRef>
+        </p:style>
+        <p:txBody>
+          <a:bodyPr rtlCol="0" anchor="ctr"/>
+          <a:lstStyle/>
+          <a:p>
+            <a:pPr algn="ctr"/>
+          </a:p>
+        </p:txBody>
+      </p:sp>
+      <p:sp>
+        <p:nvSpPr>
+          <p:cNvPr id="3" name="TextBox 2"/>
+          <p:cNvSpPr txBox="1"/>
+          <p:nvPr/>
+        </p:nvSpPr>
+        <p:spPr>
+          <a:xfrm>
+            <a:off x="621792" y="274320"/>
+            <a:ext cx="11247120" cy="914400"/>
+          </a:xfrm>
+          <a:prstGeom prst="rect">
+            <a:avLst/>
+          </a:prstGeom>
+          <a:noFill/>
+        </p:spPr>
+        <p:txBody>
+          <a:bodyPr wrap="square">
+            <a:spAutoFit/>
+          </a:bodyPr>
+          <a:lstStyle/>
+          <a:p>
+            <a:r>
+              <a:rPr sz="2800" b="1" i="0">
+                <a:solidFill>
+                  <a:srgbClr val="1A1A1A"/>
+                </a:solidFill>
+                <a:latin typeface="Arial"/>
+              </a:rPr>
+              <a:t>One framework — every sector reuses the investment</a:t>
+            </a:r>
+          </a:p>
+        </p:txBody>
+      </p:sp>
+      <p:sp>
+        <p:nvSpPr>
+          <p:cNvPr id="4" name="Rounded Rectangle 3"/>
+          <p:cNvSpPr/>
+          <p:nvPr/>
+        </p:nvSpPr>
+        <p:spPr>
+          <a:xfrm>
+            <a:off x="822960" y="2011680"/>
+            <a:ext cx="2514600" cy="914400"/>
+          </a:xfrm>
+          <a:prstGeom prst="roundRect">
+            <a:avLst>
+              <a:gd name="adj" fmla="val 4500"/>
+            </a:avLst>
+          </a:prstGeom>
+          <a:solidFill>
+            <a:srgbClr val="E5F5FB"/>
+          </a:solidFill>
+          <a:ln>
+            <a:noFill/>
+          </a:ln>
+          <a:effectLst/>
+        </p:spPr>
+        <p:style>
+          <a:lnRef idx="1">
+            <a:schemeClr val="accent1"/>
+          </a:lnRef>
+          <a:fillRef idx="3">
+            <a:schemeClr val="accent1"/>
+          </a:fillRef>
+          <a:effectRef idx="2">
+            <a:schemeClr val="accent1"/>
+          </a:effectRef>
+          <a:fontRef idx="minor">
+            <a:schemeClr val="lt1"/>
+          </a:fontRef>
+        </p:style>
+        <p:txBody>
+          <a:bodyPr rtlCol="0" anchor="ctr" wrap="square"/>
+          <a:lstStyle/>
+          <a:p>
+            <a:pPr algn="ctr"/>
+            <a:r>
+              <a:rPr sz="1600" b="1" i="0">
+                <a:solidFill>
+                  <a:srgbClr val="1A1A1A"/>
+                </a:solidFill>
+                <a:latin typeface="Arial"/>
+              </a:rPr>
+              <a:t>Education</a:t>
+            </a:r>
+          </a:p>
+        </p:txBody>
+      </p:sp>
+      <p:sp>
+        <p:nvSpPr>
+          <p:cNvPr id="5" name="Rounded Rectangle 4"/>
+          <p:cNvSpPr/>
+          <p:nvPr/>
+        </p:nvSpPr>
+        <p:spPr>
+          <a:xfrm>
+            <a:off x="3474720" y="2011680"/>
+            <a:ext cx="2514600" cy="914400"/>
+          </a:xfrm>
+          <a:prstGeom prst="roundRect">
+            <a:avLst>
+              <a:gd name="adj" fmla="val 4500"/>
+            </a:avLst>
+          </a:prstGeom>
+          <a:solidFill>
+            <a:srgbClr val="E5F5FB"/>
+          </a:solidFill>
+          <a:ln>
+            <a:noFill/>
+          </a:ln>
+          <a:effectLst/>
+        </p:spPr>
+        <p:style>
+          <a:lnRef idx="1">
+            <a:schemeClr val="accent1"/>
+          </a:lnRef>
+          <a:fillRef idx="3">
+            <a:schemeClr val="accent1"/>
+          </a:fillRef>
+          <a:effectRef idx="2">
+            <a:schemeClr val="accent1"/>
+          </a:effectRef>
+          <a:fontRef idx="minor">
+            <a:schemeClr val="lt1"/>
+          </a:fontRef>
+        </p:style>
+        <p:txBody>
+          <a:bodyPr rtlCol="0" anchor="ctr" wrap="square"/>
+          <a:lstStyle/>
+          <a:p>
+            <a:pPr algn="ctr"/>
+            <a:r>
+              <a:rPr sz="1600" b="1" i="0">
+                <a:solidFill>
+                  <a:srgbClr val="1A1A1A"/>
+                </a:solidFill>
+                <a:latin typeface="Arial"/>
+              </a:rPr>
+              <a:t>Health</a:t>
+            </a:r>
+          </a:p>
+        </p:txBody>
+      </p:sp>
+      <p:sp>
+        <p:nvSpPr>
+          <p:cNvPr id="6" name="Rounded Rectangle 5"/>
+          <p:cNvSpPr/>
+          <p:nvPr/>
+        </p:nvSpPr>
+        <p:spPr>
+          <a:xfrm>
+            <a:off x="6126480" y="2011680"/>
+            <a:ext cx="2514600" cy="914400"/>
+          </a:xfrm>
+          <a:prstGeom prst="roundRect">
+            <a:avLst>
+              <a:gd name="adj" fmla="val 4500"/>
+            </a:avLst>
+          </a:prstGeom>
+          <a:solidFill>
+            <a:srgbClr val="E5F5FB"/>
+          </a:solidFill>
+          <a:ln>
+            <a:noFill/>
+          </a:ln>
+          <a:effectLst/>
+        </p:spPr>
+        <p:style>
+          <a:lnRef idx="1">
+            <a:schemeClr val="accent1"/>
+          </a:lnRef>
+          <a:fillRef idx="3">
+            <a:schemeClr val="accent1"/>
+          </a:fillRef>
+          <a:effectRef idx="2">
+            <a:schemeClr val="accent1"/>
+          </a:effectRef>
+          <a:fontRef idx="minor">
+            <a:schemeClr val="lt1"/>
+          </a:fontRef>
+        </p:style>
+        <p:txBody>
+          <a:bodyPr rtlCol="0" anchor="ctr" wrap="square"/>
+          <a:lstStyle/>
+          <a:p>
+            <a:pPr algn="ctr"/>
+            <a:r>
+              <a:rPr sz="1600" b="1" i="0">
+                <a:solidFill>
+                  <a:srgbClr val="1A1A1A"/>
+                </a:solidFill>
+                <a:latin typeface="Arial"/>
+              </a:rPr>
+              <a:t>Social protection</a:t>
+            </a:r>
+          </a:p>
+        </p:txBody>
+      </p:sp>
+      <p:sp>
+        <p:nvSpPr>
+          <p:cNvPr id="7" name="Rounded Rectangle 6"/>
+          <p:cNvSpPr/>
+          <p:nvPr/>
+        </p:nvSpPr>
+        <p:spPr>
+          <a:xfrm>
+            <a:off x="8778240" y="2011680"/>
+            <a:ext cx="2514600" cy="914400"/>
+          </a:xfrm>
+          <a:prstGeom prst="roundRect">
+            <a:avLst>
+              <a:gd name="adj" fmla="val 4500"/>
+            </a:avLst>
+          </a:prstGeom>
+          <a:solidFill>
+            <a:srgbClr val="E5F5FB"/>
+          </a:solidFill>
+          <a:ln>
+            <a:noFill/>
+          </a:ln>
+          <a:effectLst/>
+        </p:spPr>
+        <p:style>
+          <a:lnRef idx="1">
+            <a:schemeClr val="accent1"/>
+          </a:lnRef>
+          <a:fillRef idx="3">
+            <a:schemeClr val="accent1"/>
+          </a:fillRef>
+          <a:effectRef idx="2">
+            <a:schemeClr val="accent1"/>
+          </a:effectRef>
+          <a:fontRef idx="minor">
+            <a:schemeClr val="lt1"/>
+          </a:fontRef>
+        </p:style>
+        <p:txBody>
+          <a:bodyPr rtlCol="0" anchor="ctr" wrap="square"/>
+          <a:lstStyle/>
+          <a:p>
+            <a:pPr algn="ctr"/>
+            <a:r>
+              <a:rPr sz="1600" b="1" i="0">
+                <a:solidFill>
+                  <a:srgbClr val="1A1A1A"/>
+                </a:solidFill>
+                <a:latin typeface="Arial"/>
+              </a:rPr>
+              <a:t>Agriculture</a:t>
+            </a:r>
+          </a:p>
+        </p:txBody>
+      </p:sp>
+      <p:sp>
+        <p:nvSpPr>
+          <p:cNvPr id="8" name="Rounded Rectangle 7"/>
+          <p:cNvSpPr/>
+          <p:nvPr/>
+        </p:nvSpPr>
+        <p:spPr>
+          <a:xfrm>
+            <a:off x="822960" y="3200400"/>
+            <a:ext cx="10469880" cy="914400"/>
+          </a:xfrm>
+          <a:prstGeom prst="roundRect">
+            <a:avLst>
+              <a:gd name="adj" fmla="val 4500"/>
+            </a:avLst>
+          </a:prstGeom>
+          <a:solidFill>
+            <a:srgbClr val="009CD6"/>
+          </a:solidFill>
+          <a:ln>
+            <a:noFill/>
+          </a:ln>
+          <a:effectLst/>
+        </p:spPr>
+        <p:style>
+          <a:lnRef idx="1">
+            <a:schemeClr val="accent1"/>
+          </a:lnRef>
+          <a:fillRef idx="3">
+            <a:schemeClr val="accent1"/>
+          </a:fillRef>
+          <a:effectRef idx="2">
+            <a:schemeClr val="accent1"/>
+          </a:effectRef>
+          <a:fontRef idx="minor">
+            <a:schemeClr val="lt1"/>
+          </a:fontRef>
+        </p:style>
+        <p:txBody>
+          <a:bodyPr rtlCol="0" anchor="ctr" wrap="square"/>
+          <a:lstStyle/>
+          <a:p>
+            <a:pPr algn="ctr"/>
+            <a:r>
+              <a:rPr sz="1800" b="1" i="0">
+                <a:solidFill>
+                  <a:srgbClr val="FFFFFF"/>
+                </a:solidFill>
+                <a:latin typeface="Arial"/>
+              </a:rPr>
+              <a:t>PAERA — the same framework underneath</a:t>
+            </a:r>
+          </a:p>
+        </p:txBody>
+      </p:sp>
+      <p:sp>
+        <p:nvSpPr>
+          <p:cNvPr id="9" name="TextBox 8"/>
+          <p:cNvSpPr txBox="1"/>
+          <p:nvPr/>
+        </p:nvSpPr>
+        <p:spPr>
+          <a:xfrm>
+            <a:off x="822960" y="4572000"/>
+            <a:ext cx="10515600" cy="1280160"/>
+          </a:xfrm>
+          <a:prstGeom prst="rect">
+            <a:avLst/>
+          </a:prstGeom>
+          <a:noFill/>
+        </p:spPr>
+        <p:txBody>
+          <a:bodyPr wrap="square">
+            <a:spAutoFit/>
+          </a:bodyPr>
+          <a:lstStyle/>
+          <a:p>
+            <a:pPr>
+              <a:spcAft>
+                <a:spcPts val="800"/>
+              </a:spcAft>
+            </a:pPr>
+            <a:r>
+              <a:rPr sz="1800" b="0" i="0">
+                <a:solidFill>
+                  <a:srgbClr val="1A1A1A"/>
+                </a:solidFill>
+                <a:latin typeface="Arial"/>
+              </a:rPr>
+              <a:t>Once your country builds the EA muscle for one sector, every next sector reuses the same investment.</a:t>
+            </a:r>
+          </a:p>
+          <a:p>
+            <a:pPr>
+              <a:spcAft>
+                <a:spcPts val="800"/>
+              </a:spcAft>
+            </a:pPr>
+            <a:r>
+              <a:rPr sz="1800" b="1" i="0">
+                <a:solidFill>
+                  <a:srgbClr val="006E96"/>
+                </a:solidFill>
+                <a:latin typeface="Arial"/>
+              </a:rPr>
+              <a:t>The second sector is cheaper than the first. The third is cheaper still.</a:t>
+            </a:r>
+          </a:p>
+        </p:txBody>
+      </p:sp>
+      <p:sp>
+        <p:nvSpPr>
+          <p:cNvPr id="10" name="TextBox 9"/>
+          <p:cNvSpPr txBox="1"/>
+          <p:nvPr/>
+        </p:nvSpPr>
+        <p:spPr>
+          <a:xfrm>
+            <a:off x="457200" y="6473952"/>
+            <a:ext cx="7772400" cy="292608"/>
+          </a:xfrm>
+          <a:prstGeom prst="rect">
+            <a:avLst/>
+          </a:prstGeom>
+          <a:noFill/>
+        </p:spPr>
+        <p:txBody>
+          <a:bodyPr wrap="square">
+            <a:spAutoFit/>
+          </a:bodyPr>
+          <a:lstStyle/>
+          <a:p>
+            <a:r>
+              <a:rPr sz="900" b="0" i="0">
+                <a:solidFill>
+                  <a:srgbClr val="595959"/>
+                </a:solidFill>
+                <a:latin typeface="Arial"/>
+              </a:rPr>
+              <a:t>1.5 · Why PAERA-anchored</a:t>
+            </a:r>
+          </a:p>
+        </p:txBody>
+      </p:sp>
+    </p:spTree>
+  </p:cSld>
+  <p:clrMapOvr>
+    <a:masterClrMapping/>
+  </p:clrMapOvr>
+</p:sld>
+</file>
+
+<file path=ppt/slides/slide39.xml><?xml version="1.0" encoding="utf-8"?>
+<p:sld xmlns:a="http://schemas.openxmlformats.org/drawingml/2006/main" xmlns:p="http://schemas.openxmlformats.org/presentationml/2006/main" xmlns:r="http://schemas.openxmlformats.org/officeDocument/2006/relationships">
+  <p:cSld>
+    <p:spTree>
+      <p:nvGrpSpPr>
+        <p:cNvPr id="1" name=""/>
+        <p:cNvGrpSpPr/>
+        <p:nvPr/>
+      </p:nvGrpSpPr>
+      <p:grpSpPr/>
+      <p:sp>
+        <p:nvSpPr>
+          <p:cNvPr id="2" name="Rectangle 1"/>
+          <p:cNvSpPr/>
+          <p:nvPr/>
+        </p:nvSpPr>
+        <p:spPr>
+          <a:xfrm>
+            <a:off x="457200" y="384048"/>
+            <a:ext cx="45720" cy="256032"/>
+          </a:xfrm>
+          <a:prstGeom prst="rect">
+            <a:avLst/>
+          </a:prstGeom>
+          <a:solidFill>
+            <a:srgbClr val="009CD6"/>
+          </a:solidFill>
+          <a:ln>
+            <a:noFill/>
+          </a:ln>
+          <a:effectLst/>
+        </p:spPr>
+        <p:style>
+          <a:lnRef idx="1">
+            <a:schemeClr val="accent1"/>
+          </a:lnRef>
+          <a:fillRef idx="3">
+            <a:schemeClr val="accent1"/>
+          </a:fillRef>
+          <a:effectRef idx="2">
+            <a:schemeClr val="accent1"/>
+          </a:effectRef>
+          <a:fontRef idx="minor">
+            <a:schemeClr val="lt1"/>
+          </a:fontRef>
+        </p:style>
+        <p:txBody>
+          <a:bodyPr rtlCol="0" anchor="ctr"/>
+          <a:lstStyle/>
+          <a:p>
+            <a:pPr algn="ctr"/>
+          </a:p>
+        </p:txBody>
+      </p:sp>
+      <p:sp>
+        <p:nvSpPr>
+          <p:cNvPr id="3" name="TextBox 2"/>
+          <p:cNvSpPr txBox="1"/>
+          <p:nvPr/>
+        </p:nvSpPr>
+        <p:spPr>
+          <a:xfrm>
+            <a:off x="621792" y="274320"/>
+            <a:ext cx="11247120" cy="914400"/>
+          </a:xfrm>
+          <a:prstGeom prst="rect">
+            <a:avLst/>
+          </a:prstGeom>
+          <a:noFill/>
+        </p:spPr>
+        <p:txBody>
+          <a:bodyPr wrap="square">
+            <a:spAutoFit/>
+          </a:bodyPr>
+          <a:lstStyle/>
+          <a:p>
+            <a:r>
+              <a:rPr sz="2800" b="1" i="0">
+                <a:solidFill>
+                  <a:srgbClr val="1A1A1A"/>
+                </a:solidFill>
+                <a:latin typeface="Arial"/>
+              </a:rPr>
+              <a:t>PAERA connects your team to a working network</a:t>
+            </a:r>
+          </a:p>
+        </p:txBody>
+      </p:sp>
+      <p:cxnSp>
+        <p:nvCxnSpPr>
+          <p:cNvPr id="4" name="Connector 3"/>
+          <p:cNvCxnSpPr/>
+          <p:nvPr/>
+        </p:nvCxnSpPr>
+        <p:spPr>
+          <a:xfrm>
+            <a:off x="2926079" y="2034540"/>
+            <a:ext cx="3172969" cy="1348740"/>
+          </a:xfrm>
+          <a:prstGeom prst="line">
+            <a:avLst/>
+          </a:prstGeom>
+          <a:ln w="15240">
+            <a:solidFill>
+              <a:srgbClr val="BFBFBF"/>
+            </a:solidFill>
+          </a:ln>
+        </p:spPr>
+        <p:style>
+          <a:lnRef idx="2">
+            <a:schemeClr val="accent1"/>
+          </a:lnRef>
+          <a:fillRef idx="0">
+            <a:schemeClr val="accent1"/>
+          </a:fillRef>
+          <a:effectRef idx="1">
+            <a:schemeClr val="accent1"/>
+          </a:effectRef>
+          <a:fontRef idx="minor">
+            <a:schemeClr val="tx1"/>
+          </a:fontRef>
+        </p:style>
+      </p:cxnSp>
+      <p:cxnSp>
+        <p:nvCxnSpPr>
+          <p:cNvPr id="5" name="Connector 4"/>
+          <p:cNvCxnSpPr/>
+          <p:nvPr/>
+        </p:nvCxnSpPr>
+        <p:spPr>
+          <a:xfrm flipH="1">
+            <a:off x="6099048" y="2034540"/>
+            <a:ext cx="2953511" cy="1348740"/>
+          </a:xfrm>
+          <a:prstGeom prst="line">
+            <a:avLst/>
+          </a:prstGeom>
+          <a:ln w="15240">
+            <a:solidFill>
+              <a:srgbClr val="BFBFBF"/>
+            </a:solidFill>
+          </a:ln>
+        </p:spPr>
+        <p:style>
+          <a:lnRef idx="2">
+            <a:schemeClr val="accent1"/>
+          </a:lnRef>
+          <a:fillRef idx="0">
+            <a:schemeClr val="accent1"/>
+          </a:fillRef>
+          <a:effectRef idx="1">
+            <a:schemeClr val="accent1"/>
+          </a:effectRef>
+          <a:fontRef idx="minor">
+            <a:schemeClr val="tx1"/>
+          </a:fontRef>
+        </p:style>
+      </p:cxnSp>
+      <p:cxnSp>
+        <p:nvCxnSpPr>
+          <p:cNvPr id="6" name="Connector 5"/>
+          <p:cNvCxnSpPr/>
+          <p:nvPr/>
+        </p:nvCxnSpPr>
+        <p:spPr>
+          <a:xfrm flipV="1">
+            <a:off x="2926079" y="3383280"/>
+            <a:ext cx="3172969" cy="1623060"/>
+          </a:xfrm>
+          <a:prstGeom prst="line">
+            <a:avLst/>
+          </a:prstGeom>
+          <a:ln w="15240">
+            <a:solidFill>
+              <a:srgbClr val="BFBFBF"/>
+            </a:solidFill>
+          </a:ln>
+        </p:spPr>
+        <p:style>
+          <a:lnRef idx="2">
+            <a:schemeClr val="accent1"/>
+          </a:lnRef>
+          <a:fillRef idx="0">
+            <a:schemeClr val="accent1"/>
+          </a:fillRef>
+          <a:effectRef idx="1">
+            <a:schemeClr val="accent1"/>
+          </a:effectRef>
+          <a:fontRef idx="minor">
+            <a:schemeClr val="tx1"/>
+          </a:fontRef>
+        </p:style>
+      </p:cxnSp>
+      <p:cxnSp>
+        <p:nvCxnSpPr>
+          <p:cNvPr id="7" name="Connector 6"/>
+          <p:cNvCxnSpPr/>
+          <p:nvPr/>
+        </p:nvCxnSpPr>
+        <p:spPr>
+          <a:xfrm flipH="1" flipV="1">
+            <a:off x="6099048" y="3383280"/>
+            <a:ext cx="2953511" cy="1623060"/>
+          </a:xfrm>
+          <a:prstGeom prst="line">
+            <a:avLst/>
+          </a:prstGeom>
+          <a:ln w="15240">
+            <a:solidFill>
+              <a:srgbClr val="BFBFBF"/>
+            </a:solidFill>
+          </a:ln>
+        </p:spPr>
+        <p:style>
+          <a:lnRef idx="2">
+            <a:schemeClr val="accent1"/>
+          </a:lnRef>
+          <a:fillRef idx="0">
+            <a:schemeClr val="accent1"/>
+          </a:fillRef>
+          <a:effectRef idx="1">
+            <a:schemeClr val="accent1"/>
+          </a:effectRef>
+          <a:fontRef idx="minor">
+            <a:schemeClr val="tx1"/>
+          </a:fontRef>
+        </p:style>
+      </p:cxnSp>
+      <p:cxnSp>
+        <p:nvCxnSpPr>
+          <p:cNvPr id="8" name="Connector 7"/>
+          <p:cNvCxnSpPr/>
+          <p:nvPr/>
+        </p:nvCxnSpPr>
+        <p:spPr>
+          <a:xfrm flipH="1" flipV="1">
+            <a:off x="6099048" y="3383280"/>
+            <a:ext cx="27432" cy="2446020"/>
+          </a:xfrm>
+          <a:prstGeom prst="line">
+            <a:avLst/>
+          </a:prstGeom>
+          <a:ln w="15240">
+            <a:solidFill>
+              <a:srgbClr val="BFBFBF"/>
+            </a:solidFill>
+          </a:ln>
+        </p:spPr>
+        <p:style>
+          <a:lnRef idx="2">
+            <a:schemeClr val="accent1"/>
+          </a:lnRef>
+          <a:fillRef idx="0">
+            <a:schemeClr val="accent1"/>
+          </a:fillRef>
+          <a:effectRef idx="1">
+            <a:schemeClr val="accent1"/>
+          </a:effectRef>
+          <a:fontRef idx="minor">
+            <a:schemeClr val="tx1"/>
+          </a:fontRef>
+        </p:style>
+      </p:cxnSp>
+      <p:sp>
+        <p:nvSpPr>
+          <p:cNvPr id="9" name="Rounded Rectangle 8"/>
+          <p:cNvSpPr/>
+          <p:nvPr/>
+        </p:nvSpPr>
+        <p:spPr>
+          <a:xfrm>
+            <a:off x="822960" y="1600200"/>
+            <a:ext cx="4206240" cy="868680"/>
+          </a:xfrm>
+          <a:prstGeom prst="roundRect">
+            <a:avLst>
+              <a:gd name="adj" fmla="val 4500"/>
+            </a:avLst>
+          </a:prstGeom>
+          <a:solidFill>
+            <a:srgbClr val="E5F5FB"/>
+          </a:solidFill>
+          <a:ln>
+            <a:noFill/>
+          </a:ln>
+          <a:effectLst/>
+        </p:spPr>
+        <p:style>
+          <a:lnRef idx="1">
+            <a:schemeClr val="accent1"/>
+          </a:lnRef>
+          <a:fillRef idx="3">
+            <a:schemeClr val="accent1"/>
+          </a:fillRef>
+          <a:effectRef idx="2">
+            <a:schemeClr val="accent1"/>
+          </a:effectRef>
+          <a:fontRef idx="minor">
+            <a:schemeClr val="lt1"/>
+          </a:fontRef>
+        </p:style>
+        <p:txBody>
+          <a:bodyPr rtlCol="0" anchor="ctr" lIns="137160" wrap="square"/>
+          <a:lstStyle/>
+          <a:p>
+            <a:pPr algn="ctr"/>
+            <a:r>
+              <a:rPr sz="1450" b="1" i="0">
+                <a:solidFill>
+                  <a:srgbClr val="1A1A1A"/>
+                </a:solidFill>
+                <a:latin typeface="Arial"/>
+              </a:rPr>
+              <a:t>Building Block specifications</a:t>
+            </a:r>
+          </a:p>
+        </p:txBody>
+      </p:sp>
+      <p:sp>
+        <p:nvSpPr>
+          <p:cNvPr id="10" name="Rounded Rectangle 9"/>
+          <p:cNvSpPr/>
+          <p:nvPr/>
+        </p:nvSpPr>
+        <p:spPr>
+          <a:xfrm>
+            <a:off x="6949440" y="1600200"/>
+            <a:ext cx="4206240" cy="868680"/>
+          </a:xfrm>
+          <a:prstGeom prst="roundRect">
+            <a:avLst>
+              <a:gd name="adj" fmla="val 4500"/>
+            </a:avLst>
+          </a:prstGeom>
+          <a:solidFill>
+            <a:srgbClr val="E5F5FB"/>
+          </a:solidFill>
+          <a:ln>
+            <a:noFill/>
+          </a:ln>
+          <a:effectLst/>
+        </p:spPr>
+        <p:style>
+          <a:lnRef idx="1">
+            <a:schemeClr val="accent1"/>
+          </a:lnRef>
+          <a:fillRef idx="3">
+            <a:schemeClr val="accent1"/>
+          </a:fillRef>
+          <a:effectRef idx="2">
+            <a:schemeClr val="accent1"/>
+          </a:effectRef>
+          <a:fontRef idx="minor">
+            <a:schemeClr val="lt1"/>
+          </a:fontRef>
+        </p:style>
+        <p:txBody>
+          <a:bodyPr rtlCol="0" anchor="ctr" lIns="137160" wrap="square"/>
+          <a:lstStyle/>
+          <a:p>
+            <a:pPr algn="ctr"/>
+            <a:r>
+              <a:rPr sz="1450" b="1" i="0">
+                <a:solidFill>
+                  <a:srgbClr val="1A1A1A"/>
+                </a:solidFill>
+                <a:latin typeface="Arial"/>
+              </a:rPr>
+              <a:t>GovMarket — compliance-checked implementations</a:t>
+            </a:r>
+          </a:p>
+        </p:txBody>
+      </p:sp>
+      <p:sp>
+        <p:nvSpPr>
+          <p:cNvPr id="11" name="Rounded Rectangle 10"/>
+          <p:cNvSpPr/>
+          <p:nvPr/>
+        </p:nvSpPr>
+        <p:spPr>
+          <a:xfrm>
+            <a:off x="822960" y="4572000"/>
+            <a:ext cx="4206240" cy="868680"/>
+          </a:xfrm>
+          <a:prstGeom prst="roundRect">
+            <a:avLst>
+              <a:gd name="adj" fmla="val 4500"/>
+            </a:avLst>
+          </a:prstGeom>
+          <a:solidFill>
+            <a:srgbClr val="E5F5FB"/>
+          </a:solidFill>
+          <a:ln>
+            <a:noFill/>
+          </a:ln>
+          <a:effectLst/>
+        </p:spPr>
+        <p:style>
+          <a:lnRef idx="1">
+            <a:schemeClr val="accent1"/>
+          </a:lnRef>
+          <a:fillRef idx="3">
+            <a:schemeClr val="accent1"/>
+          </a:fillRef>
+          <a:effectRef idx="2">
+            <a:schemeClr val="accent1"/>
+          </a:effectRef>
+          <a:fontRef idx="minor">
+            <a:schemeClr val="lt1"/>
+          </a:fontRef>
+        </p:style>
+        <p:txBody>
+          <a:bodyPr rtlCol="0" anchor="ctr" lIns="137160" wrap="square"/>
+          <a:lstStyle/>
+          <a:p>
+            <a:pPr algn="ctr"/>
+            <a:r>
+              <a:rPr sz="1450" b="1" i="0">
+                <a:solidFill>
+                  <a:srgbClr val="1A1A1A"/>
+                </a:solidFill>
+                <a:latin typeface="Arial"/>
+              </a:rPr>
+              <a:t>Certification programme</a:t>
+            </a:r>
+          </a:p>
+        </p:txBody>
+      </p:sp>
+      <p:sp>
+        <p:nvSpPr>
+          <p:cNvPr id="12" name="Rounded Rectangle 11"/>
+          <p:cNvSpPr/>
+          <p:nvPr/>
+        </p:nvSpPr>
+        <p:spPr>
+          <a:xfrm>
+            <a:off x="6949440" y="4572000"/>
+            <a:ext cx="4206240" cy="868680"/>
+          </a:xfrm>
+          <a:prstGeom prst="roundRect">
+            <a:avLst>
+              <a:gd name="adj" fmla="val 4500"/>
+            </a:avLst>
+          </a:prstGeom>
+          <a:solidFill>
+            <a:srgbClr val="E5F5FB"/>
+          </a:solidFill>
+          <a:ln>
+            <a:noFill/>
+          </a:ln>
+          <a:effectLst/>
+        </p:spPr>
+        <p:style>
+          <a:lnRef idx="1">
+            <a:schemeClr val="accent1"/>
+          </a:lnRef>
+          <a:fillRef idx="3">
+            <a:schemeClr val="accent1"/>
+          </a:fillRef>
+          <a:effectRef idx="2">
+            <a:schemeClr val="accent1"/>
+          </a:effectRef>
+          <a:fontRef idx="minor">
+            <a:schemeClr val="lt1"/>
+          </a:fontRef>
+        </p:style>
+        <p:txBody>
+          <a:bodyPr rtlCol="0" anchor="ctr" lIns="137160" wrap="square"/>
+          <a:lstStyle/>
+          <a:p>
+            <a:pPr algn="ctr"/>
+            <a:r>
+              <a:rPr sz="1450" b="1" i="0">
+                <a:solidFill>
+                  <a:srgbClr val="1A1A1A"/>
+                </a:solidFill>
+                <a:latin typeface="Arial"/>
+              </a:rPr>
+              <a:t>Sandbox for prototyping</a:t>
+            </a:r>
+          </a:p>
+        </p:txBody>
+      </p:sp>
+      <p:sp>
+        <p:nvSpPr>
+          <p:cNvPr id="13" name="Rounded Rectangle 12"/>
+          <p:cNvSpPr/>
+          <p:nvPr/>
+        </p:nvSpPr>
+        <p:spPr>
+          <a:xfrm>
+            <a:off x="4023360" y="5394960"/>
+            <a:ext cx="4206240" cy="868680"/>
+          </a:xfrm>
+          <a:prstGeom prst="roundRect">
+            <a:avLst>
+              <a:gd name="adj" fmla="val 4500"/>
+            </a:avLst>
+          </a:prstGeom>
+          <a:solidFill>
+            <a:srgbClr val="E5F5FB"/>
+          </a:solidFill>
+          <a:ln>
+            <a:noFill/>
+          </a:ln>
+          <a:effectLst/>
+        </p:spPr>
+        <p:style>
+          <a:lnRef idx="1">
+            <a:schemeClr val="accent1"/>
+          </a:lnRef>
+          <a:fillRef idx="3">
+            <a:schemeClr val="accent1"/>
+          </a:fillRef>
+          <a:effectRef idx="2">
+            <a:schemeClr val="accent1"/>
+          </a:effectRef>
+          <a:fontRef idx="minor">
+            <a:schemeClr val="lt1"/>
+          </a:fontRef>
+        </p:style>
+        <p:txBody>
+          <a:bodyPr rtlCol="0" anchor="ctr" lIns="137160" wrap="square"/>
+          <a:lstStyle/>
+          <a:p>
+            <a:pPr algn="ctr"/>
+            <a:r>
+              <a:rPr sz="1450" b="1" i="0">
+                <a:solidFill>
+                  <a:srgbClr val="1A1A1A"/>
+                </a:solidFill>
+                <a:latin typeface="Arial"/>
+              </a:rPr>
+              <a:t>Shared knowledge base</a:t>
+            </a:r>
+          </a:p>
+        </p:txBody>
+      </p:sp>
+      <p:sp>
+        <p:nvSpPr>
+          <p:cNvPr id="14" name="Rounded Rectangle 13"/>
+          <p:cNvSpPr/>
+          <p:nvPr/>
+        </p:nvSpPr>
+        <p:spPr>
+          <a:xfrm>
+            <a:off x="4818888" y="2880360"/>
+            <a:ext cx="2560320" cy="1005840"/>
+          </a:xfrm>
+          <a:prstGeom prst="roundRect">
+            <a:avLst>
+              <a:gd name="adj" fmla="val 4500"/>
+            </a:avLst>
+          </a:prstGeom>
+          <a:solidFill>
+            <a:srgbClr val="009CD6"/>
+          </a:solidFill>
+          <a:ln>
+            <a:noFill/>
+          </a:ln>
+          <a:effectLst/>
+        </p:spPr>
+        <p:style>
+          <a:lnRef idx="1">
+            <a:schemeClr val="accent1"/>
+          </a:lnRef>
+          <a:fillRef idx="3">
+            <a:schemeClr val="accent1"/>
+          </a:fillRef>
+          <a:effectRef idx="2">
+            <a:schemeClr val="accent1"/>
+          </a:effectRef>
+          <a:fontRef idx="minor">
+            <a:schemeClr val="lt1"/>
+          </a:fontRef>
+        </p:style>
+        <p:txBody>
+          <a:bodyPr rtlCol="0" anchor="ctr" wrap="square"/>
+          <a:lstStyle/>
+          <a:p>
+            <a:pPr algn="ctr"/>
+            <a:r>
+              <a:rPr sz="2200" b="1" i="0">
+                <a:solidFill>
+                  <a:srgbClr val="FFFFFF"/>
+                </a:solidFill>
+                <a:latin typeface="Arial"/>
+              </a:rPr>
+              <a:t>PAERA</a:t>
+            </a:r>
+          </a:p>
+        </p:txBody>
+      </p:sp>
+      <p:sp>
+        <p:nvSpPr>
+          <p:cNvPr id="15" name="TextBox 14"/>
+          <p:cNvSpPr txBox="1"/>
+          <p:nvPr/>
+        </p:nvSpPr>
+        <p:spPr>
+          <a:xfrm>
+            <a:off x="457200" y="6473952"/>
+            <a:ext cx="7772400" cy="292608"/>
+          </a:xfrm>
+          <a:prstGeom prst="rect">
+            <a:avLst/>
+          </a:prstGeom>
+          <a:noFill/>
+        </p:spPr>
+        <p:txBody>
+          <a:bodyPr wrap="square">
+            <a:spAutoFit/>
+          </a:bodyPr>
+          <a:lstStyle/>
+          <a:p>
+            <a:r>
+              <a:rPr sz="900" b="0" i="0">
+                <a:solidFill>
+                  <a:srgbClr val="595959"/>
+                </a:solidFill>
+                <a:latin typeface="Arial"/>
+              </a:rPr>
+              <a:t>1.5 · Why PAERA-anchored</a:t>
+            </a:r>
+          </a:p>
+        </p:txBody>
+      </p:sp>
+    </p:spTree>
+  </p:cSld>
+  <p:clrMapOvr>
+    <a:masterClrMapping/>
+  </p:clrMapOvr>
+</p:sld>
+</file>
+
+<file path=ppt/slides/slide40.xml><?xml version="1.0" encoding="utf-8"?>
+<p:sld xmlns:a="http://schemas.openxmlformats.org/drawingml/2006/main" xmlns:p="http://schemas.openxmlformats.org/presentationml/2006/main" xmlns:r="http://schemas.openxmlformats.org/officeDocument/2006/relationships">
+  <p:cSld>
+    <p:spTree>
+      <p:nvGrpSpPr>
+        <p:cNvPr id="1" name=""/>
+        <p:cNvGrpSpPr/>
+        <p:nvPr/>
+      </p:nvGrpSpPr>
+      <p:grpSpPr/>
+      <p:sp>
+        <p:nvSpPr>
+          <p:cNvPr id="2" name="TextBox 1"/>
+          <p:cNvSpPr txBox="1"/>
+          <p:nvPr/>
+        </p:nvSpPr>
+        <p:spPr>
+          <a:xfrm>
             <a:off x="1005840" y="1783080"/>
             <a:ext cx="10149840" cy="2377440"/>
           </a:xfrm>
@@ -15298,7 +14620,7 @@
 </p:sld>
 </file>
 
-<file path=ppt/slides/slide36.xml><?xml version="1.0" encoding="utf-8"?>
+<file path=ppt/slides/slide41.xml><?xml version="1.0" encoding="utf-8"?>
 <p:sld xmlns:a="http://schemas.openxmlformats.org/drawingml/2006/main" xmlns:p="http://schemas.openxmlformats.org/presentationml/2006/main" xmlns:r="http://schemas.openxmlformats.org/officeDocument/2006/relationships">
   <p:cSld>
     <p:spTree>

--- a/10-Knowledge-Products/KP1-GEA/videos/module_1/en/decks/KP1_M1_1.5_Deck_v0.2.pptx
+++ b/10-Knowledge-Products/KP1-GEA/videos/module_1/en/decks/KP1_M1_1.5_Deck_v0.2.pptx
@@ -11677,7 +11677,7 @@
                 </a:solidFill>
                 <a:latin typeface="Arial"/>
               </a:rPr>
-              <a:t>KP1 · MODULE 1 · VIDEO 1.5</a:t>
+              <a:t>MODULE 1 · VIDEO 1.5</a:t>
             </a:r>
           </a:p>
         </p:txBody>
